--- a/6th Sem/Data mining and warehouse/Unit_3_new.pptx
+++ b/6th Sem/Data mining and warehouse/Unit_3_new.pptx
@@ -1,50 +1,49 @@
 
 <file path=ppt/presentation.xml><?xml version="1.0" encoding="utf-8"?>
-<p:presentation xmlns:a="http://schemas.openxmlformats.org/drawingml/2006/main" xmlns:r="http://schemas.openxmlformats.org/officeDocument/2006/relationships" xmlns:p="http://schemas.openxmlformats.org/presentationml/2006/main" saveSubsetFonts="1">
+<p:presentation xmlns:a="http://schemas.openxmlformats.org/drawingml/2006/main" xmlns:r="http://schemas.openxmlformats.org/officeDocument/2006/relationships" xmlns:p="http://schemas.openxmlformats.org/presentationml/2006/main">
   <p:sldMasterIdLst>
     <p:sldMasterId id="2147483648" r:id="rId1"/>
   </p:sldMasterIdLst>
   <p:sldIdLst>
-    <p:sldId id="256" r:id="rId2"/>
-    <p:sldId id="260" r:id="rId3"/>
-    <p:sldId id="261" r:id="rId4"/>
-    <p:sldId id="262" r:id="rId5"/>
-    <p:sldId id="263" r:id="rId6"/>
-    <p:sldId id="264" r:id="rId7"/>
-    <p:sldId id="265" r:id="rId8"/>
-    <p:sldId id="266" r:id="rId9"/>
-    <p:sldId id="267" r:id="rId10"/>
-    <p:sldId id="268" r:id="rId11"/>
-    <p:sldId id="269" r:id="rId12"/>
-    <p:sldId id="270" r:id="rId13"/>
-    <p:sldId id="271" r:id="rId14"/>
-    <p:sldId id="272" r:id="rId15"/>
-    <p:sldId id="273" r:id="rId16"/>
-    <p:sldId id="274" r:id="rId17"/>
-    <p:sldId id="275" r:id="rId18"/>
-    <p:sldId id="276" r:id="rId19"/>
-    <p:sldId id="277" r:id="rId20"/>
-    <p:sldId id="278" r:id="rId21"/>
-    <p:sldId id="279" r:id="rId22"/>
-    <p:sldId id="280" r:id="rId23"/>
-    <p:sldId id="282" r:id="rId24"/>
-    <p:sldId id="283" r:id="rId25"/>
-    <p:sldId id="284" r:id="rId26"/>
-    <p:sldId id="285" r:id="rId27"/>
-    <p:sldId id="286" r:id="rId28"/>
-    <p:sldId id="295" r:id="rId29"/>
-    <p:sldId id="296" r:id="rId30"/>
-    <p:sldId id="297" r:id="rId31"/>
-    <p:sldId id="298" r:id="rId32"/>
-    <p:sldId id="287" r:id="rId33"/>
-    <p:sldId id="288" r:id="rId34"/>
-    <p:sldId id="289" r:id="rId35"/>
-    <p:sldId id="294" r:id="rId36"/>
-    <p:sldId id="291" r:id="rId37"/>
-    <p:sldId id="292" r:id="rId38"/>
-    <p:sldId id="293" r:id="rId39"/>
-    <p:sldId id="299" r:id="rId40"/>
-    <p:sldId id="281" r:id="rId41"/>
+    <p:sldId id="256" r:id="rId3"/>
+    <p:sldId id="260" r:id="rId4"/>
+    <p:sldId id="261" r:id="rId5"/>
+    <p:sldId id="262" r:id="rId6"/>
+    <p:sldId id="263" r:id="rId7"/>
+    <p:sldId id="264" r:id="rId8"/>
+    <p:sldId id="265" r:id="rId9"/>
+    <p:sldId id="266" r:id="rId10"/>
+    <p:sldId id="267" r:id="rId11"/>
+    <p:sldId id="268" r:id="rId12"/>
+    <p:sldId id="269" r:id="rId13"/>
+    <p:sldId id="270" r:id="rId14"/>
+    <p:sldId id="271" r:id="rId15"/>
+    <p:sldId id="272" r:id="rId16"/>
+    <p:sldId id="273" r:id="rId17"/>
+    <p:sldId id="274" r:id="rId18"/>
+    <p:sldId id="275" r:id="rId19"/>
+    <p:sldId id="276" r:id="rId20"/>
+    <p:sldId id="277" r:id="rId21"/>
+    <p:sldId id="278" r:id="rId22"/>
+    <p:sldId id="279" r:id="rId23"/>
+    <p:sldId id="280" r:id="rId24"/>
+    <p:sldId id="282" r:id="rId25"/>
+    <p:sldId id="283" r:id="rId26"/>
+    <p:sldId id="284" r:id="rId27"/>
+    <p:sldId id="285" r:id="rId28"/>
+    <p:sldId id="286" r:id="rId29"/>
+    <p:sldId id="295" r:id="rId30"/>
+    <p:sldId id="296" r:id="rId31"/>
+    <p:sldId id="297" r:id="rId32"/>
+    <p:sldId id="298" r:id="rId33"/>
+    <p:sldId id="287" r:id="rId34"/>
+    <p:sldId id="288" r:id="rId35"/>
+    <p:sldId id="289" r:id="rId36"/>
+    <p:sldId id="294" r:id="rId37"/>
+    <p:sldId id="291" r:id="rId38"/>
+    <p:sldId id="292" r:id="rId39"/>
+    <p:sldId id="293" r:id="rId40"/>
+    <p:sldId id="299" r:id="rId41"/>
   </p:sldIdLst>
   <p:sldSz cx="12192000" cy="6858000"/>
   <p:notesSz cx="6858000" cy="9144000"/>
@@ -143,11 +142,6 @@
       </a:defRPr>
     </a:lvl9pPr>
   </p:defaultTextStyle>
-  <p:extLst>
-    <p:ext uri="{EFAFB233-063F-42B5-8137-9DF3F51BA10A}">
-      <p15:sldGuideLst xmlns:p15="http://schemas.microsoft.com/office/powerpoint/2012/main"/>
-    </p:ext>
-  </p:extLst>
 </p:presentation>
 </file>
 
@@ -170,13 +164,7 @@
       </p:grpSpPr>
       <p:sp>
         <p:nvSpPr>
-          <p:cNvPr id="2" name="Title 1">
-            <a:extLst>
-              <a:ext uri="{FF2B5EF4-FFF2-40B4-BE49-F238E27FC236}">
-                <a16:creationId xmlns:a16="http://schemas.microsoft.com/office/drawing/2014/main" id="{8AA80A6F-60E3-B2C5-08AB-B4829CFF820D}"/>
-              </a:ext>
-            </a:extLst>
-          </p:cNvPr>
+          <p:cNvPr id="2" name="Title 1"/>
           <p:cNvSpPr>
             <a:spLocks noGrp="1"/>
           </p:cNvSpPr>
@@ -202,18 +190,13 @@
               <a:rPr lang="en-US"/>
               <a:t>Click to edit Master title style</a:t>
             </a:r>
-          </a:p>
-        </p:txBody>
-      </p:sp>
-      <p:sp>
-        <p:nvSpPr>
-          <p:cNvPr id="3" name="Subtitle 2">
-            <a:extLst>
-              <a:ext uri="{FF2B5EF4-FFF2-40B4-BE49-F238E27FC236}">
-                <a16:creationId xmlns:a16="http://schemas.microsoft.com/office/drawing/2014/main" id="{309B0326-29E5-8CAB-ED4B-D5B6974E4100}"/>
-              </a:ext>
-            </a:extLst>
-          </p:cNvPr>
+            <a:endParaRPr lang="en-US"/>
+          </a:p>
+        </p:txBody>
+      </p:sp>
+      <p:sp>
+        <p:nvSpPr>
+          <p:cNvPr id="3" name="Subtitle 2"/>
           <p:cNvSpPr>
             <a:spLocks noGrp="1"/>
           </p:cNvSpPr>
@@ -272,18 +255,13 @@
               <a:rPr lang="en-US"/>
               <a:t>Click to edit Master subtitle style</a:t>
             </a:r>
-          </a:p>
-        </p:txBody>
-      </p:sp>
-      <p:sp>
-        <p:nvSpPr>
-          <p:cNvPr id="4" name="Date Placeholder 3">
-            <a:extLst>
-              <a:ext uri="{FF2B5EF4-FFF2-40B4-BE49-F238E27FC236}">
-                <a16:creationId xmlns:a16="http://schemas.microsoft.com/office/drawing/2014/main" id="{022926C9-116A-83FB-62FF-3667BCACBF50}"/>
-              </a:ext>
-            </a:extLst>
-          </p:cNvPr>
+            <a:endParaRPr lang="en-US"/>
+          </a:p>
+        </p:txBody>
+      </p:sp>
+      <p:sp>
+        <p:nvSpPr>
+          <p:cNvPr id="4" name="Date Placeholder 3"/>
           <p:cNvSpPr>
             <a:spLocks noGrp="1"/>
           </p:cNvSpPr>
@@ -298,7 +276,6 @@
           <a:p>
             <a:fld id="{4FF4D43A-CA54-4223-BC20-661FD2291EC5}" type="datetimeFigureOut">
               <a:rPr lang="en-US" smtClean="0"/>
-              <a:t>4/21/2026</a:t>
             </a:fld>
             <a:endParaRPr lang="en-US"/>
           </a:p>
@@ -306,13 +283,7 @@
       </p:sp>
       <p:sp>
         <p:nvSpPr>
-          <p:cNvPr id="5" name="Footer Placeholder 4">
-            <a:extLst>
-              <a:ext uri="{FF2B5EF4-FFF2-40B4-BE49-F238E27FC236}">
-                <a16:creationId xmlns:a16="http://schemas.microsoft.com/office/drawing/2014/main" id="{7CC88C69-C330-A2DD-9F07-0CA6847B0374}"/>
-              </a:ext>
-            </a:extLst>
-          </p:cNvPr>
+          <p:cNvPr id="5" name="Footer Placeholder 4"/>
           <p:cNvSpPr>
             <a:spLocks noGrp="1"/>
           </p:cNvSpPr>
@@ -331,13 +302,7 @@
       </p:sp>
       <p:sp>
         <p:nvSpPr>
-          <p:cNvPr id="6" name="Slide Number Placeholder 5">
-            <a:extLst>
-              <a:ext uri="{FF2B5EF4-FFF2-40B4-BE49-F238E27FC236}">
-                <a16:creationId xmlns:a16="http://schemas.microsoft.com/office/drawing/2014/main" id="{6DBFAB17-EB17-88A9-A2B7-63504AAAED60}"/>
-              </a:ext>
-            </a:extLst>
-          </p:cNvPr>
+          <p:cNvPr id="6" name="Slide Number Placeholder 5"/>
           <p:cNvSpPr>
             <a:spLocks noGrp="1"/>
           </p:cNvSpPr>
@@ -352,18 +317,12 @@
           <a:p>
             <a:fld id="{7C1E35B6-5494-48BA-BCAA-8C49D4DC5465}" type="slidenum">
               <a:rPr lang="en-US" smtClean="0"/>
-              <a:t>‹#›</a:t>
             </a:fld>
             <a:endParaRPr lang="en-US"/>
           </a:p>
         </p:txBody>
       </p:sp>
     </p:spTree>
-    <p:extLst>
-      <p:ext uri="{BB962C8B-B14F-4D97-AF65-F5344CB8AC3E}">
-        <p14:creationId xmlns:p14="http://schemas.microsoft.com/office/powerpoint/2010/main" val="2160715846"/>
-      </p:ext>
-    </p:extLst>
   </p:cSld>
   <p:clrMapOvr>
     <a:masterClrMapping/>
@@ -390,13 +349,7 @@
       </p:grpSpPr>
       <p:sp>
         <p:nvSpPr>
-          <p:cNvPr id="2" name="Title 1">
-            <a:extLst>
-              <a:ext uri="{FF2B5EF4-FFF2-40B4-BE49-F238E27FC236}">
-                <a16:creationId xmlns:a16="http://schemas.microsoft.com/office/drawing/2014/main" id="{7D0D26CF-9FD8-0198-C162-9E149D1027EB}"/>
-              </a:ext>
-            </a:extLst>
-          </p:cNvPr>
+          <p:cNvPr id="2" name="Title 1"/>
           <p:cNvSpPr>
             <a:spLocks noGrp="1"/>
           </p:cNvSpPr>
@@ -413,18 +366,13 @@
               <a:rPr lang="en-US"/>
               <a:t>Click to edit Master title style</a:t>
             </a:r>
-          </a:p>
-        </p:txBody>
-      </p:sp>
-      <p:sp>
-        <p:nvSpPr>
-          <p:cNvPr id="3" name="Vertical Text Placeholder 2">
-            <a:extLst>
-              <a:ext uri="{FF2B5EF4-FFF2-40B4-BE49-F238E27FC236}">
-                <a16:creationId xmlns:a16="http://schemas.microsoft.com/office/drawing/2014/main" id="{64EFC5A1-BB67-C88D-E8B8-F3DD78AC1412}"/>
-              </a:ext>
-            </a:extLst>
-          </p:cNvPr>
+            <a:endParaRPr lang="en-US"/>
+          </a:p>
+        </p:txBody>
+      </p:sp>
+      <p:sp>
+        <p:nvSpPr>
+          <p:cNvPr id="3" name="Vertical Text Placeholder 2"/>
           <p:cNvSpPr>
             <a:spLocks noGrp="1"/>
           </p:cNvSpPr>
@@ -442,6 +390,7 @@
               <a:rPr lang="en-US"/>
               <a:t>Click to edit Master text styles</a:t>
             </a:r>
+            <a:endParaRPr lang="en-US"/>
           </a:p>
           <a:p>
             <a:pPr lvl="1"/>
@@ -449,6 +398,7 @@
               <a:rPr lang="en-US"/>
               <a:t>Second level</a:t>
             </a:r>
+            <a:endParaRPr lang="en-US"/>
           </a:p>
           <a:p>
             <a:pPr lvl="2"/>
@@ -456,6 +406,7 @@
               <a:rPr lang="en-US"/>
               <a:t>Third level</a:t>
             </a:r>
+            <a:endParaRPr lang="en-US"/>
           </a:p>
           <a:p>
             <a:pPr lvl="3"/>
@@ -463,6 +414,7 @@
               <a:rPr lang="en-US"/>
               <a:t>Fourth level</a:t>
             </a:r>
+            <a:endParaRPr lang="en-US"/>
           </a:p>
           <a:p>
             <a:pPr lvl="4"/>
@@ -470,18 +422,13 @@
               <a:rPr lang="en-US"/>
               <a:t>Fifth level</a:t>
             </a:r>
-          </a:p>
-        </p:txBody>
-      </p:sp>
-      <p:sp>
-        <p:nvSpPr>
-          <p:cNvPr id="4" name="Date Placeholder 3">
-            <a:extLst>
-              <a:ext uri="{FF2B5EF4-FFF2-40B4-BE49-F238E27FC236}">
-                <a16:creationId xmlns:a16="http://schemas.microsoft.com/office/drawing/2014/main" id="{357C3D7F-7014-BD4F-0EB9-C31B9FC077B7}"/>
-              </a:ext>
-            </a:extLst>
-          </p:cNvPr>
+            <a:endParaRPr lang="en-US"/>
+          </a:p>
+        </p:txBody>
+      </p:sp>
+      <p:sp>
+        <p:nvSpPr>
+          <p:cNvPr id="4" name="Date Placeholder 3"/>
           <p:cNvSpPr>
             <a:spLocks noGrp="1"/>
           </p:cNvSpPr>
@@ -496,7 +443,6 @@
           <a:p>
             <a:fld id="{4FF4D43A-CA54-4223-BC20-661FD2291EC5}" type="datetimeFigureOut">
               <a:rPr lang="en-US" smtClean="0"/>
-              <a:t>4/21/2026</a:t>
             </a:fld>
             <a:endParaRPr lang="en-US"/>
           </a:p>
@@ -504,13 +450,7 @@
       </p:sp>
       <p:sp>
         <p:nvSpPr>
-          <p:cNvPr id="5" name="Footer Placeholder 4">
-            <a:extLst>
-              <a:ext uri="{FF2B5EF4-FFF2-40B4-BE49-F238E27FC236}">
-                <a16:creationId xmlns:a16="http://schemas.microsoft.com/office/drawing/2014/main" id="{8A5DD6D0-8293-AACB-1C83-773A64E8DF57}"/>
-              </a:ext>
-            </a:extLst>
-          </p:cNvPr>
+          <p:cNvPr id="5" name="Footer Placeholder 4"/>
           <p:cNvSpPr>
             <a:spLocks noGrp="1"/>
           </p:cNvSpPr>
@@ -529,13 +469,7 @@
       </p:sp>
       <p:sp>
         <p:nvSpPr>
-          <p:cNvPr id="6" name="Slide Number Placeholder 5">
-            <a:extLst>
-              <a:ext uri="{FF2B5EF4-FFF2-40B4-BE49-F238E27FC236}">
-                <a16:creationId xmlns:a16="http://schemas.microsoft.com/office/drawing/2014/main" id="{A7178C58-7E90-CDEB-2B73-0AB57D9D72B9}"/>
-              </a:ext>
-            </a:extLst>
-          </p:cNvPr>
+          <p:cNvPr id="6" name="Slide Number Placeholder 5"/>
           <p:cNvSpPr>
             <a:spLocks noGrp="1"/>
           </p:cNvSpPr>
@@ -550,18 +484,12 @@
           <a:p>
             <a:fld id="{7C1E35B6-5494-48BA-BCAA-8C49D4DC5465}" type="slidenum">
               <a:rPr lang="en-US" smtClean="0"/>
-              <a:t>‹#›</a:t>
             </a:fld>
             <a:endParaRPr lang="en-US"/>
           </a:p>
         </p:txBody>
       </p:sp>
     </p:spTree>
-    <p:extLst>
-      <p:ext uri="{BB962C8B-B14F-4D97-AF65-F5344CB8AC3E}">
-        <p14:creationId xmlns:p14="http://schemas.microsoft.com/office/powerpoint/2010/main" val="822318760"/>
-      </p:ext>
-    </p:extLst>
   </p:cSld>
   <p:clrMapOvr>
     <a:masterClrMapping/>
@@ -588,13 +516,7 @@
       </p:grpSpPr>
       <p:sp>
         <p:nvSpPr>
-          <p:cNvPr id="2" name="Vertical Title 1">
-            <a:extLst>
-              <a:ext uri="{FF2B5EF4-FFF2-40B4-BE49-F238E27FC236}">
-                <a16:creationId xmlns:a16="http://schemas.microsoft.com/office/drawing/2014/main" id="{2611A4B1-9200-576C-A318-68C0AF3F8A14}"/>
-              </a:ext>
-            </a:extLst>
-          </p:cNvPr>
+          <p:cNvPr id="2" name="Vertical Title 1"/>
           <p:cNvSpPr>
             <a:spLocks noGrp="1"/>
           </p:cNvSpPr>
@@ -616,18 +538,13 @@
               <a:rPr lang="en-US"/>
               <a:t>Click to edit Master title style</a:t>
             </a:r>
-          </a:p>
-        </p:txBody>
-      </p:sp>
-      <p:sp>
-        <p:nvSpPr>
-          <p:cNvPr id="3" name="Vertical Text Placeholder 2">
-            <a:extLst>
-              <a:ext uri="{FF2B5EF4-FFF2-40B4-BE49-F238E27FC236}">
-                <a16:creationId xmlns:a16="http://schemas.microsoft.com/office/drawing/2014/main" id="{BEB624FF-283F-54D1-2793-5DE2243D3C8A}"/>
-              </a:ext>
-            </a:extLst>
-          </p:cNvPr>
+            <a:endParaRPr lang="en-US"/>
+          </a:p>
+        </p:txBody>
+      </p:sp>
+      <p:sp>
+        <p:nvSpPr>
+          <p:cNvPr id="3" name="Vertical Text Placeholder 2"/>
           <p:cNvSpPr>
             <a:spLocks noGrp="1"/>
           </p:cNvSpPr>
@@ -650,6 +567,7 @@
               <a:rPr lang="en-US"/>
               <a:t>Click to edit Master text styles</a:t>
             </a:r>
+            <a:endParaRPr lang="en-US"/>
           </a:p>
           <a:p>
             <a:pPr lvl="1"/>
@@ -657,6 +575,7 @@
               <a:rPr lang="en-US"/>
               <a:t>Second level</a:t>
             </a:r>
+            <a:endParaRPr lang="en-US"/>
           </a:p>
           <a:p>
             <a:pPr lvl="2"/>
@@ -664,6 +583,7 @@
               <a:rPr lang="en-US"/>
               <a:t>Third level</a:t>
             </a:r>
+            <a:endParaRPr lang="en-US"/>
           </a:p>
           <a:p>
             <a:pPr lvl="3"/>
@@ -671,6 +591,7 @@
               <a:rPr lang="en-US"/>
               <a:t>Fourth level</a:t>
             </a:r>
+            <a:endParaRPr lang="en-US"/>
           </a:p>
           <a:p>
             <a:pPr lvl="4"/>
@@ -678,18 +599,13 @@
               <a:rPr lang="en-US"/>
               <a:t>Fifth level</a:t>
             </a:r>
-          </a:p>
-        </p:txBody>
-      </p:sp>
-      <p:sp>
-        <p:nvSpPr>
-          <p:cNvPr id="4" name="Date Placeholder 3">
-            <a:extLst>
-              <a:ext uri="{FF2B5EF4-FFF2-40B4-BE49-F238E27FC236}">
-                <a16:creationId xmlns:a16="http://schemas.microsoft.com/office/drawing/2014/main" id="{4A7A7E4A-8C7F-61E8-B85A-64EEAC0DC462}"/>
-              </a:ext>
-            </a:extLst>
-          </p:cNvPr>
+            <a:endParaRPr lang="en-US"/>
+          </a:p>
+        </p:txBody>
+      </p:sp>
+      <p:sp>
+        <p:nvSpPr>
+          <p:cNvPr id="4" name="Date Placeholder 3"/>
           <p:cNvSpPr>
             <a:spLocks noGrp="1"/>
           </p:cNvSpPr>
@@ -704,7 +620,6 @@
           <a:p>
             <a:fld id="{4FF4D43A-CA54-4223-BC20-661FD2291EC5}" type="datetimeFigureOut">
               <a:rPr lang="en-US" smtClean="0"/>
-              <a:t>4/21/2026</a:t>
             </a:fld>
             <a:endParaRPr lang="en-US"/>
           </a:p>
@@ -712,13 +627,7 @@
       </p:sp>
       <p:sp>
         <p:nvSpPr>
-          <p:cNvPr id="5" name="Footer Placeholder 4">
-            <a:extLst>
-              <a:ext uri="{FF2B5EF4-FFF2-40B4-BE49-F238E27FC236}">
-                <a16:creationId xmlns:a16="http://schemas.microsoft.com/office/drawing/2014/main" id="{6DF33644-F300-83B1-AEFC-F2AAC18B4B5B}"/>
-              </a:ext>
-            </a:extLst>
-          </p:cNvPr>
+          <p:cNvPr id="5" name="Footer Placeholder 4"/>
           <p:cNvSpPr>
             <a:spLocks noGrp="1"/>
           </p:cNvSpPr>
@@ -737,13 +646,7 @@
       </p:sp>
       <p:sp>
         <p:nvSpPr>
-          <p:cNvPr id="6" name="Slide Number Placeholder 5">
-            <a:extLst>
-              <a:ext uri="{FF2B5EF4-FFF2-40B4-BE49-F238E27FC236}">
-                <a16:creationId xmlns:a16="http://schemas.microsoft.com/office/drawing/2014/main" id="{F2686CE7-FBB7-E4D5-C16F-8C07391C15C0}"/>
-              </a:ext>
-            </a:extLst>
-          </p:cNvPr>
+          <p:cNvPr id="6" name="Slide Number Placeholder 5"/>
           <p:cNvSpPr>
             <a:spLocks noGrp="1"/>
           </p:cNvSpPr>
@@ -758,18 +661,12 @@
           <a:p>
             <a:fld id="{7C1E35B6-5494-48BA-BCAA-8C49D4DC5465}" type="slidenum">
               <a:rPr lang="en-US" smtClean="0"/>
-              <a:t>‹#›</a:t>
             </a:fld>
             <a:endParaRPr lang="en-US"/>
           </a:p>
         </p:txBody>
       </p:sp>
     </p:spTree>
-    <p:extLst>
-      <p:ext uri="{BB962C8B-B14F-4D97-AF65-F5344CB8AC3E}">
-        <p14:creationId xmlns:p14="http://schemas.microsoft.com/office/powerpoint/2010/main" val="3869234250"/>
-      </p:ext>
-    </p:extLst>
   </p:cSld>
   <p:clrMapOvr>
     <a:masterClrMapping/>
@@ -796,13 +693,7 @@
       </p:grpSpPr>
       <p:sp>
         <p:nvSpPr>
-          <p:cNvPr id="2" name="Title 1">
-            <a:extLst>
-              <a:ext uri="{FF2B5EF4-FFF2-40B4-BE49-F238E27FC236}">
-                <a16:creationId xmlns:a16="http://schemas.microsoft.com/office/drawing/2014/main" id="{44DE685A-DE36-5CEC-F623-B838EE4CB9FE}"/>
-              </a:ext>
-            </a:extLst>
-          </p:cNvPr>
+          <p:cNvPr id="2" name="Title 1"/>
           <p:cNvSpPr>
             <a:spLocks noGrp="1"/>
           </p:cNvSpPr>
@@ -819,18 +710,13 @@
               <a:rPr lang="en-US"/>
               <a:t>Click to edit Master title style</a:t>
             </a:r>
-          </a:p>
-        </p:txBody>
-      </p:sp>
-      <p:sp>
-        <p:nvSpPr>
-          <p:cNvPr id="3" name="Content Placeholder 2">
-            <a:extLst>
-              <a:ext uri="{FF2B5EF4-FFF2-40B4-BE49-F238E27FC236}">
-                <a16:creationId xmlns:a16="http://schemas.microsoft.com/office/drawing/2014/main" id="{F4DDDAB4-E778-E0A5-435C-A57896EB26B9}"/>
-              </a:ext>
-            </a:extLst>
-          </p:cNvPr>
+            <a:endParaRPr lang="en-US"/>
+          </a:p>
+        </p:txBody>
+      </p:sp>
+      <p:sp>
+        <p:nvSpPr>
+          <p:cNvPr id="3" name="Content Placeholder 2"/>
           <p:cNvSpPr>
             <a:spLocks noGrp="1"/>
           </p:cNvSpPr>
@@ -848,6 +734,7 @@
               <a:rPr lang="en-US"/>
               <a:t>Click to edit Master text styles</a:t>
             </a:r>
+            <a:endParaRPr lang="en-US"/>
           </a:p>
           <a:p>
             <a:pPr lvl="1"/>
@@ -855,6 +742,7 @@
               <a:rPr lang="en-US"/>
               <a:t>Second level</a:t>
             </a:r>
+            <a:endParaRPr lang="en-US"/>
           </a:p>
           <a:p>
             <a:pPr lvl="2"/>
@@ -862,6 +750,7 @@
               <a:rPr lang="en-US"/>
               <a:t>Third level</a:t>
             </a:r>
+            <a:endParaRPr lang="en-US"/>
           </a:p>
           <a:p>
             <a:pPr lvl="3"/>
@@ -869,6 +758,7 @@
               <a:rPr lang="en-US"/>
               <a:t>Fourth level</a:t>
             </a:r>
+            <a:endParaRPr lang="en-US"/>
           </a:p>
           <a:p>
             <a:pPr lvl="4"/>
@@ -876,18 +766,13 @@
               <a:rPr lang="en-US"/>
               <a:t>Fifth level</a:t>
             </a:r>
-          </a:p>
-        </p:txBody>
-      </p:sp>
-      <p:sp>
-        <p:nvSpPr>
-          <p:cNvPr id="4" name="Date Placeholder 3">
-            <a:extLst>
-              <a:ext uri="{FF2B5EF4-FFF2-40B4-BE49-F238E27FC236}">
-                <a16:creationId xmlns:a16="http://schemas.microsoft.com/office/drawing/2014/main" id="{ECD440E9-9408-ED4B-C63F-7EE97BF57164}"/>
-              </a:ext>
-            </a:extLst>
-          </p:cNvPr>
+            <a:endParaRPr lang="en-US"/>
+          </a:p>
+        </p:txBody>
+      </p:sp>
+      <p:sp>
+        <p:nvSpPr>
+          <p:cNvPr id="4" name="Date Placeholder 3"/>
           <p:cNvSpPr>
             <a:spLocks noGrp="1"/>
           </p:cNvSpPr>
@@ -902,7 +787,6 @@
           <a:p>
             <a:fld id="{4FF4D43A-CA54-4223-BC20-661FD2291EC5}" type="datetimeFigureOut">
               <a:rPr lang="en-US" smtClean="0"/>
-              <a:t>4/21/2026</a:t>
             </a:fld>
             <a:endParaRPr lang="en-US"/>
           </a:p>
@@ -910,13 +794,7 @@
       </p:sp>
       <p:sp>
         <p:nvSpPr>
-          <p:cNvPr id="5" name="Footer Placeholder 4">
-            <a:extLst>
-              <a:ext uri="{FF2B5EF4-FFF2-40B4-BE49-F238E27FC236}">
-                <a16:creationId xmlns:a16="http://schemas.microsoft.com/office/drawing/2014/main" id="{674569A4-60E1-825B-72B4-CF5E55BD242D}"/>
-              </a:ext>
-            </a:extLst>
-          </p:cNvPr>
+          <p:cNvPr id="5" name="Footer Placeholder 4"/>
           <p:cNvSpPr>
             <a:spLocks noGrp="1"/>
           </p:cNvSpPr>
@@ -935,13 +813,7 @@
       </p:sp>
       <p:sp>
         <p:nvSpPr>
-          <p:cNvPr id="6" name="Slide Number Placeholder 5">
-            <a:extLst>
-              <a:ext uri="{FF2B5EF4-FFF2-40B4-BE49-F238E27FC236}">
-                <a16:creationId xmlns:a16="http://schemas.microsoft.com/office/drawing/2014/main" id="{D7D7124A-9609-D3A6-50FA-F8060587BBD4}"/>
-              </a:ext>
-            </a:extLst>
-          </p:cNvPr>
+          <p:cNvPr id="6" name="Slide Number Placeholder 5"/>
           <p:cNvSpPr>
             <a:spLocks noGrp="1"/>
           </p:cNvSpPr>
@@ -956,18 +828,12 @@
           <a:p>
             <a:fld id="{7C1E35B6-5494-48BA-BCAA-8C49D4DC5465}" type="slidenum">
               <a:rPr lang="en-US" smtClean="0"/>
-              <a:t>‹#›</a:t>
             </a:fld>
             <a:endParaRPr lang="en-US"/>
           </a:p>
         </p:txBody>
       </p:sp>
     </p:spTree>
-    <p:extLst>
-      <p:ext uri="{BB962C8B-B14F-4D97-AF65-F5344CB8AC3E}">
-        <p14:creationId xmlns:p14="http://schemas.microsoft.com/office/powerpoint/2010/main" val="1319237277"/>
-      </p:ext>
-    </p:extLst>
   </p:cSld>
   <p:clrMapOvr>
     <a:masterClrMapping/>
@@ -994,13 +860,7 @@
       </p:grpSpPr>
       <p:sp>
         <p:nvSpPr>
-          <p:cNvPr id="2" name="Title 1">
-            <a:extLst>
-              <a:ext uri="{FF2B5EF4-FFF2-40B4-BE49-F238E27FC236}">
-                <a16:creationId xmlns:a16="http://schemas.microsoft.com/office/drawing/2014/main" id="{8B4D070C-C642-4BEC-62F0-1BB897B6B108}"/>
-              </a:ext>
-            </a:extLst>
-          </p:cNvPr>
+          <p:cNvPr id="2" name="Title 1"/>
           <p:cNvSpPr>
             <a:spLocks noGrp="1"/>
           </p:cNvSpPr>
@@ -1026,18 +886,13 @@
               <a:rPr lang="en-US"/>
               <a:t>Click to edit Master title style</a:t>
             </a:r>
-          </a:p>
-        </p:txBody>
-      </p:sp>
-      <p:sp>
-        <p:nvSpPr>
-          <p:cNvPr id="3" name="Text Placeholder 2">
-            <a:extLst>
-              <a:ext uri="{FF2B5EF4-FFF2-40B4-BE49-F238E27FC236}">
-                <a16:creationId xmlns:a16="http://schemas.microsoft.com/office/drawing/2014/main" id="{DC9F4CA3-4ECD-6997-D829-46068F174901}"/>
-              </a:ext>
-            </a:extLst>
-          </p:cNvPr>
+            <a:endParaRPr lang="en-US"/>
+          </a:p>
+        </p:txBody>
+      </p:sp>
+      <p:sp>
+        <p:nvSpPr>
+          <p:cNvPr id="3" name="Text Placeholder 2"/>
           <p:cNvSpPr>
             <a:spLocks noGrp="1"/>
           </p:cNvSpPr>
@@ -1151,18 +1006,13 @@
               <a:rPr lang="en-US"/>
               <a:t>Click to edit Master text styles</a:t>
             </a:r>
-          </a:p>
-        </p:txBody>
-      </p:sp>
-      <p:sp>
-        <p:nvSpPr>
-          <p:cNvPr id="4" name="Date Placeholder 3">
-            <a:extLst>
-              <a:ext uri="{FF2B5EF4-FFF2-40B4-BE49-F238E27FC236}">
-                <a16:creationId xmlns:a16="http://schemas.microsoft.com/office/drawing/2014/main" id="{A66B1D06-D54E-52F8-EC71-07BE6D9A3344}"/>
-              </a:ext>
-            </a:extLst>
-          </p:cNvPr>
+            <a:endParaRPr lang="en-US"/>
+          </a:p>
+        </p:txBody>
+      </p:sp>
+      <p:sp>
+        <p:nvSpPr>
+          <p:cNvPr id="4" name="Date Placeholder 3"/>
           <p:cNvSpPr>
             <a:spLocks noGrp="1"/>
           </p:cNvSpPr>
@@ -1177,7 +1027,6 @@
           <a:p>
             <a:fld id="{4FF4D43A-CA54-4223-BC20-661FD2291EC5}" type="datetimeFigureOut">
               <a:rPr lang="en-US" smtClean="0"/>
-              <a:t>4/21/2026</a:t>
             </a:fld>
             <a:endParaRPr lang="en-US"/>
           </a:p>
@@ -1185,13 +1034,7 @@
       </p:sp>
       <p:sp>
         <p:nvSpPr>
-          <p:cNvPr id="5" name="Footer Placeholder 4">
-            <a:extLst>
-              <a:ext uri="{FF2B5EF4-FFF2-40B4-BE49-F238E27FC236}">
-                <a16:creationId xmlns:a16="http://schemas.microsoft.com/office/drawing/2014/main" id="{015CE411-ADC3-F19A-8FFA-6B579CFB2F97}"/>
-              </a:ext>
-            </a:extLst>
-          </p:cNvPr>
+          <p:cNvPr id="5" name="Footer Placeholder 4"/>
           <p:cNvSpPr>
             <a:spLocks noGrp="1"/>
           </p:cNvSpPr>
@@ -1210,13 +1053,7 @@
       </p:sp>
       <p:sp>
         <p:nvSpPr>
-          <p:cNvPr id="6" name="Slide Number Placeholder 5">
-            <a:extLst>
-              <a:ext uri="{FF2B5EF4-FFF2-40B4-BE49-F238E27FC236}">
-                <a16:creationId xmlns:a16="http://schemas.microsoft.com/office/drawing/2014/main" id="{B79E045B-7BA8-2F76-9D0B-A4F2546F24FD}"/>
-              </a:ext>
-            </a:extLst>
-          </p:cNvPr>
+          <p:cNvPr id="6" name="Slide Number Placeholder 5"/>
           <p:cNvSpPr>
             <a:spLocks noGrp="1"/>
           </p:cNvSpPr>
@@ -1231,18 +1068,12 @@
           <a:p>
             <a:fld id="{7C1E35B6-5494-48BA-BCAA-8C49D4DC5465}" type="slidenum">
               <a:rPr lang="en-US" smtClean="0"/>
-              <a:t>‹#›</a:t>
             </a:fld>
             <a:endParaRPr lang="en-US"/>
           </a:p>
         </p:txBody>
       </p:sp>
     </p:spTree>
-    <p:extLst>
-      <p:ext uri="{BB962C8B-B14F-4D97-AF65-F5344CB8AC3E}">
-        <p14:creationId xmlns:p14="http://schemas.microsoft.com/office/powerpoint/2010/main" val="461748427"/>
-      </p:ext>
-    </p:extLst>
   </p:cSld>
   <p:clrMapOvr>
     <a:masterClrMapping/>
@@ -1269,13 +1100,7 @@
       </p:grpSpPr>
       <p:sp>
         <p:nvSpPr>
-          <p:cNvPr id="2" name="Title 1">
-            <a:extLst>
-              <a:ext uri="{FF2B5EF4-FFF2-40B4-BE49-F238E27FC236}">
-                <a16:creationId xmlns:a16="http://schemas.microsoft.com/office/drawing/2014/main" id="{FEEBEB94-697A-6D16-742B-D072D78A5FAF}"/>
-              </a:ext>
-            </a:extLst>
-          </p:cNvPr>
+          <p:cNvPr id="2" name="Title 1"/>
           <p:cNvSpPr>
             <a:spLocks noGrp="1"/>
           </p:cNvSpPr>
@@ -1292,18 +1117,13 @@
               <a:rPr lang="en-US"/>
               <a:t>Click to edit Master title style</a:t>
             </a:r>
-          </a:p>
-        </p:txBody>
-      </p:sp>
-      <p:sp>
-        <p:nvSpPr>
-          <p:cNvPr id="3" name="Content Placeholder 2">
-            <a:extLst>
-              <a:ext uri="{FF2B5EF4-FFF2-40B4-BE49-F238E27FC236}">
-                <a16:creationId xmlns:a16="http://schemas.microsoft.com/office/drawing/2014/main" id="{D52402BE-A28A-D871-6F27-8233CE0D805A}"/>
-              </a:ext>
-            </a:extLst>
-          </p:cNvPr>
+            <a:endParaRPr lang="en-US"/>
+          </a:p>
+        </p:txBody>
+      </p:sp>
+      <p:sp>
+        <p:nvSpPr>
+          <p:cNvPr id="3" name="Content Placeholder 2"/>
           <p:cNvSpPr>
             <a:spLocks noGrp="1"/>
           </p:cNvSpPr>
@@ -1326,6 +1146,7 @@
               <a:rPr lang="en-US"/>
               <a:t>Click to edit Master text styles</a:t>
             </a:r>
+            <a:endParaRPr lang="en-US"/>
           </a:p>
           <a:p>
             <a:pPr lvl="1"/>
@@ -1333,6 +1154,7 @@
               <a:rPr lang="en-US"/>
               <a:t>Second level</a:t>
             </a:r>
+            <a:endParaRPr lang="en-US"/>
           </a:p>
           <a:p>
             <a:pPr lvl="2"/>
@@ -1340,6 +1162,7 @@
               <a:rPr lang="en-US"/>
               <a:t>Third level</a:t>
             </a:r>
+            <a:endParaRPr lang="en-US"/>
           </a:p>
           <a:p>
             <a:pPr lvl="3"/>
@@ -1347,6 +1170,7 @@
               <a:rPr lang="en-US"/>
               <a:t>Fourth level</a:t>
             </a:r>
+            <a:endParaRPr lang="en-US"/>
           </a:p>
           <a:p>
             <a:pPr lvl="4"/>
@@ -1354,18 +1178,13 @@
               <a:rPr lang="en-US"/>
               <a:t>Fifth level</a:t>
             </a:r>
-          </a:p>
-        </p:txBody>
-      </p:sp>
-      <p:sp>
-        <p:nvSpPr>
-          <p:cNvPr id="4" name="Content Placeholder 3">
-            <a:extLst>
-              <a:ext uri="{FF2B5EF4-FFF2-40B4-BE49-F238E27FC236}">
-                <a16:creationId xmlns:a16="http://schemas.microsoft.com/office/drawing/2014/main" id="{C8CE5110-1A7D-8D4A-B066-ED96C3FA7127}"/>
-              </a:ext>
-            </a:extLst>
-          </p:cNvPr>
+            <a:endParaRPr lang="en-US"/>
+          </a:p>
+        </p:txBody>
+      </p:sp>
+      <p:sp>
+        <p:nvSpPr>
+          <p:cNvPr id="4" name="Content Placeholder 3"/>
           <p:cNvSpPr>
             <a:spLocks noGrp="1"/>
           </p:cNvSpPr>
@@ -1388,6 +1207,7 @@
               <a:rPr lang="en-US"/>
               <a:t>Click to edit Master text styles</a:t>
             </a:r>
+            <a:endParaRPr lang="en-US"/>
           </a:p>
           <a:p>
             <a:pPr lvl="1"/>
@@ -1395,6 +1215,7 @@
               <a:rPr lang="en-US"/>
               <a:t>Second level</a:t>
             </a:r>
+            <a:endParaRPr lang="en-US"/>
           </a:p>
           <a:p>
             <a:pPr lvl="2"/>
@@ -1402,6 +1223,7 @@
               <a:rPr lang="en-US"/>
               <a:t>Third level</a:t>
             </a:r>
+            <a:endParaRPr lang="en-US"/>
           </a:p>
           <a:p>
             <a:pPr lvl="3"/>
@@ -1409,6 +1231,7 @@
               <a:rPr lang="en-US"/>
               <a:t>Fourth level</a:t>
             </a:r>
+            <a:endParaRPr lang="en-US"/>
           </a:p>
           <a:p>
             <a:pPr lvl="4"/>
@@ -1416,18 +1239,13 @@
               <a:rPr lang="en-US"/>
               <a:t>Fifth level</a:t>
             </a:r>
-          </a:p>
-        </p:txBody>
-      </p:sp>
-      <p:sp>
-        <p:nvSpPr>
-          <p:cNvPr id="5" name="Date Placeholder 4">
-            <a:extLst>
-              <a:ext uri="{FF2B5EF4-FFF2-40B4-BE49-F238E27FC236}">
-                <a16:creationId xmlns:a16="http://schemas.microsoft.com/office/drawing/2014/main" id="{DFD1278A-886C-42AF-A7B9-8871050C0727}"/>
-              </a:ext>
-            </a:extLst>
-          </p:cNvPr>
+            <a:endParaRPr lang="en-US"/>
+          </a:p>
+        </p:txBody>
+      </p:sp>
+      <p:sp>
+        <p:nvSpPr>
+          <p:cNvPr id="5" name="Date Placeholder 4"/>
           <p:cNvSpPr>
             <a:spLocks noGrp="1"/>
           </p:cNvSpPr>
@@ -1442,7 +1260,6 @@
           <a:p>
             <a:fld id="{4FF4D43A-CA54-4223-BC20-661FD2291EC5}" type="datetimeFigureOut">
               <a:rPr lang="en-US" smtClean="0"/>
-              <a:t>4/21/2026</a:t>
             </a:fld>
             <a:endParaRPr lang="en-US"/>
           </a:p>
@@ -1450,13 +1267,7 @@
       </p:sp>
       <p:sp>
         <p:nvSpPr>
-          <p:cNvPr id="6" name="Footer Placeholder 5">
-            <a:extLst>
-              <a:ext uri="{FF2B5EF4-FFF2-40B4-BE49-F238E27FC236}">
-                <a16:creationId xmlns:a16="http://schemas.microsoft.com/office/drawing/2014/main" id="{8B4E322B-A1C8-580B-26EF-399E49F547DE}"/>
-              </a:ext>
-            </a:extLst>
-          </p:cNvPr>
+          <p:cNvPr id="6" name="Footer Placeholder 5"/>
           <p:cNvSpPr>
             <a:spLocks noGrp="1"/>
           </p:cNvSpPr>
@@ -1475,13 +1286,7 @@
       </p:sp>
       <p:sp>
         <p:nvSpPr>
-          <p:cNvPr id="7" name="Slide Number Placeholder 6">
-            <a:extLst>
-              <a:ext uri="{FF2B5EF4-FFF2-40B4-BE49-F238E27FC236}">
-                <a16:creationId xmlns:a16="http://schemas.microsoft.com/office/drawing/2014/main" id="{977A9692-A383-EA29-E725-E4122D4181A9}"/>
-              </a:ext>
-            </a:extLst>
-          </p:cNvPr>
+          <p:cNvPr id="7" name="Slide Number Placeholder 6"/>
           <p:cNvSpPr>
             <a:spLocks noGrp="1"/>
           </p:cNvSpPr>
@@ -1496,18 +1301,12 @@
           <a:p>
             <a:fld id="{7C1E35B6-5494-48BA-BCAA-8C49D4DC5465}" type="slidenum">
               <a:rPr lang="en-US" smtClean="0"/>
-              <a:t>‹#›</a:t>
             </a:fld>
             <a:endParaRPr lang="en-US"/>
           </a:p>
         </p:txBody>
       </p:sp>
     </p:spTree>
-    <p:extLst>
-      <p:ext uri="{BB962C8B-B14F-4D97-AF65-F5344CB8AC3E}">
-        <p14:creationId xmlns:p14="http://schemas.microsoft.com/office/powerpoint/2010/main" val="1933691965"/>
-      </p:ext>
-    </p:extLst>
   </p:cSld>
   <p:clrMapOvr>
     <a:masterClrMapping/>
@@ -1534,13 +1333,7 @@
       </p:grpSpPr>
       <p:sp>
         <p:nvSpPr>
-          <p:cNvPr id="2" name="Title 1">
-            <a:extLst>
-              <a:ext uri="{FF2B5EF4-FFF2-40B4-BE49-F238E27FC236}">
-                <a16:creationId xmlns:a16="http://schemas.microsoft.com/office/drawing/2014/main" id="{22AEE82B-49F2-31B6-46B9-93E5F75B804E}"/>
-              </a:ext>
-            </a:extLst>
-          </p:cNvPr>
+          <p:cNvPr id="2" name="Title 1"/>
           <p:cNvSpPr>
             <a:spLocks noGrp="1"/>
           </p:cNvSpPr>
@@ -1562,18 +1355,13 @@
               <a:rPr lang="en-US"/>
               <a:t>Click to edit Master title style</a:t>
             </a:r>
-          </a:p>
-        </p:txBody>
-      </p:sp>
-      <p:sp>
-        <p:nvSpPr>
-          <p:cNvPr id="3" name="Text Placeholder 2">
-            <a:extLst>
-              <a:ext uri="{FF2B5EF4-FFF2-40B4-BE49-F238E27FC236}">
-                <a16:creationId xmlns:a16="http://schemas.microsoft.com/office/drawing/2014/main" id="{288288DF-3F97-ED36-3695-BF60CA431912}"/>
-              </a:ext>
-            </a:extLst>
-          </p:cNvPr>
+            <a:endParaRPr lang="en-US"/>
+          </a:p>
+        </p:txBody>
+      </p:sp>
+      <p:sp>
+        <p:nvSpPr>
+          <p:cNvPr id="3" name="Text Placeholder 2"/>
           <p:cNvSpPr>
             <a:spLocks noGrp="1"/>
           </p:cNvSpPr>
@@ -1633,18 +1421,13 @@
               <a:rPr lang="en-US"/>
               <a:t>Click to edit Master text styles</a:t>
             </a:r>
-          </a:p>
-        </p:txBody>
-      </p:sp>
-      <p:sp>
-        <p:nvSpPr>
-          <p:cNvPr id="4" name="Content Placeholder 3">
-            <a:extLst>
-              <a:ext uri="{FF2B5EF4-FFF2-40B4-BE49-F238E27FC236}">
-                <a16:creationId xmlns:a16="http://schemas.microsoft.com/office/drawing/2014/main" id="{E6515DB9-01A7-32E0-B7C5-642F3240063B}"/>
-              </a:ext>
-            </a:extLst>
-          </p:cNvPr>
+            <a:endParaRPr lang="en-US"/>
+          </a:p>
+        </p:txBody>
+      </p:sp>
+      <p:sp>
+        <p:nvSpPr>
+          <p:cNvPr id="4" name="Content Placeholder 3"/>
           <p:cNvSpPr>
             <a:spLocks noGrp="1"/>
           </p:cNvSpPr>
@@ -1667,6 +1450,7 @@
               <a:rPr lang="en-US"/>
               <a:t>Click to edit Master text styles</a:t>
             </a:r>
+            <a:endParaRPr lang="en-US"/>
           </a:p>
           <a:p>
             <a:pPr lvl="1"/>
@@ -1674,6 +1458,7 @@
               <a:rPr lang="en-US"/>
               <a:t>Second level</a:t>
             </a:r>
+            <a:endParaRPr lang="en-US"/>
           </a:p>
           <a:p>
             <a:pPr lvl="2"/>
@@ -1681,6 +1466,7 @@
               <a:rPr lang="en-US"/>
               <a:t>Third level</a:t>
             </a:r>
+            <a:endParaRPr lang="en-US"/>
           </a:p>
           <a:p>
             <a:pPr lvl="3"/>
@@ -1688,6 +1474,7 @@
               <a:rPr lang="en-US"/>
               <a:t>Fourth level</a:t>
             </a:r>
+            <a:endParaRPr lang="en-US"/>
           </a:p>
           <a:p>
             <a:pPr lvl="4"/>
@@ -1695,18 +1482,13 @@
               <a:rPr lang="en-US"/>
               <a:t>Fifth level</a:t>
             </a:r>
-          </a:p>
-        </p:txBody>
-      </p:sp>
-      <p:sp>
-        <p:nvSpPr>
-          <p:cNvPr id="5" name="Text Placeholder 4">
-            <a:extLst>
-              <a:ext uri="{FF2B5EF4-FFF2-40B4-BE49-F238E27FC236}">
-                <a16:creationId xmlns:a16="http://schemas.microsoft.com/office/drawing/2014/main" id="{FE47B37A-4724-C28A-0BB6-6F087CAB596D}"/>
-              </a:ext>
-            </a:extLst>
-          </p:cNvPr>
+            <a:endParaRPr lang="en-US"/>
+          </a:p>
+        </p:txBody>
+      </p:sp>
+      <p:sp>
+        <p:nvSpPr>
+          <p:cNvPr id="5" name="Text Placeholder 4"/>
           <p:cNvSpPr>
             <a:spLocks noGrp="1"/>
           </p:cNvSpPr>
@@ -1766,18 +1548,13 @@
               <a:rPr lang="en-US"/>
               <a:t>Click to edit Master text styles</a:t>
             </a:r>
-          </a:p>
-        </p:txBody>
-      </p:sp>
-      <p:sp>
-        <p:nvSpPr>
-          <p:cNvPr id="6" name="Content Placeholder 5">
-            <a:extLst>
-              <a:ext uri="{FF2B5EF4-FFF2-40B4-BE49-F238E27FC236}">
-                <a16:creationId xmlns:a16="http://schemas.microsoft.com/office/drawing/2014/main" id="{20F4A4AA-4B3A-7C28-05ED-E1711C85114B}"/>
-              </a:ext>
-            </a:extLst>
-          </p:cNvPr>
+            <a:endParaRPr lang="en-US"/>
+          </a:p>
+        </p:txBody>
+      </p:sp>
+      <p:sp>
+        <p:nvSpPr>
+          <p:cNvPr id="6" name="Content Placeholder 5"/>
           <p:cNvSpPr>
             <a:spLocks noGrp="1"/>
           </p:cNvSpPr>
@@ -1800,6 +1577,7 @@
               <a:rPr lang="en-US"/>
               <a:t>Click to edit Master text styles</a:t>
             </a:r>
+            <a:endParaRPr lang="en-US"/>
           </a:p>
           <a:p>
             <a:pPr lvl="1"/>
@@ -1807,6 +1585,7 @@
               <a:rPr lang="en-US"/>
               <a:t>Second level</a:t>
             </a:r>
+            <a:endParaRPr lang="en-US"/>
           </a:p>
           <a:p>
             <a:pPr lvl="2"/>
@@ -1814,6 +1593,7 @@
               <a:rPr lang="en-US"/>
               <a:t>Third level</a:t>
             </a:r>
+            <a:endParaRPr lang="en-US"/>
           </a:p>
           <a:p>
             <a:pPr lvl="3"/>
@@ -1821,6 +1601,7 @@
               <a:rPr lang="en-US"/>
               <a:t>Fourth level</a:t>
             </a:r>
+            <a:endParaRPr lang="en-US"/>
           </a:p>
           <a:p>
             <a:pPr lvl="4"/>
@@ -1828,18 +1609,13 @@
               <a:rPr lang="en-US"/>
               <a:t>Fifth level</a:t>
             </a:r>
-          </a:p>
-        </p:txBody>
-      </p:sp>
-      <p:sp>
-        <p:nvSpPr>
-          <p:cNvPr id="7" name="Date Placeholder 6">
-            <a:extLst>
-              <a:ext uri="{FF2B5EF4-FFF2-40B4-BE49-F238E27FC236}">
-                <a16:creationId xmlns:a16="http://schemas.microsoft.com/office/drawing/2014/main" id="{E9718C46-4D47-44E4-BD74-243A421FE241}"/>
-              </a:ext>
-            </a:extLst>
-          </p:cNvPr>
+            <a:endParaRPr lang="en-US"/>
+          </a:p>
+        </p:txBody>
+      </p:sp>
+      <p:sp>
+        <p:nvSpPr>
+          <p:cNvPr id="7" name="Date Placeholder 6"/>
           <p:cNvSpPr>
             <a:spLocks noGrp="1"/>
           </p:cNvSpPr>
@@ -1854,7 +1630,6 @@
           <a:p>
             <a:fld id="{4FF4D43A-CA54-4223-BC20-661FD2291EC5}" type="datetimeFigureOut">
               <a:rPr lang="en-US" smtClean="0"/>
-              <a:t>4/21/2026</a:t>
             </a:fld>
             <a:endParaRPr lang="en-US"/>
           </a:p>
@@ -1862,13 +1637,7 @@
       </p:sp>
       <p:sp>
         <p:nvSpPr>
-          <p:cNvPr id="8" name="Footer Placeholder 7">
-            <a:extLst>
-              <a:ext uri="{FF2B5EF4-FFF2-40B4-BE49-F238E27FC236}">
-                <a16:creationId xmlns:a16="http://schemas.microsoft.com/office/drawing/2014/main" id="{901B34D3-8ABE-3381-0041-533395BC6910}"/>
-              </a:ext>
-            </a:extLst>
-          </p:cNvPr>
+          <p:cNvPr id="8" name="Footer Placeholder 7"/>
           <p:cNvSpPr>
             <a:spLocks noGrp="1"/>
           </p:cNvSpPr>
@@ -1887,13 +1656,7 @@
       </p:sp>
       <p:sp>
         <p:nvSpPr>
-          <p:cNvPr id="9" name="Slide Number Placeholder 8">
-            <a:extLst>
-              <a:ext uri="{FF2B5EF4-FFF2-40B4-BE49-F238E27FC236}">
-                <a16:creationId xmlns:a16="http://schemas.microsoft.com/office/drawing/2014/main" id="{17235E30-4CB3-15EE-2F2E-28CD49AE0F46}"/>
-              </a:ext>
-            </a:extLst>
-          </p:cNvPr>
+          <p:cNvPr id="9" name="Slide Number Placeholder 8"/>
           <p:cNvSpPr>
             <a:spLocks noGrp="1"/>
           </p:cNvSpPr>
@@ -1908,18 +1671,12 @@
           <a:p>
             <a:fld id="{7C1E35B6-5494-48BA-BCAA-8C49D4DC5465}" type="slidenum">
               <a:rPr lang="en-US" smtClean="0"/>
-              <a:t>‹#›</a:t>
             </a:fld>
             <a:endParaRPr lang="en-US"/>
           </a:p>
         </p:txBody>
       </p:sp>
     </p:spTree>
-    <p:extLst>
-      <p:ext uri="{BB962C8B-B14F-4D97-AF65-F5344CB8AC3E}">
-        <p14:creationId xmlns:p14="http://schemas.microsoft.com/office/powerpoint/2010/main" val="2901826671"/>
-      </p:ext>
-    </p:extLst>
   </p:cSld>
   <p:clrMapOvr>
     <a:masterClrMapping/>
@@ -1946,13 +1703,7 @@
       </p:grpSpPr>
       <p:sp>
         <p:nvSpPr>
-          <p:cNvPr id="2" name="Title 1">
-            <a:extLst>
-              <a:ext uri="{FF2B5EF4-FFF2-40B4-BE49-F238E27FC236}">
-                <a16:creationId xmlns:a16="http://schemas.microsoft.com/office/drawing/2014/main" id="{8FB35906-CC3A-18E9-FFC7-3CC0E6F8295B}"/>
-              </a:ext>
-            </a:extLst>
-          </p:cNvPr>
+          <p:cNvPr id="2" name="Title 1"/>
           <p:cNvSpPr>
             <a:spLocks noGrp="1"/>
           </p:cNvSpPr>
@@ -1969,18 +1720,13 @@
               <a:rPr lang="en-US"/>
               <a:t>Click to edit Master title style</a:t>
             </a:r>
-          </a:p>
-        </p:txBody>
-      </p:sp>
-      <p:sp>
-        <p:nvSpPr>
-          <p:cNvPr id="3" name="Date Placeholder 2">
-            <a:extLst>
-              <a:ext uri="{FF2B5EF4-FFF2-40B4-BE49-F238E27FC236}">
-                <a16:creationId xmlns:a16="http://schemas.microsoft.com/office/drawing/2014/main" id="{A48BE4E7-0534-1A59-9D88-54D6E0C304BD}"/>
-              </a:ext>
-            </a:extLst>
-          </p:cNvPr>
+            <a:endParaRPr lang="en-US"/>
+          </a:p>
+        </p:txBody>
+      </p:sp>
+      <p:sp>
+        <p:nvSpPr>
+          <p:cNvPr id="3" name="Date Placeholder 2"/>
           <p:cNvSpPr>
             <a:spLocks noGrp="1"/>
           </p:cNvSpPr>
@@ -1995,7 +1741,6 @@
           <a:p>
             <a:fld id="{4FF4D43A-CA54-4223-BC20-661FD2291EC5}" type="datetimeFigureOut">
               <a:rPr lang="en-US" smtClean="0"/>
-              <a:t>4/21/2026</a:t>
             </a:fld>
             <a:endParaRPr lang="en-US"/>
           </a:p>
@@ -2003,13 +1748,7 @@
       </p:sp>
       <p:sp>
         <p:nvSpPr>
-          <p:cNvPr id="4" name="Footer Placeholder 3">
-            <a:extLst>
-              <a:ext uri="{FF2B5EF4-FFF2-40B4-BE49-F238E27FC236}">
-                <a16:creationId xmlns:a16="http://schemas.microsoft.com/office/drawing/2014/main" id="{5CCD19F7-4EAF-FB1C-4380-2351C14FC164}"/>
-              </a:ext>
-            </a:extLst>
-          </p:cNvPr>
+          <p:cNvPr id="4" name="Footer Placeholder 3"/>
           <p:cNvSpPr>
             <a:spLocks noGrp="1"/>
           </p:cNvSpPr>
@@ -2028,13 +1767,7 @@
       </p:sp>
       <p:sp>
         <p:nvSpPr>
-          <p:cNvPr id="5" name="Slide Number Placeholder 4">
-            <a:extLst>
-              <a:ext uri="{FF2B5EF4-FFF2-40B4-BE49-F238E27FC236}">
-                <a16:creationId xmlns:a16="http://schemas.microsoft.com/office/drawing/2014/main" id="{01EF93B5-54CE-54BF-6272-D377E0517DCA}"/>
-              </a:ext>
-            </a:extLst>
-          </p:cNvPr>
+          <p:cNvPr id="5" name="Slide Number Placeholder 4"/>
           <p:cNvSpPr>
             <a:spLocks noGrp="1"/>
           </p:cNvSpPr>
@@ -2049,18 +1782,12 @@
           <a:p>
             <a:fld id="{7C1E35B6-5494-48BA-BCAA-8C49D4DC5465}" type="slidenum">
               <a:rPr lang="en-US" smtClean="0"/>
-              <a:t>‹#›</a:t>
             </a:fld>
             <a:endParaRPr lang="en-US"/>
           </a:p>
         </p:txBody>
       </p:sp>
     </p:spTree>
-    <p:extLst>
-      <p:ext uri="{BB962C8B-B14F-4D97-AF65-F5344CB8AC3E}">
-        <p14:creationId xmlns:p14="http://schemas.microsoft.com/office/powerpoint/2010/main" val="442310930"/>
-      </p:ext>
-    </p:extLst>
   </p:cSld>
   <p:clrMapOvr>
     <a:masterClrMapping/>
@@ -2087,13 +1814,7 @@
       </p:grpSpPr>
       <p:sp>
         <p:nvSpPr>
-          <p:cNvPr id="2" name="Date Placeholder 1">
-            <a:extLst>
-              <a:ext uri="{FF2B5EF4-FFF2-40B4-BE49-F238E27FC236}">
-                <a16:creationId xmlns:a16="http://schemas.microsoft.com/office/drawing/2014/main" id="{46A687F6-F33B-9736-650D-0898726B6518}"/>
-              </a:ext>
-            </a:extLst>
-          </p:cNvPr>
+          <p:cNvPr id="2" name="Date Placeholder 1"/>
           <p:cNvSpPr>
             <a:spLocks noGrp="1"/>
           </p:cNvSpPr>
@@ -2108,7 +1829,6 @@
           <a:p>
             <a:fld id="{4FF4D43A-CA54-4223-BC20-661FD2291EC5}" type="datetimeFigureOut">
               <a:rPr lang="en-US" smtClean="0"/>
-              <a:t>4/21/2026</a:t>
             </a:fld>
             <a:endParaRPr lang="en-US"/>
           </a:p>
@@ -2116,13 +1836,7 @@
       </p:sp>
       <p:sp>
         <p:nvSpPr>
-          <p:cNvPr id="3" name="Footer Placeholder 2">
-            <a:extLst>
-              <a:ext uri="{FF2B5EF4-FFF2-40B4-BE49-F238E27FC236}">
-                <a16:creationId xmlns:a16="http://schemas.microsoft.com/office/drawing/2014/main" id="{01B70634-50E2-0B1B-F551-F05BD1159409}"/>
-              </a:ext>
-            </a:extLst>
-          </p:cNvPr>
+          <p:cNvPr id="3" name="Footer Placeholder 2"/>
           <p:cNvSpPr>
             <a:spLocks noGrp="1"/>
           </p:cNvSpPr>
@@ -2141,13 +1855,7 @@
       </p:sp>
       <p:sp>
         <p:nvSpPr>
-          <p:cNvPr id="4" name="Slide Number Placeholder 3">
-            <a:extLst>
-              <a:ext uri="{FF2B5EF4-FFF2-40B4-BE49-F238E27FC236}">
-                <a16:creationId xmlns:a16="http://schemas.microsoft.com/office/drawing/2014/main" id="{698B73FB-50FB-CCEB-1F51-C2ADA41CA1C0}"/>
-              </a:ext>
-            </a:extLst>
-          </p:cNvPr>
+          <p:cNvPr id="4" name="Slide Number Placeholder 3"/>
           <p:cNvSpPr>
             <a:spLocks noGrp="1"/>
           </p:cNvSpPr>
@@ -2162,18 +1870,12 @@
           <a:p>
             <a:fld id="{7C1E35B6-5494-48BA-BCAA-8C49D4DC5465}" type="slidenum">
               <a:rPr lang="en-US" smtClean="0"/>
-              <a:t>‹#›</a:t>
             </a:fld>
             <a:endParaRPr lang="en-US"/>
           </a:p>
         </p:txBody>
       </p:sp>
     </p:spTree>
-    <p:extLst>
-      <p:ext uri="{BB962C8B-B14F-4D97-AF65-F5344CB8AC3E}">
-        <p14:creationId xmlns:p14="http://schemas.microsoft.com/office/powerpoint/2010/main" val="2328925106"/>
-      </p:ext>
-    </p:extLst>
   </p:cSld>
   <p:clrMapOvr>
     <a:masterClrMapping/>
@@ -2200,13 +1902,7 @@
       </p:grpSpPr>
       <p:sp>
         <p:nvSpPr>
-          <p:cNvPr id="2" name="Title 1">
-            <a:extLst>
-              <a:ext uri="{FF2B5EF4-FFF2-40B4-BE49-F238E27FC236}">
-                <a16:creationId xmlns:a16="http://schemas.microsoft.com/office/drawing/2014/main" id="{2B90A65E-7094-D2BA-B46D-3A062CA1A5D8}"/>
-              </a:ext>
-            </a:extLst>
-          </p:cNvPr>
+          <p:cNvPr id="2" name="Title 1"/>
           <p:cNvSpPr>
             <a:spLocks noGrp="1"/>
           </p:cNvSpPr>
@@ -2232,18 +1928,13 @@
               <a:rPr lang="en-US"/>
               <a:t>Click to edit Master title style</a:t>
             </a:r>
-          </a:p>
-        </p:txBody>
-      </p:sp>
-      <p:sp>
-        <p:nvSpPr>
-          <p:cNvPr id="3" name="Content Placeholder 2">
-            <a:extLst>
-              <a:ext uri="{FF2B5EF4-FFF2-40B4-BE49-F238E27FC236}">
-                <a16:creationId xmlns:a16="http://schemas.microsoft.com/office/drawing/2014/main" id="{F6C64074-391F-080F-3C5C-D63BFBF1F3F8}"/>
-              </a:ext>
-            </a:extLst>
-          </p:cNvPr>
+            <a:endParaRPr lang="en-US"/>
+          </a:p>
+        </p:txBody>
+      </p:sp>
+      <p:sp>
+        <p:nvSpPr>
+          <p:cNvPr id="3" name="Content Placeholder 2"/>
           <p:cNvSpPr>
             <a:spLocks noGrp="1"/>
           </p:cNvSpPr>
@@ -2294,6 +1985,7 @@
               <a:rPr lang="en-US"/>
               <a:t>Click to edit Master text styles</a:t>
             </a:r>
+            <a:endParaRPr lang="en-US"/>
           </a:p>
           <a:p>
             <a:pPr lvl="1"/>
@@ -2301,6 +1993,7 @@
               <a:rPr lang="en-US"/>
               <a:t>Second level</a:t>
             </a:r>
+            <a:endParaRPr lang="en-US"/>
           </a:p>
           <a:p>
             <a:pPr lvl="2"/>
@@ -2308,6 +2001,7 @@
               <a:rPr lang="en-US"/>
               <a:t>Third level</a:t>
             </a:r>
+            <a:endParaRPr lang="en-US"/>
           </a:p>
           <a:p>
             <a:pPr lvl="3"/>
@@ -2315,6 +2009,7 @@
               <a:rPr lang="en-US"/>
               <a:t>Fourth level</a:t>
             </a:r>
+            <a:endParaRPr lang="en-US"/>
           </a:p>
           <a:p>
             <a:pPr lvl="4"/>
@@ -2322,18 +2017,13 @@
               <a:rPr lang="en-US"/>
               <a:t>Fifth level</a:t>
             </a:r>
-          </a:p>
-        </p:txBody>
-      </p:sp>
-      <p:sp>
-        <p:nvSpPr>
-          <p:cNvPr id="4" name="Text Placeholder 3">
-            <a:extLst>
-              <a:ext uri="{FF2B5EF4-FFF2-40B4-BE49-F238E27FC236}">
-                <a16:creationId xmlns:a16="http://schemas.microsoft.com/office/drawing/2014/main" id="{F5B854FE-E084-B143-80B7-6AEAA64E9F79}"/>
-              </a:ext>
-            </a:extLst>
-          </p:cNvPr>
+            <a:endParaRPr lang="en-US"/>
+          </a:p>
+        </p:txBody>
+      </p:sp>
+      <p:sp>
+        <p:nvSpPr>
+          <p:cNvPr id="4" name="Text Placeholder 3"/>
           <p:cNvSpPr>
             <a:spLocks noGrp="1"/>
           </p:cNvSpPr>
@@ -2393,18 +2083,13 @@
               <a:rPr lang="en-US"/>
               <a:t>Click to edit Master text styles</a:t>
             </a:r>
-          </a:p>
-        </p:txBody>
-      </p:sp>
-      <p:sp>
-        <p:nvSpPr>
-          <p:cNvPr id="5" name="Date Placeholder 4">
-            <a:extLst>
-              <a:ext uri="{FF2B5EF4-FFF2-40B4-BE49-F238E27FC236}">
-                <a16:creationId xmlns:a16="http://schemas.microsoft.com/office/drawing/2014/main" id="{7F12E9C3-C9C7-0DF5-C731-6326FEDDD38E}"/>
-              </a:ext>
-            </a:extLst>
-          </p:cNvPr>
+            <a:endParaRPr lang="en-US"/>
+          </a:p>
+        </p:txBody>
+      </p:sp>
+      <p:sp>
+        <p:nvSpPr>
+          <p:cNvPr id="5" name="Date Placeholder 4"/>
           <p:cNvSpPr>
             <a:spLocks noGrp="1"/>
           </p:cNvSpPr>
@@ -2419,7 +2104,6 @@
           <a:p>
             <a:fld id="{4FF4D43A-CA54-4223-BC20-661FD2291EC5}" type="datetimeFigureOut">
               <a:rPr lang="en-US" smtClean="0"/>
-              <a:t>4/21/2026</a:t>
             </a:fld>
             <a:endParaRPr lang="en-US"/>
           </a:p>
@@ -2427,13 +2111,7 @@
       </p:sp>
       <p:sp>
         <p:nvSpPr>
-          <p:cNvPr id="6" name="Footer Placeholder 5">
-            <a:extLst>
-              <a:ext uri="{FF2B5EF4-FFF2-40B4-BE49-F238E27FC236}">
-                <a16:creationId xmlns:a16="http://schemas.microsoft.com/office/drawing/2014/main" id="{751E64A8-CD16-1A35-DA2F-9F0BE9FA9775}"/>
-              </a:ext>
-            </a:extLst>
-          </p:cNvPr>
+          <p:cNvPr id="6" name="Footer Placeholder 5"/>
           <p:cNvSpPr>
             <a:spLocks noGrp="1"/>
           </p:cNvSpPr>
@@ -2452,13 +2130,7 @@
       </p:sp>
       <p:sp>
         <p:nvSpPr>
-          <p:cNvPr id="7" name="Slide Number Placeholder 6">
-            <a:extLst>
-              <a:ext uri="{FF2B5EF4-FFF2-40B4-BE49-F238E27FC236}">
-                <a16:creationId xmlns:a16="http://schemas.microsoft.com/office/drawing/2014/main" id="{8091C157-5A54-B15E-4793-A18BED68FA99}"/>
-              </a:ext>
-            </a:extLst>
-          </p:cNvPr>
+          <p:cNvPr id="7" name="Slide Number Placeholder 6"/>
           <p:cNvSpPr>
             <a:spLocks noGrp="1"/>
           </p:cNvSpPr>
@@ -2473,18 +2145,12 @@
           <a:p>
             <a:fld id="{7C1E35B6-5494-48BA-BCAA-8C49D4DC5465}" type="slidenum">
               <a:rPr lang="en-US" smtClean="0"/>
-              <a:t>‹#›</a:t>
             </a:fld>
             <a:endParaRPr lang="en-US"/>
           </a:p>
         </p:txBody>
       </p:sp>
     </p:spTree>
-    <p:extLst>
-      <p:ext uri="{BB962C8B-B14F-4D97-AF65-F5344CB8AC3E}">
-        <p14:creationId xmlns:p14="http://schemas.microsoft.com/office/powerpoint/2010/main" val="1979876861"/>
-      </p:ext>
-    </p:extLst>
   </p:cSld>
   <p:clrMapOvr>
     <a:masterClrMapping/>
@@ -2511,13 +2177,7 @@
       </p:grpSpPr>
       <p:sp>
         <p:nvSpPr>
-          <p:cNvPr id="2" name="Title 1">
-            <a:extLst>
-              <a:ext uri="{FF2B5EF4-FFF2-40B4-BE49-F238E27FC236}">
-                <a16:creationId xmlns:a16="http://schemas.microsoft.com/office/drawing/2014/main" id="{1D780E6D-1E17-891D-67C5-2118F1340962}"/>
-              </a:ext>
-            </a:extLst>
-          </p:cNvPr>
+          <p:cNvPr id="2" name="Title 1"/>
           <p:cNvSpPr>
             <a:spLocks noGrp="1"/>
           </p:cNvSpPr>
@@ -2543,18 +2203,13 @@
               <a:rPr lang="en-US"/>
               <a:t>Click to edit Master title style</a:t>
             </a:r>
-          </a:p>
-        </p:txBody>
-      </p:sp>
-      <p:sp>
-        <p:nvSpPr>
-          <p:cNvPr id="3" name="Picture Placeholder 2">
-            <a:extLst>
-              <a:ext uri="{FF2B5EF4-FFF2-40B4-BE49-F238E27FC236}">
-                <a16:creationId xmlns:a16="http://schemas.microsoft.com/office/drawing/2014/main" id="{02DA65E0-B7A1-58D5-5429-68B0BE51B351}"/>
-              </a:ext>
-            </a:extLst>
-          </p:cNvPr>
+            <a:endParaRPr lang="en-US"/>
+          </a:p>
+        </p:txBody>
+      </p:sp>
+      <p:sp>
+        <p:nvSpPr>
+          <p:cNvPr id="3" name="Picture Placeholder 2"/>
           <p:cNvSpPr>
             <a:spLocks noGrp="1"/>
           </p:cNvSpPr>
@@ -2615,13 +2270,7 @@
       </p:sp>
       <p:sp>
         <p:nvSpPr>
-          <p:cNvPr id="4" name="Text Placeholder 3">
-            <a:extLst>
-              <a:ext uri="{FF2B5EF4-FFF2-40B4-BE49-F238E27FC236}">
-                <a16:creationId xmlns:a16="http://schemas.microsoft.com/office/drawing/2014/main" id="{D466FD95-8F7A-C18A-4515-1D2568D6D7EA}"/>
-              </a:ext>
-            </a:extLst>
-          </p:cNvPr>
+          <p:cNvPr id="4" name="Text Placeholder 3"/>
           <p:cNvSpPr>
             <a:spLocks noGrp="1"/>
           </p:cNvSpPr>
@@ -2681,18 +2330,13 @@
               <a:rPr lang="en-US"/>
               <a:t>Click to edit Master text styles</a:t>
             </a:r>
-          </a:p>
-        </p:txBody>
-      </p:sp>
-      <p:sp>
-        <p:nvSpPr>
-          <p:cNvPr id="5" name="Date Placeholder 4">
-            <a:extLst>
-              <a:ext uri="{FF2B5EF4-FFF2-40B4-BE49-F238E27FC236}">
-                <a16:creationId xmlns:a16="http://schemas.microsoft.com/office/drawing/2014/main" id="{B4B3115A-7240-8D6F-737D-758B8A5BA29C}"/>
-              </a:ext>
-            </a:extLst>
-          </p:cNvPr>
+            <a:endParaRPr lang="en-US"/>
+          </a:p>
+        </p:txBody>
+      </p:sp>
+      <p:sp>
+        <p:nvSpPr>
+          <p:cNvPr id="5" name="Date Placeholder 4"/>
           <p:cNvSpPr>
             <a:spLocks noGrp="1"/>
           </p:cNvSpPr>
@@ -2707,7 +2351,6 @@
           <a:p>
             <a:fld id="{4FF4D43A-CA54-4223-BC20-661FD2291EC5}" type="datetimeFigureOut">
               <a:rPr lang="en-US" smtClean="0"/>
-              <a:t>4/21/2026</a:t>
             </a:fld>
             <a:endParaRPr lang="en-US"/>
           </a:p>
@@ -2715,13 +2358,7 @@
       </p:sp>
       <p:sp>
         <p:nvSpPr>
-          <p:cNvPr id="6" name="Footer Placeholder 5">
-            <a:extLst>
-              <a:ext uri="{FF2B5EF4-FFF2-40B4-BE49-F238E27FC236}">
-                <a16:creationId xmlns:a16="http://schemas.microsoft.com/office/drawing/2014/main" id="{83DD8E61-4535-15F4-DBD0-0B3B0B1BAECE}"/>
-              </a:ext>
-            </a:extLst>
-          </p:cNvPr>
+          <p:cNvPr id="6" name="Footer Placeholder 5"/>
           <p:cNvSpPr>
             <a:spLocks noGrp="1"/>
           </p:cNvSpPr>
@@ -2740,13 +2377,7 @@
       </p:sp>
       <p:sp>
         <p:nvSpPr>
-          <p:cNvPr id="7" name="Slide Number Placeholder 6">
-            <a:extLst>
-              <a:ext uri="{FF2B5EF4-FFF2-40B4-BE49-F238E27FC236}">
-                <a16:creationId xmlns:a16="http://schemas.microsoft.com/office/drawing/2014/main" id="{355C521A-DED3-0D8D-0E42-46EB0910F837}"/>
-              </a:ext>
-            </a:extLst>
-          </p:cNvPr>
+          <p:cNvPr id="7" name="Slide Number Placeholder 6"/>
           <p:cNvSpPr>
             <a:spLocks noGrp="1"/>
           </p:cNvSpPr>
@@ -2761,18 +2392,12 @@
           <a:p>
             <a:fld id="{7C1E35B6-5494-48BA-BCAA-8C49D4DC5465}" type="slidenum">
               <a:rPr lang="en-US" smtClean="0"/>
-              <a:t>‹#›</a:t>
             </a:fld>
             <a:endParaRPr lang="en-US"/>
           </a:p>
         </p:txBody>
       </p:sp>
     </p:spTree>
-    <p:extLst>
-      <p:ext uri="{BB962C8B-B14F-4D97-AF65-F5344CB8AC3E}">
-        <p14:creationId xmlns:p14="http://schemas.microsoft.com/office/powerpoint/2010/main" val="2164694163"/>
-      </p:ext>
-    </p:extLst>
   </p:cSld>
   <p:clrMapOvr>
     <a:masterClrMapping/>
@@ -2804,13 +2429,7 @@
       </p:grpSpPr>
       <p:sp>
         <p:nvSpPr>
-          <p:cNvPr id="2" name="Title Placeholder 1">
-            <a:extLst>
-              <a:ext uri="{FF2B5EF4-FFF2-40B4-BE49-F238E27FC236}">
-                <a16:creationId xmlns:a16="http://schemas.microsoft.com/office/drawing/2014/main" id="{55F53DA6-F1FC-776B-85EE-C990DDF813CC}"/>
-              </a:ext>
-            </a:extLst>
-          </p:cNvPr>
+          <p:cNvPr id="2" name="Title Placeholder 1"/>
           <p:cNvSpPr>
             <a:spLocks noGrp="1"/>
           </p:cNvSpPr>
@@ -2837,18 +2456,13 @@
               <a:rPr lang="en-US"/>
               <a:t>Click to edit Master title style</a:t>
             </a:r>
-          </a:p>
-        </p:txBody>
-      </p:sp>
-      <p:sp>
-        <p:nvSpPr>
-          <p:cNvPr id="3" name="Text Placeholder 2">
-            <a:extLst>
-              <a:ext uri="{FF2B5EF4-FFF2-40B4-BE49-F238E27FC236}">
-                <a16:creationId xmlns:a16="http://schemas.microsoft.com/office/drawing/2014/main" id="{F562207C-823C-8B4F-7608-C35B9715F8CC}"/>
-              </a:ext>
-            </a:extLst>
-          </p:cNvPr>
+            <a:endParaRPr lang="en-US"/>
+          </a:p>
+        </p:txBody>
+      </p:sp>
+      <p:sp>
+        <p:nvSpPr>
+          <p:cNvPr id="3" name="Text Placeholder 2"/>
           <p:cNvSpPr>
             <a:spLocks noGrp="1"/>
           </p:cNvSpPr>
@@ -2876,6 +2490,7 @@
               <a:rPr lang="en-US"/>
               <a:t>Click to edit Master text styles</a:t>
             </a:r>
+            <a:endParaRPr lang="en-US"/>
           </a:p>
           <a:p>
             <a:pPr lvl="1"/>
@@ -2883,6 +2498,7 @@
               <a:rPr lang="en-US"/>
               <a:t>Second level</a:t>
             </a:r>
+            <a:endParaRPr lang="en-US"/>
           </a:p>
           <a:p>
             <a:pPr lvl="2"/>
@@ -2890,6 +2506,7 @@
               <a:rPr lang="en-US"/>
               <a:t>Third level</a:t>
             </a:r>
+            <a:endParaRPr lang="en-US"/>
           </a:p>
           <a:p>
             <a:pPr lvl="3"/>
@@ -2897,6 +2514,7 @@
               <a:rPr lang="en-US"/>
               <a:t>Fourth level</a:t>
             </a:r>
+            <a:endParaRPr lang="en-US"/>
           </a:p>
           <a:p>
             <a:pPr lvl="4"/>
@@ -2904,18 +2522,13 @@
               <a:rPr lang="en-US"/>
               <a:t>Fifth level</a:t>
             </a:r>
-          </a:p>
-        </p:txBody>
-      </p:sp>
-      <p:sp>
-        <p:nvSpPr>
-          <p:cNvPr id="4" name="Date Placeholder 3">
-            <a:extLst>
-              <a:ext uri="{FF2B5EF4-FFF2-40B4-BE49-F238E27FC236}">
-                <a16:creationId xmlns:a16="http://schemas.microsoft.com/office/drawing/2014/main" id="{2136BDBA-7278-7191-F695-553DCD9AB605}"/>
-              </a:ext>
-            </a:extLst>
-          </p:cNvPr>
+            <a:endParaRPr lang="en-US"/>
+          </a:p>
+        </p:txBody>
+      </p:sp>
+      <p:sp>
+        <p:nvSpPr>
+          <p:cNvPr id="4" name="Date Placeholder 3"/>
           <p:cNvSpPr>
             <a:spLocks noGrp="1"/>
           </p:cNvSpPr>
@@ -2948,7 +2561,6 @@
           <a:p>
             <a:fld id="{4FF4D43A-CA54-4223-BC20-661FD2291EC5}" type="datetimeFigureOut">
               <a:rPr lang="en-US" smtClean="0"/>
-              <a:t>4/21/2026</a:t>
             </a:fld>
             <a:endParaRPr lang="en-US"/>
           </a:p>
@@ -2956,13 +2568,7 @@
       </p:sp>
       <p:sp>
         <p:nvSpPr>
-          <p:cNvPr id="5" name="Footer Placeholder 4">
-            <a:extLst>
-              <a:ext uri="{FF2B5EF4-FFF2-40B4-BE49-F238E27FC236}">
-                <a16:creationId xmlns:a16="http://schemas.microsoft.com/office/drawing/2014/main" id="{6EE344D7-060F-829C-E152-8AA59C62C7D6}"/>
-              </a:ext>
-            </a:extLst>
-          </p:cNvPr>
+          <p:cNvPr id="5" name="Footer Placeholder 4"/>
           <p:cNvSpPr>
             <a:spLocks noGrp="1"/>
           </p:cNvSpPr>
@@ -2999,13 +2605,7 @@
       </p:sp>
       <p:sp>
         <p:nvSpPr>
-          <p:cNvPr id="6" name="Slide Number Placeholder 5">
-            <a:extLst>
-              <a:ext uri="{FF2B5EF4-FFF2-40B4-BE49-F238E27FC236}">
-                <a16:creationId xmlns:a16="http://schemas.microsoft.com/office/drawing/2014/main" id="{FA1DC0B6-7C5B-D942-76F8-50DFF0C5FC47}"/>
-              </a:ext>
-            </a:extLst>
-          </p:cNvPr>
+          <p:cNvPr id="6" name="Slide Number Placeholder 5"/>
           <p:cNvSpPr>
             <a:spLocks noGrp="1"/>
           </p:cNvSpPr>
@@ -3038,18 +2638,12 @@
           <a:p>
             <a:fld id="{7C1E35B6-5494-48BA-BCAA-8C49D4DC5465}" type="slidenum">
               <a:rPr lang="en-US" smtClean="0"/>
-              <a:t>‹#›</a:t>
             </a:fld>
             <a:endParaRPr lang="en-US"/>
           </a:p>
         </p:txBody>
       </p:sp>
     </p:spTree>
-    <p:extLst>
-      <p:ext uri="{BB962C8B-B14F-4D97-AF65-F5344CB8AC3E}">
-        <p14:creationId xmlns:p14="http://schemas.microsoft.com/office/powerpoint/2010/main" val="2273656649"/>
-      </p:ext>
-    </p:extLst>
   </p:cSld>
   <p:clrMap bg1="lt1" tx1="dk1" bg2="lt2" tx2="dk2" accent1="accent1" accent2="accent2" accent3="accent3" accent4="accent4" accent5="accent5" accent6="accent6" hlink="hlink" folHlink="folHlink"/>
   <p:sldLayoutIdLst>
@@ -3093,7 +2687,7 @@
         <a:spcBef>
           <a:spcPts val="1000"/>
         </a:spcBef>
-        <a:buFont typeface="Arial" panose="020B0604020202020204" pitchFamily="34" charset="0"/>
+        <a:buFont typeface="Arial" panose="02080604020202020204" pitchFamily="34" charset="0"/>
         <a:buChar char="•"/>
         <a:defRPr sz="2800" kern="1200">
           <a:solidFill>
@@ -3111,7 +2705,7 @@
         <a:spcBef>
           <a:spcPts val="500"/>
         </a:spcBef>
-        <a:buFont typeface="Arial" panose="020B0604020202020204" pitchFamily="34" charset="0"/>
+        <a:buFont typeface="Arial" panose="02080604020202020204" pitchFamily="34" charset="0"/>
         <a:buChar char="•"/>
         <a:defRPr sz="2400" kern="1200">
           <a:solidFill>
@@ -3129,7 +2723,7 @@
         <a:spcBef>
           <a:spcPts val="500"/>
         </a:spcBef>
-        <a:buFont typeface="Arial" panose="020B0604020202020204" pitchFamily="34" charset="0"/>
+        <a:buFont typeface="Arial" panose="02080604020202020204" pitchFamily="34" charset="0"/>
         <a:buChar char="•"/>
         <a:defRPr sz="2000" kern="1200">
           <a:solidFill>
@@ -3147,7 +2741,7 @@
         <a:spcBef>
           <a:spcPts val="500"/>
         </a:spcBef>
-        <a:buFont typeface="Arial" panose="020B0604020202020204" pitchFamily="34" charset="0"/>
+        <a:buFont typeface="Arial" panose="02080604020202020204" pitchFamily="34" charset="0"/>
         <a:buChar char="•"/>
         <a:defRPr sz="1800" kern="1200">
           <a:solidFill>
@@ -3165,7 +2759,7 @@
         <a:spcBef>
           <a:spcPts val="500"/>
         </a:spcBef>
-        <a:buFont typeface="Arial" panose="020B0604020202020204" pitchFamily="34" charset="0"/>
+        <a:buFont typeface="Arial" panose="02080604020202020204" pitchFamily="34" charset="0"/>
         <a:buChar char="•"/>
         <a:defRPr sz="1800" kern="1200">
           <a:solidFill>
@@ -3183,7 +2777,7 @@
         <a:spcBef>
           <a:spcPts val="500"/>
         </a:spcBef>
-        <a:buFont typeface="Arial" panose="020B0604020202020204" pitchFamily="34" charset="0"/>
+        <a:buFont typeface="Arial" panose="02080604020202020204" pitchFamily="34" charset="0"/>
         <a:buChar char="•"/>
         <a:defRPr sz="1800" kern="1200">
           <a:solidFill>
@@ -3201,7 +2795,7 @@
         <a:spcBef>
           <a:spcPts val="500"/>
         </a:spcBef>
-        <a:buFont typeface="Arial" panose="020B0604020202020204" pitchFamily="34" charset="0"/>
+        <a:buFont typeface="Arial" panose="02080604020202020204" pitchFamily="34" charset="0"/>
         <a:buChar char="•"/>
         <a:defRPr sz="1800" kern="1200">
           <a:solidFill>
@@ -3219,7 +2813,7 @@
         <a:spcBef>
           <a:spcPts val="500"/>
         </a:spcBef>
-        <a:buFont typeface="Arial" panose="020B0604020202020204" pitchFamily="34" charset="0"/>
+        <a:buFont typeface="Arial" panose="02080604020202020204" pitchFamily="34" charset="0"/>
         <a:buChar char="•"/>
         <a:defRPr sz="1800" kern="1200">
           <a:solidFill>
@@ -3237,7 +2831,7 @@
         <a:spcBef>
           <a:spcPts val="500"/>
         </a:spcBef>
-        <a:buFont typeface="Arial" panose="020B0604020202020204" pitchFamily="34" charset="0"/>
+        <a:buFont typeface="Arial" panose="02080604020202020204" pitchFamily="34" charset="0"/>
         <a:buChar char="•"/>
         <a:defRPr sz="1800" kern="1200">
           <a:solidFill>
@@ -3367,13 +2961,7 @@
       </p:grpSpPr>
       <p:sp>
         <p:nvSpPr>
-          <p:cNvPr id="2" name="Title 1">
-            <a:extLst>
-              <a:ext uri="{FF2B5EF4-FFF2-40B4-BE49-F238E27FC236}">
-                <a16:creationId xmlns:a16="http://schemas.microsoft.com/office/drawing/2014/main" id="{1BD0DBF2-D222-B529-F035-891399485D50}"/>
-              </a:ext>
-            </a:extLst>
-          </p:cNvPr>
+          <p:cNvPr id="2" name="Title 1"/>
           <p:cNvSpPr>
             <a:spLocks noGrp="1"/>
           </p:cNvSpPr>
@@ -3390,15 +2978,11 @@
               <a:rPr lang="en-US" dirty="0"/>
               <a:t>UNIT 3 </a:t>
             </a:r>
+            <a:endParaRPr lang="en-US" dirty="0"/>
           </a:p>
         </p:txBody>
       </p:sp>
     </p:spTree>
-    <p:extLst>
-      <p:ext uri="{BB962C8B-B14F-4D97-AF65-F5344CB8AC3E}">
-        <p14:creationId xmlns:p14="http://schemas.microsoft.com/office/powerpoint/2010/main" val="3867489422"/>
-      </p:ext>
-    </p:extLst>
   </p:cSld>
   <p:clrMapOvr>
     <a:masterClrMapping/>
@@ -3425,13 +3009,7 @@
       </p:grpSpPr>
       <p:sp>
         <p:nvSpPr>
-          <p:cNvPr id="3" name="Content Placeholder 2">
-            <a:extLst>
-              <a:ext uri="{FF2B5EF4-FFF2-40B4-BE49-F238E27FC236}">
-                <a16:creationId xmlns:a16="http://schemas.microsoft.com/office/drawing/2014/main" id="{93BB4CF5-24A5-0921-7DA3-48EA456123D9}"/>
-              </a:ext>
-            </a:extLst>
-          </p:cNvPr>
+          <p:cNvPr id="3" name="Content Placeholder 2"/>
           <p:cNvSpPr>
             <a:spLocks noGrp="1"/>
           </p:cNvSpPr>
@@ -3455,12 +3033,14 @@
               <a:rPr lang="en-US" b="1" dirty="0"/>
               <a:t>What is Multi-Dimensional Data Model?</a:t>
             </a:r>
+            <a:endParaRPr lang="en-US" b="1" dirty="0"/>
           </a:p>
           <a:p>
             <a:r>
               <a:rPr lang="en-US" dirty="0"/>
               <a:t>A multidimensional model views data in the form of a data-cube. </a:t>
             </a:r>
+            <a:endParaRPr lang="en-US" dirty="0"/>
           </a:p>
           <a:p>
             <a:endParaRPr lang="en-US" dirty="0"/>
@@ -3470,6 +3050,7 @@
               <a:rPr lang="en-US" dirty="0"/>
               <a:t>A data cube enables data to be modeled and viewed in multiple dimensions. </a:t>
             </a:r>
+            <a:endParaRPr lang="en-US" dirty="0"/>
           </a:p>
           <a:p>
             <a:endParaRPr lang="en-US" dirty="0"/>
@@ -3479,6 +3060,7 @@
               <a:rPr lang="en-US" dirty="0"/>
               <a:t>It is defined by dimensions and facts.</a:t>
             </a:r>
+            <a:endParaRPr lang="en-US" dirty="0"/>
           </a:p>
           <a:p>
             <a:endParaRPr lang="en-US" dirty="0"/>
@@ -3488,6 +3070,7 @@
               <a:rPr lang="en-US" dirty="0"/>
               <a:t>The dimensions are the perspectives or entities concerning which an organization keeps records. </a:t>
             </a:r>
+            <a:endParaRPr lang="en-US" dirty="0"/>
           </a:p>
           <a:p>
             <a:endParaRPr lang="en-US" dirty="0"/>
@@ -3497,24 +3080,28 @@
               <a:rPr lang="en-US" dirty="0"/>
               <a:t>For example, a shop may create a sales data warehouse to keep records of the store's sales for </a:t>
             </a:r>
+            <a:endParaRPr lang="en-US" dirty="0"/>
           </a:p>
           <a:p>
             <a:r>
               <a:rPr lang="en-US" dirty="0"/>
               <a:t>the dimension time, </a:t>
             </a:r>
+            <a:endParaRPr lang="en-US" dirty="0"/>
           </a:p>
           <a:p>
             <a:r>
               <a:rPr lang="en-US" dirty="0"/>
               <a:t>item, and </a:t>
             </a:r>
+            <a:endParaRPr lang="en-US" dirty="0"/>
           </a:p>
           <a:p>
             <a:r>
               <a:rPr lang="en-US" dirty="0"/>
               <a:t>location. </a:t>
             </a:r>
+            <a:endParaRPr lang="en-US" dirty="0"/>
           </a:p>
           <a:p>
             <a:endParaRPr lang="en-US" dirty="0"/>
@@ -3522,11 +3109,6 @@
         </p:txBody>
       </p:sp>
     </p:spTree>
-    <p:extLst>
-      <p:ext uri="{BB962C8B-B14F-4D97-AF65-F5344CB8AC3E}">
-        <p14:creationId xmlns:p14="http://schemas.microsoft.com/office/powerpoint/2010/main" val="1260787184"/>
-      </p:ext>
-    </p:extLst>
   </p:cSld>
   <p:clrMapOvr>
     <a:masterClrMapping/>
@@ -3553,13 +3135,7 @@
       </p:grpSpPr>
       <p:sp>
         <p:nvSpPr>
-          <p:cNvPr id="3" name="Content Placeholder 2">
-            <a:extLst>
-              <a:ext uri="{FF2B5EF4-FFF2-40B4-BE49-F238E27FC236}">
-                <a16:creationId xmlns:a16="http://schemas.microsoft.com/office/drawing/2014/main" id="{97140CE6-ADD6-11CC-599D-DA30DD51EE3A}"/>
-              </a:ext>
-            </a:extLst>
-          </p:cNvPr>
+          <p:cNvPr id="3" name="Content Placeholder 2"/>
           <p:cNvSpPr>
             <a:spLocks noGrp="1"/>
           </p:cNvSpPr>
@@ -3583,12 +3159,14 @@
               <a:rPr lang="en-US" dirty="0"/>
               <a:t>These dimensions allow the save to keep track of things, for example, monthly sales of items and the locations at which the items were sold. </a:t>
             </a:r>
+            <a:endParaRPr lang="en-US" dirty="0"/>
           </a:p>
           <a:p>
             <a:r>
               <a:rPr lang="en-US" dirty="0"/>
               <a:t>Each dimension has a table related to it, called a dimensional table, which describes the dimension further.</a:t>
             </a:r>
+            <a:endParaRPr lang="en-US" dirty="0"/>
           </a:p>
           <a:p>
             <a:r>
@@ -3603,33 +3181,30 @@
               <a:rPr lang="en-US" dirty="0"/>
               <a:t>, brand, and type.</a:t>
             </a:r>
+            <a:endParaRPr lang="en-US" dirty="0"/>
           </a:p>
           <a:p>
             <a:r>
               <a:rPr lang="en-US" dirty="0"/>
               <a:t>A multidimensional data model is organized around a central theme, for example, sales. This theme is represented by a fact table.</a:t>
             </a:r>
+            <a:endParaRPr lang="en-US" dirty="0"/>
           </a:p>
           <a:p>
             <a:r>
               <a:rPr lang="en-US" dirty="0"/>
               <a:t> Facts are numerical measures. The fact table contains the names of the facts or measures of the related dimensional tables.</a:t>
             </a:r>
-          </a:p>
-          <a:p>
-            <a:endParaRPr lang="en-US" dirty="0"/>
-          </a:p>
-        </p:txBody>
-      </p:sp>
-      <p:sp>
-        <p:nvSpPr>
-          <p:cNvPr id="5" name="Content Placeholder 4">
-            <a:extLst>
-              <a:ext uri="{FF2B5EF4-FFF2-40B4-BE49-F238E27FC236}">
-                <a16:creationId xmlns:a16="http://schemas.microsoft.com/office/drawing/2014/main" id="{A5161728-F2E5-A119-CF5D-97764FECA6C5}"/>
-              </a:ext>
-            </a:extLst>
-          </p:cNvPr>
+            <a:endParaRPr lang="en-US" dirty="0"/>
+          </a:p>
+          <a:p>
+            <a:endParaRPr lang="en-US" dirty="0"/>
+          </a:p>
+        </p:txBody>
+      </p:sp>
+      <p:sp>
+        <p:nvSpPr>
+          <p:cNvPr id="5" name="Content Placeholder 4"/>
           <p:cNvSpPr>
             <a:spLocks noGrp="1"/>
           </p:cNvSpPr>
@@ -3653,25 +3228,20 @@
               <a:rPr lang="en-US" dirty="0"/>
               <a:t> </a:t>
             </a:r>
+            <a:endParaRPr lang="en-US" dirty="0"/>
           </a:p>
         </p:txBody>
       </p:sp>
       <p:pic>
         <p:nvPicPr>
-          <p:cNvPr id="7" name="Picture 6">
-            <a:extLst>
-              <a:ext uri="{FF2B5EF4-FFF2-40B4-BE49-F238E27FC236}">
-                <a16:creationId xmlns:a16="http://schemas.microsoft.com/office/drawing/2014/main" id="{462CF925-CDF9-F12A-A78F-CC6E6427A770}"/>
-              </a:ext>
-            </a:extLst>
-          </p:cNvPr>
+          <p:cNvPr id="7" name="Picture 6"/>
           <p:cNvPicPr>
             <a:picLocks noChangeAspect="1"/>
           </p:cNvPicPr>
           <p:nvPr/>
         </p:nvPicPr>
         <p:blipFill>
-          <a:blip r:embed="rId2">
+          <a:blip r:embed="rId1">
             <a:extLst>
               <a:ext uri="{28A0092B-C50C-407E-A947-70E740481C1C}">
                 <a14:useLocalDpi xmlns:a14="http://schemas.microsoft.com/office/drawing/2010/main" val="0"/>
@@ -3693,11 +3263,6 @@
         </p:spPr>
       </p:pic>
     </p:spTree>
-    <p:extLst>
-      <p:ext uri="{BB962C8B-B14F-4D97-AF65-F5344CB8AC3E}">
-        <p14:creationId xmlns:p14="http://schemas.microsoft.com/office/powerpoint/2010/main" val="2207313888"/>
-      </p:ext>
-    </p:extLst>
   </p:cSld>
   <p:clrMapOvr>
     <a:masterClrMapping/>
@@ -3724,13 +3289,7 @@
       </p:grpSpPr>
       <p:sp>
         <p:nvSpPr>
-          <p:cNvPr id="3" name="Content Placeholder 2">
-            <a:extLst>
-              <a:ext uri="{FF2B5EF4-FFF2-40B4-BE49-F238E27FC236}">
-                <a16:creationId xmlns:a16="http://schemas.microsoft.com/office/drawing/2014/main" id="{0E0F5D7C-7241-A865-4AED-B4CF9E577FCB}"/>
-              </a:ext>
-            </a:extLst>
-          </p:cNvPr>
+          <p:cNvPr id="3" name="Content Placeholder 2"/>
           <p:cNvSpPr>
             <a:spLocks noGrp="1"/>
           </p:cNvSpPr>
@@ -3754,6 +3313,7 @@
               <a:rPr lang="en-US" dirty="0"/>
               <a:t>Consider the data of a shop for items sold per quarter in the city of Delhi. </a:t>
             </a:r>
+            <a:endParaRPr lang="en-US" dirty="0"/>
           </a:p>
           <a:p>
             <a:endParaRPr lang="en-US" dirty="0"/>
@@ -3763,6 +3323,7 @@
               <a:rPr lang="en-US" dirty="0"/>
               <a:t>The data is shown in the table.</a:t>
             </a:r>
+            <a:endParaRPr lang="en-US" dirty="0"/>
           </a:p>
           <a:p>
             <a:endParaRPr lang="en-US" dirty="0"/>
@@ -3772,6 +3333,7 @@
               <a:rPr lang="en-US" dirty="0"/>
               <a:t> In this 2D representation, the sales for Delhi are shown for the time dimension (organized in quarters) and the item dimension (classified according to the types of an item sold). </a:t>
             </a:r>
+            <a:endParaRPr lang="en-US" dirty="0"/>
           </a:p>
           <a:p>
             <a:endParaRPr lang="en-US" dirty="0"/>
@@ -3800,13 +3362,7 @@
       </p:sp>
       <p:pic>
         <p:nvPicPr>
-          <p:cNvPr id="8" name="Content Placeholder 7">
-            <a:extLst>
-              <a:ext uri="{FF2B5EF4-FFF2-40B4-BE49-F238E27FC236}">
-                <a16:creationId xmlns:a16="http://schemas.microsoft.com/office/drawing/2014/main" id="{BCAC599A-CA16-8915-2678-4984945D8626}"/>
-              </a:ext>
-            </a:extLst>
-          </p:cNvPr>
+          <p:cNvPr id="8" name="Content Placeholder 7"/>
           <p:cNvPicPr>
             <a:picLocks noGrp="1" noChangeAspect="1"/>
           </p:cNvPicPr>
@@ -3815,7 +3371,7 @@
           </p:nvPr>
         </p:nvPicPr>
         <p:blipFill>
-          <a:blip r:embed="rId2">
+          <a:blip r:embed="rId1">
             <a:extLst>
               <a:ext uri="{28A0092B-C50C-407E-A947-70E740481C1C}">
                 <a14:useLocalDpi xmlns:a14="http://schemas.microsoft.com/office/drawing/2010/main" val="0"/>
@@ -3834,11 +3390,6 @@
         </p:spPr>
       </p:pic>
     </p:spTree>
-    <p:extLst>
-      <p:ext uri="{BB962C8B-B14F-4D97-AF65-F5344CB8AC3E}">
-        <p14:creationId xmlns:p14="http://schemas.microsoft.com/office/powerpoint/2010/main" val="2028276631"/>
-      </p:ext>
-    </p:extLst>
   </p:cSld>
   <p:clrMapOvr>
     <a:masterClrMapping/>
@@ -3865,13 +3416,7 @@
       </p:grpSpPr>
       <p:sp>
         <p:nvSpPr>
-          <p:cNvPr id="3" name="Content Placeholder 2">
-            <a:extLst>
-              <a:ext uri="{FF2B5EF4-FFF2-40B4-BE49-F238E27FC236}">
-                <a16:creationId xmlns:a16="http://schemas.microsoft.com/office/drawing/2014/main" id="{DD19D64C-322C-2B7F-B82A-66CADE3BA14E}"/>
-              </a:ext>
-            </a:extLst>
-          </p:cNvPr>
+          <p:cNvPr id="3" name="Content Placeholder 2"/>
           <p:cNvSpPr>
             <a:spLocks noGrp="1"/>
           </p:cNvSpPr>
@@ -3898,6 +3443,9 @@
               </a:rPr>
               <a:t>What is OLAP?</a:t>
             </a:r>
+            <a:endParaRPr lang="en-US" b="1" dirty="0">
+              <a:effectLst/>
+            </a:endParaRPr>
           </a:p>
           <a:p>
             <a:pPr algn="just"/>
@@ -3907,6 +3455,9 @@
               </a:rPr>
               <a:t>OLAP stands for Online Analytical Processing, which is a technology that enables multi-dimensional analysis of business data.</a:t>
             </a:r>
+            <a:endParaRPr lang="en-US" dirty="0">
+              <a:effectLst/>
+            </a:endParaRPr>
           </a:p>
           <a:p>
             <a:pPr algn="just"/>
@@ -3916,6 +3467,9 @@
               </a:rPr>
               <a:t> It provides interactive access to large amounts of data and supports complex calculations and data aggregation.</a:t>
             </a:r>
+            <a:endParaRPr lang="en-US" dirty="0">
+              <a:effectLst/>
+            </a:endParaRPr>
           </a:p>
           <a:p>
             <a:pPr algn="just"/>
@@ -3925,6 +3479,9 @@
               </a:rPr>
               <a:t> OLAP is used to support business intelligence and decision-making processes. </a:t>
             </a:r>
+            <a:endParaRPr lang="en-US" dirty="0">
+              <a:effectLst/>
+            </a:endParaRPr>
           </a:p>
           <a:p>
             <a:pPr algn="just"/>
@@ -3934,6 +3491,9 @@
               </a:rPr>
               <a:t>Grouping of data in a multidimensional matrix is called data cubes.</a:t>
             </a:r>
+            <a:endParaRPr lang="en-US" dirty="0">
+              <a:effectLst/>
+            </a:endParaRPr>
           </a:p>
           <a:p>
             <a:pPr algn="just"/>
@@ -3943,6 +3503,9 @@
               </a:rPr>
               <a:t> In Data warehousing, we generally deal with various multidimensional data models as the data will be represented by multiple dimensions and multiple attributes.</a:t>
             </a:r>
+            <a:endParaRPr lang="en-US" dirty="0">
+              <a:effectLst/>
+            </a:endParaRPr>
           </a:p>
           <a:p>
             <a:pPr algn="just"/>
@@ -3952,6 +3515,9 @@
               </a:rPr>
               <a:t> This multidimensional data is represented in the data cube as the cube represents a high-dimensional space. </a:t>
             </a:r>
+            <a:endParaRPr lang="en-US" dirty="0">
+              <a:effectLst/>
+            </a:endParaRPr>
           </a:p>
           <a:p>
             <a:pPr algn="just"/>
@@ -3961,6 +3527,9 @@
               </a:rPr>
               <a:t>The Data cube pictorially shows how different attributes of data are arranged in the data model. Below is the diagram of a general data cube.  </a:t>
             </a:r>
+            <a:endParaRPr lang="en-US" dirty="0">
+              <a:effectLst/>
+            </a:endParaRPr>
           </a:p>
           <a:p>
             <a:pPr algn="just"/>
@@ -3993,6 +3562,9 @@
               </a:rPr>
               <a:t> </a:t>
             </a:r>
+            <a:endParaRPr lang="en-US" dirty="0">
+              <a:effectLst/>
+            </a:endParaRPr>
           </a:p>
           <a:p>
             <a:pPr algn="just"/>
@@ -4007,13 +3579,7 @@
       </p:sp>
       <p:pic>
         <p:nvPicPr>
-          <p:cNvPr id="6" name="Content Placeholder 5">
-            <a:extLst>
-              <a:ext uri="{FF2B5EF4-FFF2-40B4-BE49-F238E27FC236}">
-                <a16:creationId xmlns:a16="http://schemas.microsoft.com/office/drawing/2014/main" id="{2F2479DC-5602-F92F-5140-F1808670BB29}"/>
-              </a:ext>
-            </a:extLst>
-          </p:cNvPr>
+          <p:cNvPr id="6" name="Content Placeholder 5"/>
           <p:cNvPicPr>
             <a:picLocks noGrp="1" noChangeAspect="1"/>
           </p:cNvPicPr>
@@ -4022,7 +3588,7 @@
           </p:nvPr>
         </p:nvPicPr>
         <p:blipFill>
-          <a:blip r:embed="rId2">
+          <a:blip r:embed="rId1">
             <a:extLst>
               <a:ext uri="{28A0092B-C50C-407E-A947-70E740481C1C}">
                 <a14:useLocalDpi xmlns:a14="http://schemas.microsoft.com/office/drawing/2010/main" val="0"/>
@@ -4041,11 +3607,6 @@
         </p:spPr>
       </p:pic>
     </p:spTree>
-    <p:extLst>
-      <p:ext uri="{BB962C8B-B14F-4D97-AF65-F5344CB8AC3E}">
-        <p14:creationId xmlns:p14="http://schemas.microsoft.com/office/powerpoint/2010/main" val="912514171"/>
-      </p:ext>
-    </p:extLst>
   </p:cSld>
   <p:clrMapOvr>
     <a:masterClrMapping/>
@@ -4072,13 +3633,7 @@
       </p:grpSpPr>
       <p:sp>
         <p:nvSpPr>
-          <p:cNvPr id="6" name="Content Placeholder 5">
-            <a:extLst>
-              <a:ext uri="{FF2B5EF4-FFF2-40B4-BE49-F238E27FC236}">
-                <a16:creationId xmlns:a16="http://schemas.microsoft.com/office/drawing/2014/main" id="{135492F5-146F-FC8E-1A7A-799172656A47}"/>
-              </a:ext>
-            </a:extLst>
-          </p:cNvPr>
+          <p:cNvPr id="6" name="Content Placeholder 5"/>
           <p:cNvSpPr>
             <a:spLocks noGrp="1"/>
           </p:cNvSpPr>
@@ -4103,6 +3658,9 @@
               </a:rPr>
               <a:t>Data cube classification:</a:t>
             </a:r>
+            <a:endParaRPr lang="en-US" b="1" dirty="0">
+              <a:effectLst/>
+            </a:endParaRPr>
           </a:p>
           <a:p>
             <a:pPr algn="just"/>
@@ -4112,6 +3670,9 @@
               </a:rPr>
               <a:t>The data cube can be classified into two categories:</a:t>
             </a:r>
+            <a:endParaRPr lang="en-US" dirty="0">
+              <a:effectLst/>
+            </a:endParaRPr>
           </a:p>
           <a:p>
             <a:pPr algn="just"/>
@@ -4121,7 +3682,7 @@
           </a:p>
           <a:p>
             <a:pPr algn="just">
-              <a:buFont typeface="Arial" panose="020B0604020202020204" pitchFamily="34" charset="0"/>
+              <a:buFont typeface="Arial" panose="02080604020202020204" pitchFamily="34" charset="0"/>
               <a:buChar char="•"/>
             </a:pPr>
             <a:r>
@@ -4136,10 +3697,13 @@
               </a:rPr>
               <a:t>It basically helps in storing large amounts of data by making use of a multi-dimensional array. </a:t>
             </a:r>
+            <a:endParaRPr lang="en-US" dirty="0">
+              <a:effectLst/>
+            </a:endParaRPr>
           </a:p>
           <a:p>
             <a:pPr algn="just">
-              <a:buFont typeface="Arial" panose="020B0604020202020204" pitchFamily="34" charset="0"/>
+              <a:buFont typeface="Arial" panose="02080604020202020204" pitchFamily="34" charset="0"/>
               <a:buChar char="•"/>
             </a:pPr>
             <a:r>
@@ -4148,19 +3712,22 @@
               </a:rPr>
               <a:t>It increases its efficiency by keeping an index of each dimension. Thus, dimensional is able to retrieve data fast.</a:t>
             </a:r>
-          </a:p>
-          <a:p>
-            <a:pPr algn="just">
-              <a:buFont typeface="Arial" panose="020B0604020202020204" pitchFamily="34" charset="0"/>
-              <a:buChar char="•"/>
-            </a:pPr>
             <a:endParaRPr lang="en-US" dirty="0">
               <a:effectLst/>
             </a:endParaRPr>
           </a:p>
           <a:p>
             <a:pPr algn="just">
-              <a:buFont typeface="Arial" panose="020B0604020202020204" pitchFamily="34" charset="0"/>
+              <a:buFont typeface="Arial" panose="02080604020202020204" pitchFamily="34" charset="0"/>
+              <a:buChar char="•"/>
+            </a:pPr>
+            <a:endParaRPr lang="en-US" dirty="0">
+              <a:effectLst/>
+            </a:endParaRPr>
+          </a:p>
+          <a:p>
+            <a:pPr algn="just">
+              <a:buFont typeface="Arial" panose="02080604020202020204" pitchFamily="34" charset="0"/>
               <a:buChar char="•"/>
             </a:pPr>
             <a:r>
@@ -4181,10 +3748,13 @@
               </a:rPr>
               <a:t>tables.</a:t>
             </a:r>
+            <a:endParaRPr lang="en-US">
+              <a:effectLst/>
+            </a:endParaRPr>
           </a:p>
           <a:p>
             <a:pPr algn="just">
-              <a:buFont typeface="Arial" panose="020B0604020202020204" pitchFamily="34" charset="0"/>
+              <a:buFont typeface="Arial" panose="02080604020202020204" pitchFamily="34" charset="0"/>
               <a:buChar char="•"/>
             </a:pPr>
             <a:r>
@@ -4199,7 +3769,7 @@
           </a:p>
           <a:p>
             <a:pPr algn="just">
-              <a:buFont typeface="Arial" panose="020B0604020202020204" pitchFamily="34" charset="0"/>
+              <a:buFont typeface="Arial" panose="02080604020202020204" pitchFamily="34" charset="0"/>
               <a:buChar char="•"/>
             </a:pPr>
             <a:r>
@@ -4208,19 +3778,22 @@
               </a:rPr>
               <a:t>Each relational table displays the dimensions of the data cube.</a:t>
             </a:r>
-          </a:p>
-          <a:p>
-            <a:pPr algn="just">
-              <a:buFont typeface="Arial" panose="020B0604020202020204" pitchFamily="34" charset="0"/>
-              <a:buChar char="•"/>
-            </a:pPr>
             <a:endParaRPr lang="en-US" dirty="0">
               <a:effectLst/>
             </a:endParaRPr>
           </a:p>
           <a:p>
             <a:pPr algn="just">
-              <a:buFont typeface="Arial" panose="020B0604020202020204" pitchFamily="34" charset="0"/>
+              <a:buFont typeface="Arial" panose="02080604020202020204" pitchFamily="34" charset="0"/>
+              <a:buChar char="•"/>
+            </a:pPr>
+            <a:endParaRPr lang="en-US" dirty="0">
+              <a:effectLst/>
+            </a:endParaRPr>
+          </a:p>
+          <a:p>
+            <a:pPr algn="just">
+              <a:buFont typeface="Arial" panose="02080604020202020204" pitchFamily="34" charset="0"/>
               <a:buChar char="•"/>
             </a:pPr>
             <a:r>
@@ -4229,6 +3802,9 @@
               </a:rPr>
               <a:t> It is slower compared to a Multidimensional Data Cube.</a:t>
             </a:r>
+            <a:endParaRPr lang="en-US" dirty="0">
+              <a:effectLst/>
+            </a:endParaRPr>
           </a:p>
           <a:p>
             <a:endParaRPr lang="en-US" dirty="0"/>
@@ -4236,11 +3812,6 @@
         </p:txBody>
       </p:sp>
     </p:spTree>
-    <p:extLst>
-      <p:ext uri="{BB962C8B-B14F-4D97-AF65-F5344CB8AC3E}">
-        <p14:creationId xmlns:p14="http://schemas.microsoft.com/office/powerpoint/2010/main" val="2716854877"/>
-      </p:ext>
-    </p:extLst>
   </p:cSld>
   <p:clrMapOvr>
     <a:masterClrMapping/>
@@ -4267,13 +3838,7 @@
       </p:grpSpPr>
       <p:sp>
         <p:nvSpPr>
-          <p:cNvPr id="2" name="Title 1">
-            <a:extLst>
-              <a:ext uri="{FF2B5EF4-FFF2-40B4-BE49-F238E27FC236}">
-                <a16:creationId xmlns:a16="http://schemas.microsoft.com/office/drawing/2014/main" id="{9DF68675-55A3-F526-9C36-923599E5E26A}"/>
-              </a:ext>
-            </a:extLst>
-          </p:cNvPr>
+          <p:cNvPr id="2" name="Title 1"/>
           <p:cNvSpPr>
             <a:spLocks noGrp="1"/>
           </p:cNvSpPr>
@@ -4306,13 +3871,7 @@
       </p:sp>
       <p:pic>
         <p:nvPicPr>
-          <p:cNvPr id="5" name="Content Placeholder 4">
-            <a:extLst>
-              <a:ext uri="{FF2B5EF4-FFF2-40B4-BE49-F238E27FC236}">
-                <a16:creationId xmlns:a16="http://schemas.microsoft.com/office/drawing/2014/main" id="{4BA513EE-104E-FA00-E968-9422078402F6}"/>
-              </a:ext>
-            </a:extLst>
-          </p:cNvPr>
+          <p:cNvPr id="5" name="Content Placeholder 4"/>
           <p:cNvPicPr>
             <a:picLocks noGrp="1" noChangeAspect="1"/>
           </p:cNvPicPr>
@@ -4321,7 +3880,7 @@
           </p:nvPr>
         </p:nvPicPr>
         <p:blipFill>
-          <a:blip r:embed="rId2">
+          <a:blip r:embed="rId1">
             <a:extLst>
               <a:ext uri="{28A0092B-C50C-407E-A947-70E740481C1C}">
                 <a14:useLocalDpi xmlns:a14="http://schemas.microsoft.com/office/drawing/2010/main" val="0"/>
@@ -4340,11 +3899,6 @@
         </p:spPr>
       </p:pic>
     </p:spTree>
-    <p:extLst>
-      <p:ext uri="{BB962C8B-B14F-4D97-AF65-F5344CB8AC3E}">
-        <p14:creationId xmlns:p14="http://schemas.microsoft.com/office/powerpoint/2010/main" val="117623817"/>
-      </p:ext>
-    </p:extLst>
   </p:cSld>
   <p:clrMapOvr>
     <a:masterClrMapping/>
@@ -4371,13 +3925,7 @@
       </p:grpSpPr>
       <p:sp>
         <p:nvSpPr>
-          <p:cNvPr id="3" name="Content Placeholder 2">
-            <a:extLst>
-              <a:ext uri="{FF2B5EF4-FFF2-40B4-BE49-F238E27FC236}">
-                <a16:creationId xmlns:a16="http://schemas.microsoft.com/office/drawing/2014/main" id="{E6ABD728-A9D4-FA9C-6A10-50BBF7ACFBE9}"/>
-              </a:ext>
-            </a:extLst>
-          </p:cNvPr>
+          <p:cNvPr id="3" name="Content Placeholder 2"/>
           <p:cNvSpPr>
             <a:spLocks noGrp="1"/>
           </p:cNvSpPr>
@@ -4399,6 +3947,7 @@
               <a:rPr lang="en-US" dirty="0"/>
               <a:t>Data cube operations are used to manipulate data to meet the needs of users. These operations help to select particular data for the analysis purpose. </a:t>
             </a:r>
+            <a:endParaRPr lang="en-US" dirty="0"/>
           </a:p>
           <a:p>
             <a:endParaRPr lang="en-US" dirty="0"/>
@@ -4408,6 +3957,7 @@
               <a:rPr lang="en-US" dirty="0"/>
               <a:t>There are mainly 5 operations listed below-</a:t>
             </a:r>
+            <a:endParaRPr lang="en-US" dirty="0"/>
           </a:p>
           <a:p>
             <a:endParaRPr lang="en-US" dirty="0"/>
@@ -4421,6 +3971,7 @@
               <a:rPr lang="en-US" dirty="0"/>
               <a:t>:</a:t>
             </a:r>
+            <a:endParaRPr lang="en-US" dirty="0"/>
           </a:p>
           <a:p>
             <a:endParaRPr lang="en-US" dirty="0"/>
@@ -4430,6 +3981,7 @@
               <a:rPr lang="en-US" dirty="0"/>
               <a:t> operation and aggregate certain similar data attributes having the same dimension together. </a:t>
             </a:r>
+            <a:endParaRPr lang="en-US" dirty="0"/>
           </a:p>
           <a:p>
             <a:endParaRPr lang="en-US" dirty="0"/>
@@ -4439,15 +3991,11 @@
               <a:rPr lang="en-US" dirty="0"/>
               <a:t>For example, if the data cube displays the daily income of a customer, we can use a roll-up operation to find the monthly income of his salary.</a:t>
             </a:r>
+            <a:endParaRPr lang="en-US" dirty="0"/>
           </a:p>
         </p:txBody>
       </p:sp>
     </p:spTree>
-    <p:extLst>
-      <p:ext uri="{BB962C8B-B14F-4D97-AF65-F5344CB8AC3E}">
-        <p14:creationId xmlns:p14="http://schemas.microsoft.com/office/powerpoint/2010/main" val="2089744503"/>
-      </p:ext>
-    </p:extLst>
   </p:cSld>
   <p:clrMapOvr>
     <a:masterClrMapping/>
@@ -4474,13 +4022,7 @@
       </p:grpSpPr>
       <p:sp>
         <p:nvSpPr>
-          <p:cNvPr id="3" name="Content Placeholder 2">
-            <a:extLst>
-              <a:ext uri="{FF2B5EF4-FFF2-40B4-BE49-F238E27FC236}">
-                <a16:creationId xmlns:a16="http://schemas.microsoft.com/office/drawing/2014/main" id="{3946704F-8740-30EE-52E5-8F703FE9C78F}"/>
-              </a:ext>
-            </a:extLst>
-          </p:cNvPr>
+          <p:cNvPr id="3" name="Content Placeholder 2"/>
           <p:cNvSpPr>
             <a:spLocks noGrp="1"/>
           </p:cNvSpPr>
@@ -4506,6 +4048,7 @@
               <a:rPr lang="en-US" dirty="0"/>
               <a:t>:</a:t>
             </a:r>
+            <a:endParaRPr lang="en-US" dirty="0"/>
           </a:p>
           <a:p>
             <a:endParaRPr lang="en-US" dirty="0"/>
@@ -4515,6 +4058,7 @@
               <a:rPr lang="en-US" dirty="0"/>
               <a:t> this operation is the reverse of the roll-up operation. </a:t>
             </a:r>
+            <a:endParaRPr lang="en-US" dirty="0"/>
           </a:p>
           <a:p>
             <a:endParaRPr lang="en-US" dirty="0"/>
@@ -4524,6 +4068,7 @@
               <a:rPr lang="en-US" dirty="0"/>
               <a:t>It allows us to take particular information and then subdivide it further for coarser granularity analysis. </a:t>
             </a:r>
+            <a:endParaRPr lang="en-US" dirty="0"/>
           </a:p>
           <a:p>
             <a:pPr marL="0" indent="0">
@@ -4536,6 +4081,7 @@
               <a:rPr lang="en-US" dirty="0"/>
               <a:t>It zooms into more detail.</a:t>
             </a:r>
+            <a:endParaRPr lang="en-US" dirty="0"/>
           </a:p>
           <a:p>
             <a:endParaRPr lang="en-US" dirty="0"/>
@@ -4545,15 +4091,11 @@
               <a:rPr lang="en-US" dirty="0"/>
               <a:t> For example- if Nepal  is an attribute of a country column and we wish to see villages in Nepal , then the drill-down operation splits Nepal into states, districts, towns, cities, villages and then displays the required information.</a:t>
             </a:r>
+            <a:endParaRPr lang="en-US" dirty="0"/>
           </a:p>
         </p:txBody>
       </p:sp>
     </p:spTree>
-    <p:extLst>
-      <p:ext uri="{BB962C8B-B14F-4D97-AF65-F5344CB8AC3E}">
-        <p14:creationId xmlns:p14="http://schemas.microsoft.com/office/powerpoint/2010/main" val="2758006809"/>
-      </p:ext>
-    </p:extLst>
   </p:cSld>
   <p:clrMapOvr>
     <a:masterClrMapping/>
@@ -4580,13 +4122,7 @@
       </p:grpSpPr>
       <p:sp>
         <p:nvSpPr>
-          <p:cNvPr id="3" name="Content Placeholder 2">
-            <a:extLst>
-              <a:ext uri="{FF2B5EF4-FFF2-40B4-BE49-F238E27FC236}">
-                <a16:creationId xmlns:a16="http://schemas.microsoft.com/office/drawing/2014/main" id="{D7EB4B16-29D3-8261-5EB5-3C96BA2B56D1}"/>
-              </a:ext>
-            </a:extLst>
-          </p:cNvPr>
+          <p:cNvPr id="3" name="Content Placeholder 2"/>
           <p:cNvSpPr>
             <a:spLocks noGrp="1"/>
           </p:cNvSpPr>
@@ -4612,6 +4148,7 @@
               <a:rPr lang="en-US" dirty="0"/>
               <a:t>:</a:t>
             </a:r>
+            <a:endParaRPr lang="en-US" dirty="0"/>
           </a:p>
           <a:p>
             <a:pPr marL="0" indent="0">
@@ -4621,12 +4158,14 @@
               <a:rPr lang="en-US" dirty="0"/>
               <a:t> </a:t>
             </a:r>
+            <a:endParaRPr lang="en-US" dirty="0"/>
           </a:p>
           <a:p>
             <a:r>
               <a:rPr lang="en-US" dirty="0"/>
               <a:t>this operation filters the unnecessary portions.</a:t>
             </a:r>
+            <a:endParaRPr lang="en-US" dirty="0"/>
           </a:p>
           <a:p>
             <a:endParaRPr lang="en-US" dirty="0"/>
@@ -4636,6 +4175,7 @@
               <a:rPr lang="en-US" dirty="0"/>
               <a:t> Suppose in a particular dimension, the user doesn’t need everything for analysis, rather a particular attribute. </a:t>
             </a:r>
+            <a:endParaRPr lang="en-US" dirty="0"/>
           </a:p>
           <a:p>
             <a:endParaRPr lang="en-US" dirty="0"/>
@@ -4661,15 +4201,11 @@
               <a:rPr lang="en-US" dirty="0"/>
               <a:t> and only display other countries present on the country list.</a:t>
             </a:r>
+            <a:endParaRPr lang="en-US" dirty="0"/>
           </a:p>
         </p:txBody>
       </p:sp>
     </p:spTree>
-    <p:extLst>
-      <p:ext uri="{BB962C8B-B14F-4D97-AF65-F5344CB8AC3E}">
-        <p14:creationId xmlns:p14="http://schemas.microsoft.com/office/powerpoint/2010/main" val="3311516049"/>
-      </p:ext>
-    </p:extLst>
   </p:cSld>
   <p:clrMapOvr>
     <a:masterClrMapping/>
@@ -4696,13 +4232,7 @@
       </p:grpSpPr>
       <p:sp>
         <p:nvSpPr>
-          <p:cNvPr id="3" name="Content Placeholder 2">
-            <a:extLst>
-              <a:ext uri="{FF2B5EF4-FFF2-40B4-BE49-F238E27FC236}">
-                <a16:creationId xmlns:a16="http://schemas.microsoft.com/office/drawing/2014/main" id="{3B2725F1-A5FE-3377-F90F-606359089375}"/>
-              </a:ext>
-            </a:extLst>
-          </p:cNvPr>
+          <p:cNvPr id="3" name="Content Placeholder 2"/>
           <p:cNvSpPr>
             <a:spLocks noGrp="1"/>
           </p:cNvSpPr>
@@ -4728,6 +4258,7 @@
               <a:rPr lang="en-US" dirty="0"/>
               <a:t>:</a:t>
             </a:r>
+            <a:endParaRPr lang="en-US" dirty="0"/>
           </a:p>
           <a:p>
             <a:endParaRPr lang="en-US" dirty="0"/>
@@ -4737,6 +4268,7 @@
               <a:rPr lang="en-US" dirty="0"/>
               <a:t> This operation does a multidimensional cutting, that not only cuts only one dimension but also can go to another dimension and cut a certain range of it. </a:t>
             </a:r>
+            <a:endParaRPr lang="en-US" dirty="0"/>
           </a:p>
           <a:p>
             <a:endParaRPr lang="en-US" dirty="0"/>
@@ -4746,6 +4278,7 @@
               <a:rPr lang="en-US" dirty="0"/>
               <a:t>As a result, it looks more like a sub cube out of the whole cube(as depicted in the figure). </a:t>
             </a:r>
+            <a:endParaRPr lang="en-US" dirty="0"/>
           </a:p>
           <a:p>
             <a:endParaRPr lang="en-US" dirty="0"/>
@@ -4755,15 +4288,11 @@
               <a:rPr lang="en-US" dirty="0"/>
               <a:t>For example- the user wants to see the annual salary of Bagmati  state employees.</a:t>
             </a:r>
+            <a:endParaRPr lang="en-US" dirty="0"/>
           </a:p>
         </p:txBody>
       </p:sp>
     </p:spTree>
-    <p:extLst>
-      <p:ext uri="{BB962C8B-B14F-4D97-AF65-F5344CB8AC3E}">
-        <p14:creationId xmlns:p14="http://schemas.microsoft.com/office/powerpoint/2010/main" val="797646935"/>
-      </p:ext>
-    </p:extLst>
   </p:cSld>
   <p:clrMapOvr>
     <a:masterClrMapping/>
@@ -4790,13 +4319,7 @@
       </p:grpSpPr>
       <p:sp>
         <p:nvSpPr>
-          <p:cNvPr id="3" name="Content Placeholder 2">
-            <a:extLst>
-              <a:ext uri="{FF2B5EF4-FFF2-40B4-BE49-F238E27FC236}">
-                <a16:creationId xmlns:a16="http://schemas.microsoft.com/office/drawing/2014/main" id="{D150D7A9-753A-9BCD-2EC7-54CA3ABC4281}"/>
-              </a:ext>
-            </a:extLst>
-          </p:cNvPr>
+          <p:cNvPr id="3" name="Content Placeholder 2"/>
           <p:cNvSpPr>
             <a:spLocks noGrp="1"/>
           </p:cNvSpPr>
@@ -4818,6 +4341,7 @@
               <a:rPr lang="en-US" b="1" dirty="0"/>
               <a:t>Data mart</a:t>
             </a:r>
+            <a:endParaRPr lang="en-US" b="1" dirty="0"/>
           </a:p>
           <a:p>
             <a:endParaRPr lang="en-US" b="1" dirty="0"/>
@@ -4831,6 +4355,7 @@
               <a:rPr lang="en-US" dirty="0"/>
               <a:t> is such a storage component which is concerned on a specific department of an organization. </a:t>
             </a:r>
+            <a:endParaRPr lang="en-US" dirty="0"/>
           </a:p>
           <a:p>
             <a:endParaRPr lang="en-US" dirty="0"/>
@@ -4840,6 +4365,7 @@
               <a:rPr lang="en-US" dirty="0"/>
               <a:t>It is a subset of the data stored in the data warehouse.</a:t>
             </a:r>
+            <a:endParaRPr lang="en-US" dirty="0"/>
           </a:p>
           <a:p>
             <a:endParaRPr lang="en-US" dirty="0"/>
@@ -4857,6 +4383,7 @@
               <a:rPr lang="en-US" dirty="0"/>
               <a:t> finance, Marketing. </a:t>
             </a:r>
+            <a:endParaRPr lang="en-US" dirty="0"/>
           </a:p>
           <a:p>
             <a:endParaRPr lang="en-US" dirty="0"/>
@@ -4866,15 +4393,11 @@
               <a:rPr lang="en-US" dirty="0"/>
               <a:t>Data Marts are small in size and are flexible. </a:t>
             </a:r>
+            <a:endParaRPr lang="en-US" dirty="0"/>
           </a:p>
         </p:txBody>
       </p:sp>
     </p:spTree>
-    <p:extLst>
-      <p:ext uri="{BB962C8B-B14F-4D97-AF65-F5344CB8AC3E}">
-        <p14:creationId xmlns:p14="http://schemas.microsoft.com/office/powerpoint/2010/main" val="1855595204"/>
-      </p:ext>
-    </p:extLst>
   </p:cSld>
   <p:clrMapOvr>
     <a:masterClrMapping/>
@@ -4901,13 +4424,7 @@
       </p:grpSpPr>
       <p:sp>
         <p:nvSpPr>
-          <p:cNvPr id="3" name="Content Placeholder 2">
-            <a:extLst>
-              <a:ext uri="{FF2B5EF4-FFF2-40B4-BE49-F238E27FC236}">
-                <a16:creationId xmlns:a16="http://schemas.microsoft.com/office/drawing/2014/main" id="{0EFDCCB8-CC10-4140-9BE4-2D3E57584D9E}"/>
-              </a:ext>
-            </a:extLst>
-          </p:cNvPr>
+          <p:cNvPr id="3" name="Content Placeholder 2"/>
           <p:cNvSpPr>
             <a:spLocks noGrp="1"/>
           </p:cNvSpPr>
@@ -4936,6 +4453,7 @@
               <a:rPr lang="en-US" dirty="0"/>
               <a:t>: </a:t>
             </a:r>
+            <a:endParaRPr lang="en-US" dirty="0"/>
           </a:p>
           <a:p>
             <a:endParaRPr lang="en-US" dirty="0"/>
@@ -4945,6 +4463,7 @@
               <a:rPr lang="en-US" dirty="0"/>
               <a:t>This operation is very important from a viewing point of view.</a:t>
             </a:r>
+            <a:endParaRPr lang="en-US" dirty="0"/>
           </a:p>
           <a:p>
             <a:endParaRPr lang="en-US" dirty="0"/>
@@ -4954,6 +4473,7 @@
               <a:rPr lang="en-US" dirty="0"/>
               <a:t> It basically transforms the data cube in terms of view.</a:t>
             </a:r>
+            <a:endParaRPr lang="en-US" dirty="0"/>
           </a:p>
           <a:p>
             <a:endParaRPr lang="en-US" dirty="0"/>
@@ -4963,6 +4483,7 @@
               <a:rPr lang="en-US" dirty="0"/>
               <a:t> It doesn’t change the data present in the data cube.</a:t>
             </a:r>
+            <a:endParaRPr lang="en-US" dirty="0"/>
           </a:p>
           <a:p>
             <a:endParaRPr lang="en-US" dirty="0"/>
@@ -4972,15 +4493,11 @@
               <a:rPr lang="en-US" dirty="0"/>
               <a:t> For example, if the user is comparing year versus branch, using the pivot operation, the user can change the viewpoint and now compare branch versus item type.</a:t>
             </a:r>
+            <a:endParaRPr lang="en-US" dirty="0"/>
           </a:p>
         </p:txBody>
       </p:sp>
     </p:spTree>
-    <p:extLst>
-      <p:ext uri="{BB962C8B-B14F-4D97-AF65-F5344CB8AC3E}">
-        <p14:creationId xmlns:p14="http://schemas.microsoft.com/office/powerpoint/2010/main" val="390064737"/>
-      </p:ext>
-    </p:extLst>
   </p:cSld>
   <p:clrMapOvr>
     <a:masterClrMapping/>
@@ -5007,13 +4524,7 @@
       </p:grpSpPr>
       <p:sp>
         <p:nvSpPr>
-          <p:cNvPr id="3" name="Content Placeholder 2">
-            <a:extLst>
-              <a:ext uri="{FF2B5EF4-FFF2-40B4-BE49-F238E27FC236}">
-                <a16:creationId xmlns:a16="http://schemas.microsoft.com/office/drawing/2014/main" id="{95A62423-8170-25BB-C684-81538DE0D3FE}"/>
-              </a:ext>
-            </a:extLst>
-          </p:cNvPr>
+          <p:cNvPr id="3" name="Content Placeholder 2"/>
           <p:cNvSpPr>
             <a:spLocks noGrp="1"/>
           </p:cNvSpPr>
@@ -5035,13 +4546,14 @@
               <a:rPr lang="en-US" b="1" dirty="0"/>
               <a:t>Advantages of data cubes:</a:t>
             </a:r>
-          </a:p>
-          <a:p>
             <a:endParaRPr lang="en-US" b="1" dirty="0"/>
           </a:p>
           <a:p>
+            <a:endParaRPr lang="en-US" b="1" dirty="0"/>
+          </a:p>
+          <a:p>
             <a:pPr>
-              <a:buFont typeface="Arial" panose="020B0604020202020204" pitchFamily="34" charset="0"/>
+              <a:buFont typeface="Arial" panose="02080604020202020204" pitchFamily="34" charset="0"/>
               <a:buChar char="•"/>
             </a:pPr>
             <a:r>
@@ -5052,17 +4564,18 @@
               <a:rPr lang="en-US" dirty="0"/>
               <a:t>: Data cubes enable multi-dimensional analysis of business data, allowing users to view data from different perspectives and levels of detail.</a:t>
             </a:r>
+            <a:endParaRPr lang="en-US" dirty="0"/>
           </a:p>
           <a:p>
             <a:pPr>
-              <a:buFont typeface="Arial" panose="020B0604020202020204" pitchFamily="34" charset="0"/>
+              <a:buFont typeface="Arial" panose="02080604020202020204" pitchFamily="34" charset="0"/>
               <a:buChar char="•"/>
             </a:pPr>
             <a:endParaRPr lang="en-US" dirty="0"/>
           </a:p>
           <a:p>
             <a:pPr>
-              <a:buFont typeface="Arial" panose="020B0604020202020204" pitchFamily="34" charset="0"/>
+              <a:buFont typeface="Arial" panose="02080604020202020204" pitchFamily="34" charset="0"/>
               <a:buChar char="•"/>
             </a:pPr>
             <a:r>
@@ -5073,17 +4586,18 @@
               <a:rPr lang="en-US" dirty="0"/>
               <a:t>Data cubes provide interactive access to large amounts of data, allowing users to easily navigate and manipulate the data to support their analysis.</a:t>
             </a:r>
+            <a:endParaRPr lang="en-US" dirty="0"/>
           </a:p>
           <a:p>
             <a:pPr>
-              <a:buFont typeface="Arial" panose="020B0604020202020204" pitchFamily="34" charset="0"/>
+              <a:buFont typeface="Arial" panose="02080604020202020204" pitchFamily="34" charset="0"/>
               <a:buChar char="•"/>
             </a:pPr>
             <a:endParaRPr lang="en-US" dirty="0"/>
           </a:p>
           <a:p>
             <a:pPr>
-              <a:buFont typeface="Arial" panose="020B0604020202020204" pitchFamily="34" charset="0"/>
+              <a:buFont typeface="Arial" panose="02080604020202020204" pitchFamily="34" charset="0"/>
               <a:buChar char="•"/>
             </a:pPr>
             <a:r>
@@ -5094,6 +4608,7 @@
               <a:rPr lang="en-US" dirty="0"/>
               <a:t>: Data cubes are optimized for OLAP analysis, enabling fast and efficient querying and aggregation of data.</a:t>
             </a:r>
+            <a:endParaRPr lang="en-US" dirty="0"/>
           </a:p>
           <a:p>
             <a:endParaRPr lang="en-US" dirty="0"/>
@@ -5101,11 +4616,6 @@
         </p:txBody>
       </p:sp>
     </p:spTree>
-    <p:extLst>
-      <p:ext uri="{BB962C8B-B14F-4D97-AF65-F5344CB8AC3E}">
-        <p14:creationId xmlns:p14="http://schemas.microsoft.com/office/powerpoint/2010/main" val="1793850416"/>
-      </p:ext>
-    </p:extLst>
   </p:cSld>
   <p:clrMapOvr>
     <a:masterClrMapping/>
@@ -5132,13 +4642,7 @@
       </p:grpSpPr>
       <p:sp>
         <p:nvSpPr>
-          <p:cNvPr id="3" name="Content Placeholder 2">
-            <a:extLst>
-              <a:ext uri="{FF2B5EF4-FFF2-40B4-BE49-F238E27FC236}">
-                <a16:creationId xmlns:a16="http://schemas.microsoft.com/office/drawing/2014/main" id="{42D9BE8B-8C78-0D21-3269-1484328A4559}"/>
-              </a:ext>
-            </a:extLst>
-          </p:cNvPr>
+          <p:cNvPr id="3" name="Content Placeholder 2"/>
           <p:cNvSpPr>
             <a:spLocks noGrp="1"/>
           </p:cNvSpPr>
@@ -5163,6 +4667,7 @@
               <a:rPr lang="en-US" b="1" dirty="0"/>
               <a:t>Disadvantages of data cube:</a:t>
             </a:r>
+            <a:endParaRPr lang="en-US" b="1" dirty="0"/>
           </a:p>
           <a:p>
             <a:pPr marL="0" indent="0">
@@ -5172,7 +4677,7 @@
           </a:p>
           <a:p>
             <a:pPr>
-              <a:buFont typeface="Arial" panose="020B0604020202020204" pitchFamily="34" charset="0"/>
+              <a:buFont typeface="Arial" panose="02080604020202020204" pitchFamily="34" charset="0"/>
               <a:buChar char="•"/>
             </a:pPr>
             <a:r>
@@ -5187,17 +4692,18 @@
               <a:rPr lang="en-US" dirty="0"/>
               <a:t>: OLAP systems can be complex to set up and maintain, requiring specialized technical expertise.</a:t>
             </a:r>
+            <a:endParaRPr lang="en-US" dirty="0"/>
           </a:p>
           <a:p>
             <a:pPr>
-              <a:buFont typeface="Arial" panose="020B0604020202020204" pitchFamily="34" charset="0"/>
+              <a:buFont typeface="Arial" panose="02080604020202020204" pitchFamily="34" charset="0"/>
               <a:buChar char="•"/>
             </a:pPr>
             <a:endParaRPr lang="en-US" dirty="0"/>
           </a:p>
           <a:p>
             <a:pPr>
-              <a:buFont typeface="Arial" panose="020B0604020202020204" pitchFamily="34" charset="0"/>
+              <a:buFont typeface="Arial" panose="02080604020202020204" pitchFamily="34" charset="0"/>
               <a:buChar char="•"/>
             </a:pPr>
             <a:r>
@@ -5208,17 +4714,18 @@
               <a:rPr lang="en-US" dirty="0"/>
               <a:t>: OLAP systems can struggle with very large data sets and may require extensive data aggregation or summarization.</a:t>
             </a:r>
+            <a:endParaRPr lang="en-US" dirty="0"/>
           </a:p>
           <a:p>
             <a:pPr>
-              <a:buFont typeface="Arial" panose="020B0604020202020204" pitchFamily="34" charset="0"/>
+              <a:buFont typeface="Arial" panose="02080604020202020204" pitchFamily="34" charset="0"/>
               <a:buChar char="•"/>
             </a:pPr>
             <a:endParaRPr lang="en-US" dirty="0"/>
           </a:p>
           <a:p>
             <a:pPr>
-              <a:buFont typeface="Arial" panose="020B0604020202020204" pitchFamily="34" charset="0"/>
+              <a:buFont typeface="Arial" panose="02080604020202020204" pitchFamily="34" charset="0"/>
               <a:buChar char="•"/>
             </a:pPr>
             <a:r>
@@ -5229,6 +4736,7 @@
               <a:rPr lang="en-US" dirty="0"/>
               <a:t>: OLAP systems can be slow when dealing with large amounts of data, especially when running complex queries or calculations.</a:t>
             </a:r>
+            <a:endParaRPr lang="en-US" dirty="0"/>
           </a:p>
           <a:p>
             <a:endParaRPr lang="en-US" dirty="0"/>
@@ -5236,11 +4744,6 @@
         </p:txBody>
       </p:sp>
     </p:spTree>
-    <p:extLst>
-      <p:ext uri="{BB962C8B-B14F-4D97-AF65-F5344CB8AC3E}">
-        <p14:creationId xmlns:p14="http://schemas.microsoft.com/office/powerpoint/2010/main" val="1816926310"/>
-      </p:ext>
-    </p:extLst>
   </p:cSld>
   <p:clrMapOvr>
     <a:masterClrMapping/>
@@ -5267,13 +4770,7 @@
       </p:grpSpPr>
       <p:sp>
         <p:nvSpPr>
-          <p:cNvPr id="3" name="Content Placeholder 2">
-            <a:extLst>
-              <a:ext uri="{FF2B5EF4-FFF2-40B4-BE49-F238E27FC236}">
-                <a16:creationId xmlns:a16="http://schemas.microsoft.com/office/drawing/2014/main" id="{067E9F90-5637-5441-95EA-399169D0F711}"/>
-              </a:ext>
-            </a:extLst>
-          </p:cNvPr>
+          <p:cNvPr id="3" name="Content Placeholder 2"/>
           <p:cNvSpPr>
             <a:spLocks noGrp="1"/>
           </p:cNvSpPr>
@@ -5302,6 +4799,9 @@
               </a:rPr>
               <a:t>What is OLTP?</a:t>
             </a:r>
+            <a:endParaRPr lang="en-US" b="1" dirty="0">
+              <a:effectLst/>
+            </a:endParaRPr>
           </a:p>
           <a:p>
             <a:r>
@@ -5314,12 +4814,14 @@
               <a:rPr lang="en-US" dirty="0"/>
               <a:t>. </a:t>
             </a:r>
+            <a:endParaRPr lang="en-US" dirty="0"/>
           </a:p>
           <a:p>
             <a:r>
               <a:rPr lang="en-US" dirty="0"/>
               <a:t>Unlike OLAP (Online Analytical Processing), which focuses on the analysis and exploration of large data sets, OLTP is used to manage and control day-to-day business operations involving individual transactions.</a:t>
             </a:r>
+            <a:endParaRPr lang="en-US" dirty="0"/>
           </a:p>
           <a:p>
             <a:endParaRPr lang="en-US" dirty="0"/>
@@ -5331,6 +4833,9 @@
               </a:rPr>
               <a:t>OLTP main features:</a:t>
             </a:r>
+            <a:endParaRPr lang="en-US" b="1" dirty="0">
+              <a:effectLst/>
+            </a:endParaRPr>
           </a:p>
           <a:p>
             <a:pPr>
@@ -5347,6 +4852,7 @@
               <a:rPr lang="en-US" dirty="0"/>
               <a:t>:</a:t>
             </a:r>
+            <a:endParaRPr lang="en-US" dirty="0"/>
           </a:p>
           <a:p>
             <a:pPr marL="0" indent="0">
@@ -5356,6 +4862,7 @@
               <a:rPr lang="en-US" dirty="0"/>
               <a:t> OLTP is designed to handle individual transactions in real time, which means that data is updated and processed immediately as transactions occur.</a:t>
             </a:r>
+            <a:endParaRPr lang="en-US" dirty="0"/>
           </a:p>
           <a:p>
             <a:pPr>
@@ -5372,6 +4879,7 @@
               <a:rPr lang="en-US" dirty="0"/>
               <a:t>: OLTP systems are optimized to perform read and write operations with high frequency and efficiency. </a:t>
             </a:r>
+            <a:endParaRPr lang="en-US" dirty="0"/>
           </a:p>
           <a:p>
             <a:pPr marL="0" indent="0">
@@ -5381,6 +4889,7 @@
               <a:rPr lang="en-US" dirty="0"/>
               <a:t>    They are designed to allow multiple users to simultaneously access and make c Changes to data concurrently.</a:t>
             </a:r>
+            <a:endParaRPr lang="en-US" dirty="0"/>
           </a:p>
           <a:p>
             <a:endParaRPr lang="en-US" dirty="0"/>
@@ -5388,11 +4897,6 @@
         </p:txBody>
       </p:sp>
     </p:spTree>
-    <p:extLst>
-      <p:ext uri="{BB962C8B-B14F-4D97-AF65-F5344CB8AC3E}">
-        <p14:creationId xmlns:p14="http://schemas.microsoft.com/office/powerpoint/2010/main" val="3732201822"/>
-      </p:ext>
-    </p:extLst>
   </p:cSld>
   <p:clrMapOvr>
     <a:masterClrMapping/>
@@ -5419,13 +4923,7 @@
       </p:grpSpPr>
       <p:sp>
         <p:nvSpPr>
-          <p:cNvPr id="3" name="Content Placeholder 2">
-            <a:extLst>
-              <a:ext uri="{FF2B5EF4-FFF2-40B4-BE49-F238E27FC236}">
-                <a16:creationId xmlns:a16="http://schemas.microsoft.com/office/drawing/2014/main" id="{2B30587A-CA40-1382-E2A2-47C6A82CB63F}"/>
-              </a:ext>
-            </a:extLst>
-          </p:cNvPr>
+          <p:cNvPr id="3" name="Content Placeholder 2"/>
           <p:cNvSpPr>
             <a:spLocks noGrp="1"/>
           </p:cNvSpPr>
@@ -5458,6 +4956,7 @@
               <a:rPr lang="en-US" dirty="0"/>
               <a:t>: OLTP databases generally have a highly normalized design to minimize redundancy and ensure data integrity.</a:t>
             </a:r>
+            <a:endParaRPr lang="en-US" dirty="0"/>
           </a:p>
           <a:p>
             <a:pPr marL="0" indent="0">
@@ -5467,6 +4966,7 @@
               <a:rPr lang="en-US" dirty="0"/>
               <a:t> This helps to maintain consistency of information in environments where there are many transactions affecting the same data.</a:t>
             </a:r>
+            <a:endParaRPr lang="en-US" dirty="0"/>
           </a:p>
           <a:p>
             <a:pPr marL="0" indent="0">
@@ -5488,6 +4988,7 @@
               <a:rPr lang="en-US" dirty="0"/>
               <a:t>: Although OLTP databases can contain large amounts of data, their size is generally smaller compared to Data Warehouses used in OLAP.</a:t>
             </a:r>
+            <a:endParaRPr lang="en-US" dirty="0"/>
           </a:p>
           <a:p>
             <a:pPr marL="0" indent="0">
@@ -5509,6 +5010,7 @@
               <a:rPr lang="en-US" dirty="0"/>
               <a:t>: OLTP systems place significant emphasis on ensuring the availability and integrity of data at all times.</a:t>
             </a:r>
+            <a:endParaRPr lang="en-US" dirty="0"/>
           </a:p>
           <a:p>
             <a:pPr marL="0" indent="0">
@@ -5518,6 +5020,7 @@
               <a:rPr lang="en-US" dirty="0"/>
               <a:t> This involves maintaining high system availability and ensuring that transactions are error-free and maintain data consistency.</a:t>
             </a:r>
+            <a:endParaRPr lang="en-US" dirty="0"/>
           </a:p>
           <a:p>
             <a:r>
@@ -5528,6 +5031,11 @@
               </a:rPr>
               <a:t>Examples of OLTP applications include online database management systems for financial transactions, online reservation and sales systems, inventory control systems, patient registration systems in hospitals and any other application requiring immediate and efficient processing of individual transactions.</a:t>
             </a:r>
+            <a:endParaRPr lang="en-US" dirty="0">
+              <a:solidFill>
+                <a:srgbClr val="FF0000"/>
+              </a:solidFill>
+            </a:endParaRPr>
           </a:p>
           <a:p>
             <a:endParaRPr lang="en-US" dirty="0"/>
@@ -5535,11 +5043,6 @@
         </p:txBody>
       </p:sp>
     </p:spTree>
-    <p:extLst>
-      <p:ext uri="{BB962C8B-B14F-4D97-AF65-F5344CB8AC3E}">
-        <p14:creationId xmlns:p14="http://schemas.microsoft.com/office/powerpoint/2010/main" val="2632528007"/>
-      </p:ext>
-    </p:extLst>
   </p:cSld>
   <p:clrMapOvr>
     <a:masterClrMapping/>
@@ -5566,13 +5069,7 @@
       </p:grpSpPr>
       <p:sp>
         <p:nvSpPr>
-          <p:cNvPr id="3" name="Content Placeholder 2">
-            <a:extLst>
-              <a:ext uri="{FF2B5EF4-FFF2-40B4-BE49-F238E27FC236}">
-                <a16:creationId xmlns:a16="http://schemas.microsoft.com/office/drawing/2014/main" id="{5C365262-9808-541E-A98E-5233D7F7F23B}"/>
-              </a:ext>
-            </a:extLst>
-          </p:cNvPr>
+          <p:cNvPr id="3" name="Content Placeholder 2"/>
           <p:cNvSpPr>
             <a:spLocks noGrp="1"/>
           </p:cNvSpPr>
@@ -5599,6 +5096,9 @@
               </a:rPr>
               <a:t>What is OLAP?</a:t>
             </a:r>
+            <a:endParaRPr lang="en-US" b="1" dirty="0">
+              <a:effectLst/>
+            </a:endParaRPr>
           </a:p>
           <a:p>
             <a:r>
@@ -5610,7 +5110,7 @@
             <a:r>
               <a:rPr lang="en-US" b="1" dirty="0">
                 <a:effectLst/>
-                <a:hlinkClick r:id="rId2"/>
+                <a:hlinkClick r:id="rId1"/>
               </a:rPr>
               <a:t>advanced data analysis</a:t>
             </a:r>
@@ -5628,6 +5128,7 @@
               <a:rPr lang="en-US" dirty="0"/>
               <a:t> sets from multiple perspectives.</a:t>
             </a:r>
+            <a:endParaRPr lang="en-US" dirty="0"/>
           </a:p>
           <a:p>
             <a:endParaRPr lang="en-US" dirty="0"/>
@@ -5646,7 +5147,7 @@
             <a:r>
               <a:rPr lang="en-US" b="1" dirty="0">
                 <a:effectLst/>
-                <a:hlinkClick r:id="rId3"/>
+                <a:hlinkClick r:id="rId2"/>
               </a:rPr>
               <a:t>data warehouse</a:t>
             </a:r>
@@ -5654,6 +5155,7 @@
               <a:rPr lang="en-US" dirty="0"/>
               <a:t> or other multidimensional databases.</a:t>
             </a:r>
+            <a:endParaRPr lang="en-US" dirty="0"/>
           </a:p>
           <a:p>
             <a:endParaRPr lang="en-US" dirty="0"/>
@@ -5661,11 +5163,6 @@
         </p:txBody>
       </p:sp>
     </p:spTree>
-    <p:extLst>
-      <p:ext uri="{BB962C8B-B14F-4D97-AF65-F5344CB8AC3E}">
-        <p14:creationId xmlns:p14="http://schemas.microsoft.com/office/powerpoint/2010/main" val="1791248650"/>
-      </p:ext>
-    </p:extLst>
   </p:cSld>
   <p:clrMapOvr>
     <a:masterClrMapping/>
@@ -5692,13 +5189,7 @@
       </p:grpSpPr>
       <p:sp>
         <p:nvSpPr>
-          <p:cNvPr id="3" name="Content Placeholder 2">
-            <a:extLst>
-              <a:ext uri="{FF2B5EF4-FFF2-40B4-BE49-F238E27FC236}">
-                <a16:creationId xmlns:a16="http://schemas.microsoft.com/office/drawing/2014/main" id="{1337E2F2-5100-5223-E7AB-26023F559AAB}"/>
-              </a:ext>
-            </a:extLst>
-          </p:cNvPr>
+          <p:cNvPr id="3" name="Content Placeholder 2"/>
           <p:cNvSpPr>
             <a:spLocks noGrp="1"/>
           </p:cNvSpPr>
@@ -5725,6 +5216,9 @@
               </a:rPr>
               <a:t>OLAP main features:</a:t>
             </a:r>
+            <a:endParaRPr lang="en-US" b="1" dirty="0">
+              <a:effectLst/>
+            </a:endParaRPr>
           </a:p>
           <a:p>
             <a:pPr>
@@ -5741,12 +5235,14 @@
               <a:rPr lang="en-US" dirty="0"/>
               <a:t>: OLAP organizes data into multidimensional structures known as 'OLAP cubes’. </a:t>
             </a:r>
+            <a:endParaRPr lang="en-US" dirty="0"/>
           </a:p>
           <a:p>
             <a:r>
               <a:rPr lang="en-US" dirty="0"/>
               <a:t>  These cubes contain data in different dimensions, such as time, product, location   and category, allowing users to analyze data from different perspectives.</a:t>
             </a:r>
+            <a:endParaRPr lang="en-US" dirty="0"/>
           </a:p>
           <a:p>
             <a:endParaRPr lang="en-US" dirty="0"/>
@@ -5765,12 +5261,14 @@
               <a:rPr lang="en-US" dirty="0"/>
               <a:t>: OLAP systems support complex analytical operations such as drill-down/drill-up, filtering, rotation, segmentation and roll-up.</a:t>
             </a:r>
+            <a:endParaRPr lang="en-US" dirty="0"/>
           </a:p>
           <a:p>
             <a:r>
               <a:rPr lang="en-US" dirty="0"/>
               <a:t>   These operations allow users to explore data at different levels of detail and gain deeper insights.</a:t>
             </a:r>
+            <a:endParaRPr lang="en-US" dirty="0"/>
           </a:p>
           <a:p>
             <a:endParaRPr lang="en-US" dirty="0"/>
@@ -5778,11 +5276,6 @@
         </p:txBody>
       </p:sp>
     </p:spTree>
-    <p:extLst>
-      <p:ext uri="{BB962C8B-B14F-4D97-AF65-F5344CB8AC3E}">
-        <p14:creationId xmlns:p14="http://schemas.microsoft.com/office/powerpoint/2010/main" val="2289302559"/>
-      </p:ext>
-    </p:extLst>
   </p:cSld>
   <p:clrMapOvr>
     <a:masterClrMapping/>
@@ -5809,13 +5302,7 @@
       </p:grpSpPr>
       <p:sp>
         <p:nvSpPr>
-          <p:cNvPr id="3" name="Content Placeholder 2">
-            <a:extLst>
-              <a:ext uri="{FF2B5EF4-FFF2-40B4-BE49-F238E27FC236}">
-                <a16:creationId xmlns:a16="http://schemas.microsoft.com/office/drawing/2014/main" id="{0B76176E-FA31-B354-7E50-9654526E15B3}"/>
-              </a:ext>
-            </a:extLst>
-          </p:cNvPr>
+          <p:cNvPr id="3" name="Content Placeholder 2"/>
           <p:cNvSpPr>
             <a:spLocks noGrp="1"/>
           </p:cNvSpPr>
@@ -5849,7 +5336,6 @@
               <a:buSzTx/>
               <a:buFontTx/>
               <a:buChar char="•"/>
-              <a:tabLst/>
             </a:pPr>
             <a:r>
               <a:rPr kumimoji="0" lang="en-US" altLang="en-US" sz="2800" b="1" i="0" u="none" strike="noStrike" cap="none" normalizeH="0" baseline="0" dirty="0">
@@ -5860,7 +5346,7 @@
                   <a:schemeClr val="tx1"/>
                 </a:solidFill>
                 <a:effectLst/>
-                <a:latin typeface="Arial" panose="020B0604020202020204" pitchFamily="34" charset="0"/>
+                <a:latin typeface="Arial" panose="02080604020202020204" pitchFamily="34" charset="0"/>
               </a:rPr>
               <a:t>Data aggregation</a:t>
             </a:r>
@@ -5873,10 +5359,20 @@
                   <a:schemeClr val="tx1"/>
                 </a:solidFill>
                 <a:effectLst/>
-                <a:latin typeface="Arial" panose="020B0604020202020204" pitchFamily="34" charset="0"/>
+                <a:latin typeface="Arial" panose="02080604020202020204" pitchFamily="34" charset="0"/>
               </a:rPr>
               <a:t>: OLAP allows summarizing and aggregating data to obtain a more general and comprehensive view of the data. </a:t>
             </a:r>
+            <a:endParaRPr kumimoji="0" lang="en-US" altLang="en-US" sz="2800" b="0" i="0" u="none" strike="noStrike" cap="none" normalizeH="0" baseline="0" dirty="0">
+              <a:ln>
+                <a:noFill/>
+              </a:ln>
+              <a:solidFill>
+                <a:schemeClr val="tx1"/>
+              </a:solidFill>
+              <a:effectLst/>
+              <a:latin typeface="Arial" panose="02080604020202020204" pitchFamily="34" charset="0"/>
+            </a:endParaRPr>
           </a:p>
           <a:p>
             <a:pPr marL="0" marR="0" lvl="0" indent="0" algn="l" defTabSz="914400" rtl="0" eaLnBrk="0" fontAlgn="base" latinLnBrk="0" hangingPunct="0">
@@ -5893,7 +5389,6 @@
               <a:buSzTx/>
               <a:buFontTx/>
               <a:buChar char="•"/>
-              <a:tabLst/>
             </a:pPr>
             <a:r>
               <a:rPr kumimoji="0" lang="en-US" altLang="en-US" sz="2800" b="0" i="0" u="none" strike="noStrike" cap="none" normalizeH="0" baseline="0" dirty="0">
@@ -5904,10 +5399,20 @@
                   <a:schemeClr val="tx1"/>
                 </a:solidFill>
                 <a:effectLst/>
-                <a:latin typeface="Arial" panose="020B0604020202020204" pitchFamily="34" charset="0"/>
+                <a:latin typeface="Arial" panose="02080604020202020204" pitchFamily="34" charset="0"/>
               </a:rPr>
               <a:t>This is useful for aggregate analysis such as totals, averages, peaks and throughs.</a:t>
             </a:r>
+            <a:endParaRPr kumimoji="0" lang="en-US" altLang="en-US" sz="2800" b="0" i="0" u="none" strike="noStrike" cap="none" normalizeH="0" baseline="0" dirty="0">
+              <a:ln>
+                <a:noFill/>
+              </a:ln>
+              <a:solidFill>
+                <a:schemeClr val="tx1"/>
+              </a:solidFill>
+              <a:effectLst/>
+              <a:latin typeface="Arial" panose="02080604020202020204" pitchFamily="34" charset="0"/>
+            </a:endParaRPr>
           </a:p>
           <a:p>
             <a:pPr marL="0" marR="0" lvl="0" indent="0" algn="l" defTabSz="914400" rtl="0" eaLnBrk="0" fontAlgn="base" latinLnBrk="0" hangingPunct="0">
@@ -5924,7 +5429,6 @@
               <a:buSzTx/>
               <a:buFontTx/>
               <a:buChar char="•"/>
-              <a:tabLst/>
             </a:pPr>
             <a:endParaRPr kumimoji="0" lang="en-US" altLang="en-US" sz="2800" b="0" i="0" u="none" strike="noStrike" cap="none" normalizeH="0" baseline="0" dirty="0">
               <a:ln>
@@ -5934,7 +5438,7 @@
                 <a:schemeClr val="tx1"/>
               </a:solidFill>
               <a:effectLst/>
-              <a:latin typeface="Arial" panose="020B0604020202020204" pitchFamily="34" charset="0"/>
+              <a:latin typeface="Arial" panose="02080604020202020204" pitchFamily="34" charset="0"/>
             </a:endParaRPr>
           </a:p>
           <a:p>
@@ -5952,7 +5456,6 @@
               <a:buSzTx/>
               <a:buFontTx/>
               <a:buChar char="•"/>
-              <a:tabLst/>
             </a:pPr>
             <a:endParaRPr kumimoji="0" lang="en-US" altLang="en-US" sz="2800" b="0" i="0" u="none" strike="noStrike" cap="none" normalizeH="0" baseline="0" dirty="0">
               <a:ln>
@@ -5962,7 +5465,7 @@
                 <a:schemeClr val="tx1"/>
               </a:solidFill>
               <a:effectLst/>
-              <a:latin typeface="Arial" panose="020B0604020202020204" pitchFamily="34" charset="0"/>
+              <a:latin typeface="Arial" panose="02080604020202020204" pitchFamily="34" charset="0"/>
             </a:endParaRPr>
           </a:p>
           <a:p>
@@ -5980,7 +5483,6 @@
               <a:buSzTx/>
               <a:buFontTx/>
               <a:buChar char="•"/>
-              <a:tabLst/>
             </a:pPr>
             <a:r>
               <a:rPr kumimoji="0" lang="en-US" altLang="en-US" sz="2800" b="1" i="0" u="none" strike="noStrike" cap="none" normalizeH="0" baseline="0" dirty="0">
@@ -5991,7 +5493,7 @@
                   <a:schemeClr val="tx1"/>
                 </a:solidFill>
                 <a:effectLst/>
-                <a:latin typeface="Arial" panose="020B0604020202020204" pitchFamily="34" charset="0"/>
+                <a:latin typeface="Arial" panose="02080604020202020204" pitchFamily="34" charset="0"/>
               </a:rPr>
               <a:t>Fast response</a:t>
             </a:r>
@@ -6004,10 +5506,20 @@
                   <a:schemeClr val="tx1"/>
                 </a:solidFill>
                 <a:effectLst/>
-                <a:latin typeface="Arial" panose="020B0604020202020204" pitchFamily="34" charset="0"/>
+                <a:latin typeface="Arial" panose="02080604020202020204" pitchFamily="34" charset="0"/>
               </a:rPr>
               <a:t>: OLAP systems are optimized to provide fast responses to complex queries. </a:t>
             </a:r>
+            <a:endParaRPr kumimoji="0" lang="en-US" altLang="en-US" sz="2800" b="0" i="0" u="none" strike="noStrike" cap="none" normalizeH="0" baseline="0" dirty="0">
+              <a:ln>
+                <a:noFill/>
+              </a:ln>
+              <a:solidFill>
+                <a:schemeClr val="tx1"/>
+              </a:solidFill>
+              <a:effectLst/>
+              <a:latin typeface="Arial" panose="02080604020202020204" pitchFamily="34" charset="0"/>
+            </a:endParaRPr>
           </a:p>
           <a:p>
             <a:pPr marL="0" marR="0" lvl="0" indent="0" algn="l" defTabSz="914400" rtl="0" eaLnBrk="0" fontAlgn="base" latinLnBrk="0" hangingPunct="0">
@@ -6024,7 +5536,6 @@
               <a:buSzTx/>
               <a:buFontTx/>
               <a:buChar char="•"/>
-              <a:tabLst/>
             </a:pPr>
             <a:r>
               <a:rPr kumimoji="0" lang="en-US" altLang="en-US" sz="2800" b="0" i="0" u="none" strike="noStrike" cap="none" normalizeH="0" baseline="0" dirty="0">
@@ -6035,10 +5546,20 @@
                   <a:schemeClr val="tx1"/>
                 </a:solidFill>
                 <a:effectLst/>
-                <a:latin typeface="Arial" panose="020B0604020202020204" pitchFamily="34" charset="0"/>
+                <a:latin typeface="Arial" panose="02080604020202020204" pitchFamily="34" charset="0"/>
               </a:rPr>
               <a:t>They use efficient processing and pre-calculation techniques to speed up data analysis and retrieval.</a:t>
             </a:r>
+            <a:endParaRPr kumimoji="0" lang="en-US" altLang="en-US" sz="2800" b="0" i="0" u="none" strike="noStrike" cap="none" normalizeH="0" baseline="0" dirty="0">
+              <a:ln>
+                <a:noFill/>
+              </a:ln>
+              <a:solidFill>
+                <a:schemeClr val="tx1"/>
+              </a:solidFill>
+              <a:effectLst/>
+              <a:latin typeface="Arial" panose="02080604020202020204" pitchFamily="34" charset="0"/>
+            </a:endParaRPr>
           </a:p>
           <a:p>
             <a:pPr marL="0" marR="0" lvl="0" indent="0" algn="l" defTabSz="914400" rtl="0" eaLnBrk="0" fontAlgn="base" latinLnBrk="0" hangingPunct="0">
@@ -6055,7 +5576,6 @@
               <a:buSzTx/>
               <a:buFontTx/>
               <a:buChar char="•"/>
-              <a:tabLst/>
             </a:pPr>
             <a:endParaRPr kumimoji="0" lang="en-US" altLang="en-US" sz="2800" b="0" i="0" u="none" strike="noStrike" cap="none" normalizeH="0" baseline="0" dirty="0">
               <a:ln>
@@ -6065,7 +5585,7 @@
                 <a:schemeClr val="tx1"/>
               </a:solidFill>
               <a:effectLst/>
-              <a:latin typeface="Arial" panose="020B0604020202020204" pitchFamily="34" charset="0"/>
+              <a:latin typeface="Arial" panose="02080604020202020204" pitchFamily="34" charset="0"/>
             </a:endParaRPr>
           </a:p>
           <a:p>
@@ -6083,7 +5603,6 @@
               <a:buSzTx/>
               <a:buFontTx/>
               <a:buChar char="•"/>
-              <a:tabLst/>
             </a:pPr>
             <a:r>
               <a:rPr kumimoji="0" lang="en-US" altLang="en-US" sz="2800" b="1" i="0" u="none" strike="noStrike" cap="none" normalizeH="0" baseline="0" dirty="0">
@@ -6094,7 +5613,7 @@
                   <a:schemeClr val="tx1"/>
                 </a:solidFill>
                 <a:effectLst/>
-                <a:latin typeface="Arial" panose="020B0604020202020204" pitchFamily="34" charset="0"/>
+                <a:latin typeface="Arial" panose="02080604020202020204" pitchFamily="34" charset="0"/>
               </a:rPr>
               <a:t>Decision support</a:t>
             </a:r>
@@ -6107,10 +5626,20 @@
                   <a:schemeClr val="tx1"/>
                 </a:solidFill>
                 <a:effectLst/>
-                <a:latin typeface="Arial" panose="020B0604020202020204" pitchFamily="34" charset="0"/>
+                <a:latin typeface="Arial" panose="02080604020202020204" pitchFamily="34" charset="0"/>
               </a:rPr>
               <a:t>: OLAP is used to analyze large volumes of business data and provide valuable information for informed decision-making. </a:t>
             </a:r>
+            <a:endParaRPr kumimoji="0" lang="en-US" altLang="en-US" sz="2800" b="0" i="0" u="none" strike="noStrike" cap="none" normalizeH="0" baseline="0" dirty="0">
+              <a:ln>
+                <a:noFill/>
+              </a:ln>
+              <a:solidFill>
+                <a:schemeClr val="tx1"/>
+              </a:solidFill>
+              <a:effectLst/>
+              <a:latin typeface="Arial" panose="02080604020202020204" pitchFamily="34" charset="0"/>
+            </a:endParaRPr>
           </a:p>
           <a:p>
             <a:pPr marL="0" marR="0" lvl="0" indent="0" algn="l" defTabSz="914400" rtl="0" eaLnBrk="0" fontAlgn="base" latinLnBrk="0" hangingPunct="0">
@@ -6127,7 +5656,6 @@
               <a:buSzTx/>
               <a:buFontTx/>
               <a:buChar char="•"/>
-              <a:tabLst/>
             </a:pPr>
             <a:r>
               <a:rPr kumimoji="0" lang="en-US" altLang="en-US" sz="2800" b="0" i="0" u="none" strike="noStrike" cap="none" normalizeH="0" baseline="0" dirty="0">
@@ -6138,10 +5666,20 @@
                   <a:schemeClr val="tx1"/>
                 </a:solidFill>
                 <a:effectLst/>
-                <a:latin typeface="Arial" panose="020B0604020202020204" pitchFamily="34" charset="0"/>
+                <a:latin typeface="Arial" panose="02080604020202020204" pitchFamily="34" charset="0"/>
               </a:rPr>
               <a:t>Users can gain a deeper understanding of trends and patterns, enabling them to make better strategic and tactical decisions.</a:t>
             </a:r>
+            <a:endParaRPr kumimoji="0" lang="en-US" altLang="en-US" sz="2800" b="0" i="0" u="none" strike="noStrike" cap="none" normalizeH="0" baseline="0" dirty="0">
+              <a:ln>
+                <a:noFill/>
+              </a:ln>
+              <a:solidFill>
+                <a:schemeClr val="tx1"/>
+              </a:solidFill>
+              <a:effectLst/>
+              <a:latin typeface="Arial" panose="02080604020202020204" pitchFamily="34" charset="0"/>
+            </a:endParaRPr>
           </a:p>
           <a:p>
             <a:endParaRPr lang="en-US" dirty="0"/>
@@ -6149,11 +5687,6 @@
         </p:txBody>
       </p:sp>
     </p:spTree>
-    <p:extLst>
-      <p:ext uri="{BB962C8B-B14F-4D97-AF65-F5344CB8AC3E}">
-        <p14:creationId xmlns:p14="http://schemas.microsoft.com/office/powerpoint/2010/main" val="788898641"/>
-      </p:ext>
-    </p:extLst>
   </p:cSld>
   <p:clrMapOvr>
     <a:masterClrMapping/>
@@ -6180,13 +5713,7 @@
       </p:grpSpPr>
       <p:sp>
         <p:nvSpPr>
-          <p:cNvPr id="3" name="Content Placeholder 2">
-            <a:extLst>
-              <a:ext uri="{FF2B5EF4-FFF2-40B4-BE49-F238E27FC236}">
-                <a16:creationId xmlns:a16="http://schemas.microsoft.com/office/drawing/2014/main" id="{CF5D66C9-F984-0128-9B64-D92702B4C715}"/>
-              </a:ext>
-            </a:extLst>
-          </p:cNvPr>
+          <p:cNvPr id="3" name="Content Placeholder 2"/>
           <p:cNvSpPr>
             <a:spLocks noGrp="1"/>
           </p:cNvSpPr>
@@ -6213,12 +5740,14 @@
               <a:rPr lang="en-US" sz="3600" b="1" dirty="0"/>
               <a:t>Types of OLAP</a:t>
             </a:r>
+            <a:endParaRPr lang="en-US" sz="3600" b="1" dirty="0"/>
           </a:p>
           <a:p>
             <a:r>
               <a:rPr lang="en-US" dirty="0"/>
               <a:t>There are three main types of OLAP servers are as following:</a:t>
             </a:r>
+            <a:endParaRPr lang="en-US" dirty="0"/>
           </a:p>
           <a:p>
             <a:r>
@@ -6229,6 +5758,7 @@
               <a:rPr lang="en-US" dirty="0"/>
               <a:t> stands for Relational OLAP, an application based on relational DBMSs.</a:t>
             </a:r>
+            <a:endParaRPr lang="en-US" dirty="0"/>
           </a:p>
           <a:p>
             <a:endParaRPr lang="en-US" dirty="0"/>
@@ -6242,6 +5772,7 @@
               <a:rPr lang="en-US" dirty="0"/>
               <a:t> stands for Multidimensional OLAP, an application based on multidimensional DBMSs.</a:t>
             </a:r>
+            <a:endParaRPr lang="en-US" dirty="0"/>
           </a:p>
           <a:p>
             <a:endParaRPr lang="en-US" dirty="0"/>
@@ -6255,6 +5786,7 @@
               <a:rPr lang="en-US" dirty="0"/>
               <a:t> stands for Hybrid OLAP, an application using both relational and multidimensional techniques.</a:t>
             </a:r>
+            <a:endParaRPr lang="en-US" dirty="0"/>
           </a:p>
           <a:p>
             <a:endParaRPr lang="en-US" dirty="0"/>
@@ -6263,13 +5795,7 @@
       </p:sp>
       <p:pic>
         <p:nvPicPr>
-          <p:cNvPr id="7" name="Content Placeholder 6">
-            <a:extLst>
-              <a:ext uri="{FF2B5EF4-FFF2-40B4-BE49-F238E27FC236}">
-                <a16:creationId xmlns:a16="http://schemas.microsoft.com/office/drawing/2014/main" id="{73E71D9D-2E9A-6798-19E1-D602FD05B68F}"/>
-              </a:ext>
-            </a:extLst>
-          </p:cNvPr>
+          <p:cNvPr id="7" name="Content Placeholder 6"/>
           <p:cNvPicPr>
             <a:picLocks noGrp="1" noChangeAspect="1"/>
           </p:cNvPicPr>
@@ -6278,7 +5804,7 @@
           </p:nvPr>
         </p:nvPicPr>
         <p:blipFill>
-          <a:blip r:embed="rId2">
+          <a:blip r:embed="rId1">
             <a:extLst>
               <a:ext uri="{28A0092B-C50C-407E-A947-70E740481C1C}">
                 <a14:useLocalDpi xmlns:a14="http://schemas.microsoft.com/office/drawing/2010/main" val="0"/>
@@ -6297,11 +5823,6 @@
         </p:spPr>
       </p:pic>
     </p:spTree>
-    <p:extLst>
-      <p:ext uri="{BB962C8B-B14F-4D97-AF65-F5344CB8AC3E}">
-        <p14:creationId xmlns:p14="http://schemas.microsoft.com/office/powerpoint/2010/main" val="611052410"/>
-      </p:ext>
-    </p:extLst>
   </p:cSld>
   <p:clrMapOvr>
     <a:masterClrMapping/>
@@ -6328,13 +5849,7 @@
       </p:grpSpPr>
       <p:sp>
         <p:nvSpPr>
-          <p:cNvPr id="6" name="Content Placeholder 5">
-            <a:extLst>
-              <a:ext uri="{FF2B5EF4-FFF2-40B4-BE49-F238E27FC236}">
-                <a16:creationId xmlns:a16="http://schemas.microsoft.com/office/drawing/2014/main" id="{2DE0870F-E26D-1E09-E64B-D3082820EBD6}"/>
-              </a:ext>
-            </a:extLst>
-          </p:cNvPr>
+          <p:cNvPr id="6" name="Content Placeholder 5"/>
           <p:cNvSpPr>
             <a:spLocks noGrp="1"/>
           </p:cNvSpPr>
@@ -6361,42 +5876,49 @@
               <a:rPr lang="en-US" b="1" dirty="0"/>
               <a:t>Relational OLAP (ROLAP) Server</a:t>
             </a:r>
+            <a:endParaRPr lang="en-US" b="1" dirty="0"/>
           </a:p>
           <a:p>
             <a:r>
               <a:rPr lang="en-US" dirty="0"/>
               <a:t>These are intermediate servers which stand in between a relational back-end server and user frontend tools.</a:t>
             </a:r>
+            <a:endParaRPr lang="en-US" dirty="0"/>
           </a:p>
           <a:p>
             <a:r>
               <a:rPr lang="en-US" dirty="0"/>
               <a:t>They use a relational or extended-relational DBMS to save and handle warehouse data, and OLAP middleware to provide missing pieces. </a:t>
             </a:r>
+            <a:endParaRPr lang="en-US" dirty="0"/>
           </a:p>
           <a:p>
             <a:r>
               <a:rPr lang="en-US" dirty="0"/>
               <a:t>ROLAP servers contain optimization for each DBMS back end, implementation of aggregation navigation logic, and additional tools and services. </a:t>
             </a:r>
+            <a:endParaRPr lang="en-US" dirty="0"/>
           </a:p>
           <a:p>
             <a:r>
               <a:rPr lang="en-US" dirty="0"/>
               <a:t>ROLAP technology tends to have higher scalability than MOLAP technology. </a:t>
             </a:r>
+            <a:endParaRPr lang="en-US" dirty="0"/>
           </a:p>
           <a:p>
             <a:r>
               <a:rPr lang="en-US" dirty="0"/>
               <a:t>ROLAP systems work primarily from the data that resides in a relational database, where the base data and dimension tables are stored as relational tables. This model permits the multidimensional analysis of data.</a:t>
             </a:r>
+            <a:endParaRPr lang="en-US" dirty="0"/>
           </a:p>
           <a:p>
             <a:r>
               <a:rPr lang="en-US" dirty="0"/>
               <a:t>This technique relies on manipulating the data stored in the relational database to give the presence of traditional OLAP's slicing and dicing functionality. In essence, each method of slicing and dicing is equivalent to adding a "WHERE" clause in the SQL statement.</a:t>
             </a:r>
+            <a:endParaRPr lang="en-US" dirty="0"/>
           </a:p>
           <a:p>
             <a:endParaRPr lang="en-US" dirty="0"/>
@@ -6404,11 +5926,6 @@
         </p:txBody>
       </p:sp>
     </p:spTree>
-    <p:extLst>
-      <p:ext uri="{BB962C8B-B14F-4D97-AF65-F5344CB8AC3E}">
-        <p14:creationId xmlns:p14="http://schemas.microsoft.com/office/powerpoint/2010/main" val="1607862211"/>
-      </p:ext>
-    </p:extLst>
   </p:cSld>
   <p:clrMapOvr>
     <a:masterClrMapping/>
@@ -6435,13 +5952,7 @@
       </p:grpSpPr>
       <p:sp>
         <p:nvSpPr>
-          <p:cNvPr id="9" name="Title 8">
-            <a:extLst>
-              <a:ext uri="{FF2B5EF4-FFF2-40B4-BE49-F238E27FC236}">
-                <a16:creationId xmlns:a16="http://schemas.microsoft.com/office/drawing/2014/main" id="{1D20C40D-C8B9-1531-0D6B-F7A2241E7AA1}"/>
-              </a:ext>
-            </a:extLst>
-          </p:cNvPr>
+          <p:cNvPr id="9" name="Title 8"/>
           <p:cNvSpPr>
             <a:spLocks noGrp="1"/>
           </p:cNvSpPr>
@@ -6476,18 +5987,13 @@
               <a:rPr lang="en-US" dirty="0"/>
               <a:t>There are three types of data marts: </a:t>
             </a:r>
-          </a:p>
-        </p:txBody>
-      </p:sp>
-      <p:sp>
-        <p:nvSpPr>
-          <p:cNvPr id="10" name="Content Placeholder 9">
-            <a:extLst>
-              <a:ext uri="{FF2B5EF4-FFF2-40B4-BE49-F238E27FC236}">
-                <a16:creationId xmlns:a16="http://schemas.microsoft.com/office/drawing/2014/main" id="{F2403DFD-AEE8-954E-2A0B-59AB4061A2FF}"/>
-              </a:ext>
-            </a:extLst>
-          </p:cNvPr>
+            <a:endParaRPr lang="en-US" dirty="0"/>
+          </a:p>
+        </p:txBody>
+      </p:sp>
+      <p:sp>
+        <p:nvSpPr>
+          <p:cNvPr id="10" name="Content Placeholder 9"/>
           <p:cNvSpPr>
             <a:spLocks noGrp="1"/>
           </p:cNvSpPr>
@@ -6512,6 +6018,7 @@
               <a:rPr lang="en-US" dirty="0"/>
               <a:t>Dependent Data Mart is created by extracting the data from central repository, Datawarehouse.</a:t>
             </a:r>
+            <a:endParaRPr lang="en-US" dirty="0"/>
           </a:p>
           <a:p>
             <a:pPr algn="just"/>
@@ -6519,6 +6026,7 @@
               <a:rPr lang="en-US" dirty="0"/>
               <a:t> First data warehouse is created by extracting data (through ETL tool) from external sources and then data mart is created from data warehouse. </a:t>
             </a:r>
+            <a:endParaRPr lang="en-US" dirty="0"/>
           </a:p>
           <a:p>
             <a:pPr algn="just"/>
@@ -6526,6 +6034,7 @@
               <a:rPr lang="en-US" dirty="0"/>
               <a:t>Dependent data mart is created in top-down approach of data warehouse architecture.</a:t>
             </a:r>
+            <a:endParaRPr lang="en-US" dirty="0"/>
           </a:p>
           <a:p>
             <a:pPr algn="just"/>
@@ -6533,18 +6042,13 @@
               <a:rPr lang="en-US" dirty="0"/>
               <a:t> This model of data mart is used by big organizations. </a:t>
             </a:r>
-          </a:p>
-        </p:txBody>
-      </p:sp>
-      <p:sp>
-        <p:nvSpPr>
-          <p:cNvPr id="11" name="Content Placeholder 10">
-            <a:extLst>
-              <a:ext uri="{FF2B5EF4-FFF2-40B4-BE49-F238E27FC236}">
-                <a16:creationId xmlns:a16="http://schemas.microsoft.com/office/drawing/2014/main" id="{52257041-3B28-20FE-9513-459E702F2D73}"/>
-              </a:ext>
-            </a:extLst>
-          </p:cNvPr>
+            <a:endParaRPr lang="en-US" dirty="0"/>
+          </a:p>
+        </p:txBody>
+      </p:sp>
+      <p:sp>
+        <p:nvSpPr>
+          <p:cNvPr id="11" name="Content Placeholder 10"/>
           <p:cNvSpPr>
             <a:spLocks noGrp="1"/>
           </p:cNvSpPr>
@@ -6568,31 +6072,27 @@
               <a:rPr lang="en-US" b="1" dirty="0"/>
               <a:t>1. Dependent Data Mart –</a:t>
             </a:r>
+            <a:endParaRPr lang="en-US" b="1" dirty="0"/>
           </a:p>
           <a:p>
             <a:r>
               <a:rPr lang="en-US" dirty="0"/>
               <a:t> </a:t>
             </a:r>
+            <a:endParaRPr lang="en-US" dirty="0"/>
           </a:p>
         </p:txBody>
       </p:sp>
       <p:pic>
         <p:nvPicPr>
-          <p:cNvPr id="15" name="Picture 14">
-            <a:extLst>
-              <a:ext uri="{FF2B5EF4-FFF2-40B4-BE49-F238E27FC236}">
-                <a16:creationId xmlns:a16="http://schemas.microsoft.com/office/drawing/2014/main" id="{8611A0ED-E50A-39AA-C4B7-9B07368547A5}"/>
-              </a:ext>
-            </a:extLst>
-          </p:cNvPr>
+          <p:cNvPr id="15" name="Picture 14"/>
           <p:cNvPicPr>
             <a:picLocks noChangeAspect="1"/>
           </p:cNvPicPr>
           <p:nvPr/>
         </p:nvPicPr>
         <p:blipFill>
-          <a:blip r:embed="rId2">
+          <a:blip r:embed="rId1">
             <a:extLst>
               <a:ext uri="{28A0092B-C50C-407E-A947-70E740481C1C}">
                 <a14:useLocalDpi xmlns:a14="http://schemas.microsoft.com/office/drawing/2010/main" val="0"/>
@@ -6614,11 +6114,6 @@
         </p:spPr>
       </p:pic>
     </p:spTree>
-    <p:extLst>
-      <p:ext uri="{BB962C8B-B14F-4D97-AF65-F5344CB8AC3E}">
-        <p14:creationId xmlns:p14="http://schemas.microsoft.com/office/powerpoint/2010/main" val="1199242074"/>
-      </p:ext>
-    </p:extLst>
   </p:cSld>
   <p:clrMapOvr>
     <a:masterClrMapping/>
@@ -6645,13 +6140,7 @@
       </p:grpSpPr>
       <p:sp>
         <p:nvSpPr>
-          <p:cNvPr id="3" name="Content Placeholder 2">
-            <a:extLst>
-              <a:ext uri="{FF2B5EF4-FFF2-40B4-BE49-F238E27FC236}">
-                <a16:creationId xmlns:a16="http://schemas.microsoft.com/office/drawing/2014/main" id="{E34B6B71-6696-CEBE-DB78-59993AD6086D}"/>
-              </a:ext>
-            </a:extLst>
-          </p:cNvPr>
+          <p:cNvPr id="3" name="Content Placeholder 2"/>
           <p:cNvSpPr>
             <a:spLocks noGrp="1"/>
           </p:cNvSpPr>
@@ -6673,42 +6162,47 @@
               <a:rPr lang="en-US" b="1" dirty="0"/>
               <a:t>Relational OLAP Architecture</a:t>
             </a:r>
+            <a:endParaRPr lang="en-US" b="1" dirty="0"/>
           </a:p>
           <a:p>
             <a:r>
               <a:rPr lang="en-US" dirty="0"/>
               <a:t>ROLAP Architecture includes the following components </a:t>
             </a:r>
+            <a:endParaRPr lang="en-US" dirty="0"/>
           </a:p>
           <a:p>
             <a:pPr>
-              <a:buFont typeface="Arial" panose="020B0604020202020204" pitchFamily="34" charset="0"/>
+              <a:buFont typeface="Arial" panose="02080604020202020204" pitchFamily="34" charset="0"/>
               <a:buChar char="•"/>
             </a:pPr>
             <a:r>
               <a:rPr lang="en-US" dirty="0"/>
               <a:t>Database server.</a:t>
             </a:r>
+            <a:endParaRPr lang="en-US" dirty="0"/>
           </a:p>
           <a:p>
             <a:pPr>
-              <a:buFont typeface="Arial" panose="020B0604020202020204" pitchFamily="34" charset="0"/>
+              <a:buFont typeface="Arial" panose="02080604020202020204" pitchFamily="34" charset="0"/>
               <a:buChar char="•"/>
             </a:pPr>
             <a:r>
               <a:rPr lang="en-US" dirty="0"/>
               <a:t>ROLAP server.</a:t>
             </a:r>
+            <a:endParaRPr lang="en-US" dirty="0"/>
           </a:p>
           <a:p>
             <a:pPr>
-              <a:buFont typeface="Arial" panose="020B0604020202020204" pitchFamily="34" charset="0"/>
+              <a:buFont typeface="Arial" panose="02080604020202020204" pitchFamily="34" charset="0"/>
               <a:buChar char="•"/>
             </a:pPr>
             <a:r>
               <a:rPr lang="en-US" dirty="0"/>
               <a:t>Front-end tool.</a:t>
             </a:r>
+            <a:endParaRPr lang="en-US" dirty="0"/>
           </a:p>
           <a:p>
             <a:endParaRPr lang="en-US" dirty="0"/>
@@ -6717,13 +6211,7 @@
       </p:sp>
       <p:pic>
         <p:nvPicPr>
-          <p:cNvPr id="6" name="Content Placeholder 5">
-            <a:extLst>
-              <a:ext uri="{FF2B5EF4-FFF2-40B4-BE49-F238E27FC236}">
-                <a16:creationId xmlns:a16="http://schemas.microsoft.com/office/drawing/2014/main" id="{D1784856-7A72-3F0F-7A2D-F73BC1B9F90D}"/>
-              </a:ext>
-            </a:extLst>
-          </p:cNvPr>
+          <p:cNvPr id="6" name="Content Placeholder 5"/>
           <p:cNvPicPr>
             <a:picLocks noGrp="1" noChangeAspect="1"/>
           </p:cNvPicPr>
@@ -6732,7 +6220,7 @@
           </p:nvPr>
         </p:nvPicPr>
         <p:blipFill>
-          <a:blip r:embed="rId2">
+          <a:blip r:embed="rId1">
             <a:extLst>
               <a:ext uri="{28A0092B-C50C-407E-A947-70E740481C1C}">
                 <a14:useLocalDpi xmlns:a14="http://schemas.microsoft.com/office/drawing/2010/main" val="0"/>
@@ -6751,11 +6239,6 @@
         </p:spPr>
       </p:pic>
     </p:spTree>
-    <p:extLst>
-      <p:ext uri="{BB962C8B-B14F-4D97-AF65-F5344CB8AC3E}">
-        <p14:creationId xmlns:p14="http://schemas.microsoft.com/office/powerpoint/2010/main" val="444590317"/>
-      </p:ext>
-    </p:extLst>
   </p:cSld>
   <p:clrMapOvr>
     <a:masterClrMapping/>
@@ -6782,13 +6265,7 @@
       </p:grpSpPr>
       <p:sp>
         <p:nvSpPr>
-          <p:cNvPr id="6" name="Content Placeholder 5">
-            <a:extLst>
-              <a:ext uri="{FF2B5EF4-FFF2-40B4-BE49-F238E27FC236}">
-                <a16:creationId xmlns:a16="http://schemas.microsoft.com/office/drawing/2014/main" id="{D6E08A0C-142A-7D52-5A0A-0D892A5BE164}"/>
-              </a:ext>
-            </a:extLst>
-          </p:cNvPr>
+          <p:cNvPr id="6" name="Content Placeholder 5"/>
           <p:cNvSpPr>
             <a:spLocks noGrp="1"/>
           </p:cNvSpPr>
@@ -6814,6 +6291,7 @@
               <a:rPr lang="en-US" dirty="0"/>
               <a:t> is the latest and fastest-growing OLAP technology segment in the market. </a:t>
             </a:r>
+            <a:endParaRPr lang="en-US" dirty="0"/>
           </a:p>
           <a:p>
             <a:endParaRPr lang="en-US" dirty="0"/>
@@ -6823,6 +6301,7 @@
               <a:rPr lang="en-US" dirty="0"/>
               <a:t>This method allows multiple multidimensional views of two-dimensional relational tables to be created, avoiding structuring record around the desired view.</a:t>
             </a:r>
+            <a:endParaRPr lang="en-US" dirty="0"/>
           </a:p>
           <a:p>
             <a:endParaRPr lang="en-US" dirty="0"/>
@@ -6832,6 +6311,7 @@
               <a:rPr lang="en-US" dirty="0"/>
               <a:t>Some products in this segment have supported reliable SQL engines to help the complexity of multidimensional analysis.</a:t>
             </a:r>
+            <a:endParaRPr lang="en-US" dirty="0"/>
           </a:p>
           <a:p>
             <a:endParaRPr lang="en-US" dirty="0"/>
@@ -6841,6 +6321,7 @@
               <a:rPr lang="en-US" dirty="0"/>
               <a:t> This includes creating multiple SQL statements to handle user requests, being 'RDBMS' aware and also being capable of generating the SQL statements based on the optimizer of the DBMS engine.</a:t>
             </a:r>
+            <a:endParaRPr lang="en-US" dirty="0"/>
           </a:p>
           <a:p>
             <a:endParaRPr lang="en-US" dirty="0"/>
@@ -6848,11 +6329,6 @@
         </p:txBody>
       </p:sp>
     </p:spTree>
-    <p:extLst>
-      <p:ext uri="{BB962C8B-B14F-4D97-AF65-F5344CB8AC3E}">
-        <p14:creationId xmlns:p14="http://schemas.microsoft.com/office/powerpoint/2010/main" val="2486699062"/>
-      </p:ext>
-    </p:extLst>
   </p:cSld>
   <p:clrMapOvr>
     <a:masterClrMapping/>
@@ -6879,13 +6355,7 @@
       </p:grpSpPr>
       <p:sp>
         <p:nvSpPr>
-          <p:cNvPr id="3" name="Content Placeholder 2">
-            <a:extLst>
-              <a:ext uri="{FF2B5EF4-FFF2-40B4-BE49-F238E27FC236}">
-                <a16:creationId xmlns:a16="http://schemas.microsoft.com/office/drawing/2014/main" id="{84AF9641-E1E5-5613-5269-8F7454B7D612}"/>
-              </a:ext>
-            </a:extLst>
-          </p:cNvPr>
+          <p:cNvPr id="3" name="Content Placeholder 2"/>
           <p:cNvSpPr>
             <a:spLocks noGrp="1"/>
           </p:cNvSpPr>
@@ -6909,30 +6379,35 @@
               <a:rPr lang="en-US" dirty="0"/>
               <a:t> MOLAP </a:t>
             </a:r>
+            <a:endParaRPr lang="en-US" dirty="0"/>
           </a:p>
           <a:p>
             <a:r>
               <a:rPr lang="en-US" b="1" dirty="0"/>
               <a:t>Multidimensional OLAP (MOLAP) Server</a:t>
             </a:r>
+            <a:endParaRPr lang="en-US" b="1" dirty="0"/>
           </a:p>
           <a:p>
             <a:r>
               <a:rPr lang="en-US" dirty="0"/>
               <a:t>A MOLAP system is based on a native logical model that directly supports multidimensional data and operations.</a:t>
             </a:r>
+            <a:endParaRPr lang="en-US" dirty="0"/>
           </a:p>
           <a:p>
             <a:r>
               <a:rPr lang="en-US" dirty="0"/>
               <a:t> </a:t>
             </a:r>
+            <a:endParaRPr lang="en-US" dirty="0"/>
           </a:p>
           <a:p>
             <a:r>
               <a:rPr lang="en-US" dirty="0"/>
               <a:t>Data are stored physically into multidimensional arrays, and positional techniques are used to access them.</a:t>
             </a:r>
+            <a:endParaRPr lang="en-US" dirty="0"/>
           </a:p>
           <a:p>
             <a:endParaRPr lang="en-US" dirty="0"/>
@@ -6958,6 +6433,7 @@
               <a:rPr lang="en-US" dirty="0"/>
               <a:t> is that data are summarized and are stored in an optimized format in a multidimensional cube, instead of in a relational database. </a:t>
             </a:r>
+            <a:endParaRPr lang="en-US" dirty="0"/>
           </a:p>
           <a:p>
             <a:pPr marL="0" indent="0">
@@ -6970,15 +6446,11 @@
               <a:rPr lang="en-US" dirty="0"/>
               <a:t>In MOLAP model, data are structured into proprietary formats by client's reporting requirements with the calculations pre-generated on the cubes.</a:t>
             </a:r>
+            <a:endParaRPr lang="en-US" dirty="0"/>
           </a:p>
         </p:txBody>
       </p:sp>
     </p:spTree>
-    <p:extLst>
-      <p:ext uri="{BB962C8B-B14F-4D97-AF65-F5344CB8AC3E}">
-        <p14:creationId xmlns:p14="http://schemas.microsoft.com/office/powerpoint/2010/main" val="236121159"/>
-      </p:ext>
-    </p:extLst>
   </p:cSld>
   <p:clrMapOvr>
     <a:masterClrMapping/>
@@ -7005,13 +6477,7 @@
       </p:grpSpPr>
       <p:sp>
         <p:nvSpPr>
-          <p:cNvPr id="3" name="Content Placeholder 2">
-            <a:extLst>
-              <a:ext uri="{FF2B5EF4-FFF2-40B4-BE49-F238E27FC236}">
-                <a16:creationId xmlns:a16="http://schemas.microsoft.com/office/drawing/2014/main" id="{550A2279-045D-8AC8-0137-BDD74A27FF5E}"/>
-              </a:ext>
-            </a:extLst>
-          </p:cNvPr>
+          <p:cNvPr id="3" name="Content Placeholder 2"/>
           <p:cNvSpPr>
             <a:spLocks noGrp="1"/>
           </p:cNvSpPr>
@@ -7033,50 +6499,54 @@
               <a:rPr lang="en-US" b="1" dirty="0"/>
               <a:t>Key Takeaways</a:t>
             </a:r>
+            <a:endParaRPr lang="en-US" b="1" dirty="0"/>
           </a:p>
           <a:p>
             <a:pPr>
-              <a:buFont typeface="Arial" panose="020B0604020202020204" pitchFamily="34" charset="0"/>
+              <a:buFont typeface="Arial" panose="02080604020202020204" pitchFamily="34" charset="0"/>
               <a:buChar char="•"/>
             </a:pPr>
             <a:r>
               <a:rPr lang="en-US" dirty="0"/>
               <a:t>MOLAP promotes better-informed business decisions through analysis of data an organization already has generated.</a:t>
             </a:r>
+            <a:endParaRPr lang="en-US" dirty="0"/>
           </a:p>
           <a:p>
             <a:pPr>
-              <a:buFont typeface="Arial" panose="020B0604020202020204" pitchFamily="34" charset="0"/>
+              <a:buFont typeface="Arial" panose="02080604020202020204" pitchFamily="34" charset="0"/>
               <a:buChar char="•"/>
             </a:pPr>
             <a:endParaRPr lang="en-US" dirty="0"/>
           </a:p>
           <a:p>
             <a:pPr>
-              <a:buFont typeface="Arial" panose="020B0604020202020204" pitchFamily="34" charset="0"/>
+              <a:buFont typeface="Arial" panose="02080604020202020204" pitchFamily="34" charset="0"/>
               <a:buChar char="•"/>
             </a:pPr>
             <a:r>
               <a:rPr lang="en-US" dirty="0"/>
               <a:t>MOLAP has applications throughout the organization — in sales, marketing, finance, merchandising, manufacturing.</a:t>
             </a:r>
+            <a:endParaRPr lang="en-US" dirty="0"/>
           </a:p>
           <a:p>
             <a:pPr>
-              <a:buFont typeface="Arial" panose="020B0604020202020204" pitchFamily="34" charset="0"/>
+              <a:buFont typeface="Arial" panose="02080604020202020204" pitchFamily="34" charset="0"/>
               <a:buChar char="•"/>
             </a:pPr>
             <a:endParaRPr lang="en-US" dirty="0"/>
           </a:p>
           <a:p>
             <a:pPr>
-              <a:buFont typeface="Arial" panose="020B0604020202020204" pitchFamily="34" charset="0"/>
+              <a:buFont typeface="Arial" panose="02080604020202020204" pitchFamily="34" charset="0"/>
               <a:buChar char="•"/>
             </a:pPr>
             <a:r>
               <a:rPr lang="en-US" dirty="0"/>
               <a:t>In MOLAP systems, data stored in data warehouses is copied into multidimensional data cubes optimized for fast querying based on the types of questions an organization's analysts ask most often.</a:t>
             </a:r>
+            <a:endParaRPr lang="en-US" dirty="0"/>
           </a:p>
           <a:p>
             <a:endParaRPr lang="en-US" dirty="0"/>
@@ -7084,11 +6554,6 @@
         </p:txBody>
       </p:sp>
     </p:spTree>
-    <p:extLst>
-      <p:ext uri="{BB962C8B-B14F-4D97-AF65-F5344CB8AC3E}">
-        <p14:creationId xmlns:p14="http://schemas.microsoft.com/office/powerpoint/2010/main" val="3638801578"/>
-      </p:ext>
-    </p:extLst>
   </p:cSld>
   <p:clrMapOvr>
     <a:masterClrMapping/>
@@ -7115,13 +6580,7 @@
       </p:grpSpPr>
       <p:sp>
         <p:nvSpPr>
-          <p:cNvPr id="3" name="Content Placeholder 2">
-            <a:extLst>
-              <a:ext uri="{FF2B5EF4-FFF2-40B4-BE49-F238E27FC236}">
-                <a16:creationId xmlns:a16="http://schemas.microsoft.com/office/drawing/2014/main" id="{94DC103D-DD46-F49E-DFF6-52551E8E9EBB}"/>
-              </a:ext>
-            </a:extLst>
-          </p:cNvPr>
+          <p:cNvPr id="3" name="Content Placeholder 2"/>
           <p:cNvSpPr>
             <a:spLocks noGrp="1"/>
           </p:cNvSpPr>
@@ -7145,10 +6604,11 @@
               <a:rPr lang="en-US" dirty="0"/>
               <a:t>All this is accomplished through four primary MOLAP data analysis functions:</a:t>
             </a:r>
+            <a:endParaRPr lang="en-US" dirty="0"/>
           </a:p>
           <a:p>
             <a:pPr>
-              <a:buFont typeface="Arial" panose="020B0604020202020204" pitchFamily="34" charset="0"/>
+              <a:buFont typeface="Arial" panose="02080604020202020204" pitchFamily="34" charset="0"/>
               <a:buChar char="•"/>
             </a:pPr>
             <a:r>
@@ -7159,17 +6619,18 @@
               <a:rPr lang="en-US" dirty="0"/>
               <a:t> into more detailed data. For example, seeing which SKU delivered the highest growth in a product family, or going even more deeply to see how that growth differed by region or even individual stores within a region.</a:t>
             </a:r>
+            <a:endParaRPr lang="en-US" dirty="0"/>
           </a:p>
           <a:p>
             <a:pPr>
-              <a:buFont typeface="Arial" panose="020B0604020202020204" pitchFamily="34" charset="0"/>
+              <a:buFont typeface="Arial" panose="02080604020202020204" pitchFamily="34" charset="0"/>
               <a:buChar char="•"/>
             </a:pPr>
             <a:endParaRPr lang="en-US" dirty="0"/>
           </a:p>
           <a:p>
             <a:pPr>
-              <a:buFont typeface="Arial" panose="020B0604020202020204" pitchFamily="34" charset="0"/>
+              <a:buFont typeface="Arial" panose="02080604020202020204" pitchFamily="34" charset="0"/>
               <a:buChar char="•"/>
             </a:pPr>
             <a:r>
@@ -7180,17 +6641,18 @@
               <a:rPr lang="en-US" dirty="0"/>
               <a:t> into higher-level summary data — the opposite of the drill-down example, e.g., understanding performance by region instead of by state or county.</a:t>
             </a:r>
+            <a:endParaRPr lang="en-US" dirty="0"/>
           </a:p>
           <a:p>
             <a:pPr>
-              <a:buFont typeface="Arial" panose="020B0604020202020204" pitchFamily="34" charset="0"/>
+              <a:buFont typeface="Arial" panose="02080604020202020204" pitchFamily="34" charset="0"/>
               <a:buChar char="•"/>
             </a:pPr>
             <a:endParaRPr lang="en-US" dirty="0"/>
           </a:p>
           <a:p>
             <a:pPr>
-              <a:buFont typeface="Arial" panose="020B0604020202020204" pitchFamily="34" charset="0"/>
+              <a:buFont typeface="Arial" panose="02080604020202020204" pitchFamily="34" charset="0"/>
               <a:buChar char="•"/>
             </a:pPr>
             <a:r>
@@ -7201,17 +6663,18 @@
               <a:rPr lang="en-US" dirty="0"/>
               <a:t> to segment data. For example, exploring sales by product, month and store at the same time.</a:t>
             </a:r>
+            <a:endParaRPr lang="en-US" dirty="0"/>
           </a:p>
           <a:p>
             <a:pPr>
-              <a:buFont typeface="Arial" panose="020B0604020202020204" pitchFamily="34" charset="0"/>
+              <a:buFont typeface="Arial" panose="02080604020202020204" pitchFamily="34" charset="0"/>
               <a:buChar char="•"/>
             </a:pPr>
             <a:endParaRPr lang="en-US" dirty="0"/>
           </a:p>
           <a:p>
             <a:pPr>
-              <a:buFont typeface="Arial" panose="020B0604020202020204" pitchFamily="34" charset="0"/>
+              <a:buFont typeface="Arial" panose="02080604020202020204" pitchFamily="34" charset="0"/>
               <a:buChar char="•"/>
             </a:pPr>
             <a:r>
@@ -7222,6 +6685,7 @@
               <a:rPr lang="en-US" dirty="0"/>
               <a:t> to rotate the view of a selected data set so a business leader can view it from a different perspective. An example: viewing a product's sales during a given year by location, and then pivoting to view its overall sales over several years.</a:t>
             </a:r>
+            <a:endParaRPr lang="en-US" dirty="0"/>
           </a:p>
           <a:p>
             <a:endParaRPr lang="en-US" dirty="0"/>
@@ -7229,11 +6693,6 @@
         </p:txBody>
       </p:sp>
     </p:spTree>
-    <p:extLst>
-      <p:ext uri="{BB962C8B-B14F-4D97-AF65-F5344CB8AC3E}">
-        <p14:creationId xmlns:p14="http://schemas.microsoft.com/office/powerpoint/2010/main" val="1882470916"/>
-      </p:ext>
-    </p:extLst>
   </p:cSld>
   <p:clrMapOvr>
     <a:masterClrMapping/>
@@ -7260,13 +6719,7 @@
       </p:grpSpPr>
       <p:pic>
         <p:nvPicPr>
-          <p:cNvPr id="5" name="Content Placeholder 4">
-            <a:extLst>
-              <a:ext uri="{FF2B5EF4-FFF2-40B4-BE49-F238E27FC236}">
-                <a16:creationId xmlns:a16="http://schemas.microsoft.com/office/drawing/2014/main" id="{50F3DB05-2DA4-92A7-96DD-794ED4C53A02}"/>
-              </a:ext>
-            </a:extLst>
-          </p:cNvPr>
+          <p:cNvPr id="5" name="Content Placeholder 4"/>
           <p:cNvPicPr>
             <a:picLocks noGrp="1" noChangeAspect="1"/>
           </p:cNvPicPr>
@@ -7275,7 +6728,7 @@
           </p:nvPr>
         </p:nvPicPr>
         <p:blipFill>
-          <a:blip r:embed="rId2">
+          <a:blip r:embed="rId1">
             <a:extLst>
               <a:ext uri="{28A0092B-C50C-407E-A947-70E740481C1C}">
                 <a14:useLocalDpi xmlns:a14="http://schemas.microsoft.com/office/drawing/2010/main" val="0"/>
@@ -7294,11 +6747,6 @@
         </p:spPr>
       </p:pic>
     </p:spTree>
-    <p:extLst>
-      <p:ext uri="{BB962C8B-B14F-4D97-AF65-F5344CB8AC3E}">
-        <p14:creationId xmlns:p14="http://schemas.microsoft.com/office/powerpoint/2010/main" val="495109846"/>
-      </p:ext>
-    </p:extLst>
   </p:cSld>
   <p:clrMapOvr>
     <a:masterClrMapping/>
@@ -7325,13 +6773,7 @@
       </p:grpSpPr>
       <p:sp>
         <p:nvSpPr>
-          <p:cNvPr id="3" name="Content Placeholder 2">
-            <a:extLst>
-              <a:ext uri="{FF2B5EF4-FFF2-40B4-BE49-F238E27FC236}">
-                <a16:creationId xmlns:a16="http://schemas.microsoft.com/office/drawing/2014/main" id="{1DC41CD8-976F-6446-FCD6-83AAAB977395}"/>
-              </a:ext>
-            </a:extLst>
-          </p:cNvPr>
+          <p:cNvPr id="3" name="Content Placeholder 2"/>
           <p:cNvSpPr>
             <a:spLocks noGrp="1"/>
           </p:cNvSpPr>
@@ -7358,42 +6800,49 @@
               <a:rPr lang="en-US" b="1" dirty="0"/>
               <a:t>MOLAP Architecture</a:t>
             </a:r>
+            <a:endParaRPr lang="en-US" b="1" dirty="0"/>
           </a:p>
           <a:p>
             <a:r>
               <a:rPr lang="en-US" dirty="0"/>
               <a:t>A typical MOLAP system contains three conceptual components: </a:t>
             </a:r>
+            <a:endParaRPr lang="en-US" dirty="0"/>
           </a:p>
           <a:p>
             <a:r>
               <a:rPr lang="en-US" dirty="0"/>
               <a:t>Database server, </a:t>
             </a:r>
+            <a:endParaRPr lang="en-US" dirty="0"/>
           </a:p>
           <a:p>
             <a:r>
               <a:rPr lang="en-US" dirty="0"/>
               <a:t>MOLAP server </a:t>
             </a:r>
+            <a:endParaRPr lang="en-US" dirty="0"/>
           </a:p>
           <a:p>
             <a:r>
               <a:rPr lang="en-US" dirty="0"/>
               <a:t>Presentation tool</a:t>
             </a:r>
+            <a:endParaRPr lang="en-US" dirty="0"/>
           </a:p>
           <a:p>
             <a:r>
               <a:rPr lang="en-US" dirty="0"/>
               <a:t>That accepts analysts' queries and delivers the results. </a:t>
             </a:r>
+            <a:endParaRPr lang="en-US" dirty="0"/>
           </a:p>
           <a:p>
             <a:r>
               <a:rPr lang="en-US" dirty="0"/>
               <a:t>These work together in the following way:</a:t>
             </a:r>
+            <a:endParaRPr lang="en-US" dirty="0"/>
           </a:p>
           <a:p>
             <a:endParaRPr lang="en-US" dirty="0"/>
@@ -7403,18 +6852,21 @@
               <a:rPr lang="en-US" b="1" dirty="0"/>
               <a:t>Database server.</a:t>
             </a:r>
+            <a:endParaRPr lang="en-US" b="1" dirty="0"/>
           </a:p>
           <a:p>
             <a:r>
               <a:rPr lang="en-US" dirty="0"/>
               <a:t>In a traditional three-tier MOLAP architecture, the database server is the first tier.</a:t>
             </a:r>
+            <a:endParaRPr lang="en-US" dirty="0"/>
           </a:p>
           <a:p>
             <a:r>
               <a:rPr lang="en-US" dirty="0"/>
               <a:t>It serves as the repository for data that is extracted from multiple sources and then cleaned and integrated.</a:t>
             </a:r>
+            <a:endParaRPr lang="en-US" dirty="0"/>
           </a:p>
           <a:p>
             <a:endParaRPr lang="en-US" dirty="0"/>
@@ -7425,11 +6877,6 @@
         </p:txBody>
       </p:sp>
     </p:spTree>
-    <p:extLst>
-      <p:ext uri="{BB962C8B-B14F-4D97-AF65-F5344CB8AC3E}">
-        <p14:creationId xmlns:p14="http://schemas.microsoft.com/office/powerpoint/2010/main" val="164848125"/>
-      </p:ext>
-    </p:extLst>
   </p:cSld>
   <p:clrMapOvr>
     <a:masterClrMapping/>
@@ -7456,13 +6903,7 @@
       </p:grpSpPr>
       <p:sp>
         <p:nvSpPr>
-          <p:cNvPr id="3" name="Content Placeholder 2">
-            <a:extLst>
-              <a:ext uri="{FF2B5EF4-FFF2-40B4-BE49-F238E27FC236}">
-                <a16:creationId xmlns:a16="http://schemas.microsoft.com/office/drawing/2014/main" id="{C207C278-48C4-00A6-9795-E8A5141946CE}"/>
-              </a:ext>
-            </a:extLst>
-          </p:cNvPr>
+          <p:cNvPr id="3" name="Content Placeholder 2"/>
           <p:cNvSpPr>
             <a:spLocks noGrp="1"/>
           </p:cNvSpPr>
@@ -7489,6 +6930,7 @@
               <a:rPr lang="en-US" b="1" dirty="0"/>
               <a:t>MOLAP server.</a:t>
             </a:r>
+            <a:endParaRPr lang="en-US" b="1" dirty="0"/>
           </a:p>
           <a:p>
             <a:pPr algn="just"/>
@@ -7496,6 +6938,7 @@
               <a:rPr lang="en-US" dirty="0"/>
               <a:t>The middle tier of a MOLAP system is the MOLAP server, which retrieves data from the data warehouse (typically via SQL) and loads it into multidimensional data cubes optimized for the data requests business managers and analysts are expected to make.</a:t>
             </a:r>
+            <a:endParaRPr lang="en-US" dirty="0"/>
           </a:p>
           <a:p>
             <a:pPr marL="0" indent="0" algn="just">
@@ -7505,6 +6948,7 @@
               <a:rPr lang="en-US" dirty="0"/>
               <a:t> </a:t>
             </a:r>
+            <a:endParaRPr lang="en-US" dirty="0"/>
           </a:p>
           <a:p>
             <a:pPr algn="just"/>
@@ -7512,6 +6956,7 @@
               <a:rPr lang="en-US" dirty="0"/>
               <a:t>The MOLAP server also responds to those user queries, sending results to the presentation layer/user interface. </a:t>
             </a:r>
+            <a:endParaRPr lang="en-US" dirty="0"/>
           </a:p>
           <a:p>
             <a:endParaRPr lang="en-US" dirty="0"/>
@@ -7521,12 +6966,14 @@
               <a:rPr lang="en-US" b="1" dirty="0"/>
               <a:t>Presentation, or front-end, tool.</a:t>
             </a:r>
+            <a:endParaRPr lang="en-US" b="1" dirty="0"/>
           </a:p>
           <a:p>
             <a:r>
               <a:rPr lang="en-US" dirty="0"/>
               <a:t>Working through this tool, managers, analysts and other business professionals explore the information stored in data cubes in the MOLAP server. </a:t>
             </a:r>
+            <a:endParaRPr lang="en-US" dirty="0"/>
           </a:p>
           <a:p>
             <a:endParaRPr lang="en-US" dirty="0"/>
@@ -7536,6 +6983,7 @@
               <a:rPr lang="en-US" dirty="0"/>
               <a:t>They create requests, typically by using point-and-click tools. </a:t>
             </a:r>
+            <a:endParaRPr lang="en-US" dirty="0"/>
           </a:p>
           <a:p>
             <a:endParaRPr lang="en-US" dirty="0"/>
@@ -7545,6 +6993,7 @@
               <a:rPr lang="en-US" dirty="0"/>
               <a:t>Their requests are sent to the MOLAP server for processing, often using a data manipulation language created specifically to work with multidimensional data cubes and servers, such as MDX.</a:t>
             </a:r>
+            <a:endParaRPr lang="en-US" dirty="0"/>
           </a:p>
           <a:p>
             <a:endParaRPr lang="en-US" dirty="0"/>
@@ -7555,11 +7004,6 @@
         </p:txBody>
       </p:sp>
     </p:spTree>
-    <p:extLst>
-      <p:ext uri="{BB962C8B-B14F-4D97-AF65-F5344CB8AC3E}">
-        <p14:creationId xmlns:p14="http://schemas.microsoft.com/office/powerpoint/2010/main" val="2576330449"/>
-      </p:ext>
-    </p:extLst>
   </p:cSld>
   <p:clrMapOvr>
     <a:masterClrMapping/>
@@ -7586,13 +7030,7 @@
       </p:grpSpPr>
       <p:sp>
         <p:nvSpPr>
-          <p:cNvPr id="6" name="Content Placeholder 5">
-            <a:extLst>
-              <a:ext uri="{FF2B5EF4-FFF2-40B4-BE49-F238E27FC236}">
-                <a16:creationId xmlns:a16="http://schemas.microsoft.com/office/drawing/2014/main" id="{832A54A4-CB36-261E-7E98-973095EBF769}"/>
-              </a:ext>
-            </a:extLst>
-          </p:cNvPr>
+          <p:cNvPr id="6" name="Content Placeholder 5"/>
           <p:cNvSpPr>
             <a:spLocks noGrp="1"/>
           </p:cNvSpPr>
@@ -7614,6 +7052,7 @@
               <a:rPr lang="en-US" b="1" dirty="0"/>
               <a:t>Hybrid OLAP (HOLAP) Server</a:t>
             </a:r>
+            <a:endParaRPr lang="en-US" b="1" dirty="0"/>
           </a:p>
           <a:p>
             <a:endParaRPr lang="en-US" b="1" dirty="0"/>
@@ -7639,6 +7078,7 @@
               <a:rPr lang="en-US" dirty="0"/>
               <a:t> into a single architecture.</a:t>
             </a:r>
+            <a:endParaRPr lang="en-US" dirty="0"/>
           </a:p>
           <a:p>
             <a:endParaRPr lang="en-US" dirty="0"/>
@@ -7648,6 +7088,7 @@
               <a:rPr lang="en-US" dirty="0"/>
               <a:t> HOLAP systems save more substantial quantities of detailed data in the relational tables while the aggregations are stored in the pre-calculated cubes.</a:t>
             </a:r>
+            <a:endParaRPr lang="en-US" dirty="0"/>
           </a:p>
           <a:p>
             <a:endParaRPr lang="en-US" dirty="0"/>
@@ -7657,6 +7098,7 @@
               <a:rPr lang="en-US" dirty="0"/>
               <a:t> HOLAP also can drill through from the cube down to the relational tables for delineated data. </a:t>
             </a:r>
+            <a:endParaRPr lang="en-US" dirty="0"/>
           </a:p>
           <a:p>
             <a:endParaRPr lang="en-US" dirty="0"/>
@@ -7674,6 +7116,7 @@
               <a:rPr lang="en-US" dirty="0"/>
               <a:t> provides a hybrid OLAP server.</a:t>
             </a:r>
+            <a:endParaRPr lang="en-US" dirty="0"/>
           </a:p>
           <a:p>
             <a:endParaRPr lang="en-US" dirty="0"/>
@@ -7681,11 +7124,6 @@
         </p:txBody>
       </p:sp>
     </p:spTree>
-    <p:extLst>
-      <p:ext uri="{BB962C8B-B14F-4D97-AF65-F5344CB8AC3E}">
-        <p14:creationId xmlns:p14="http://schemas.microsoft.com/office/powerpoint/2010/main" val="88225282"/>
-      </p:ext>
-    </p:extLst>
   </p:cSld>
   <p:clrMapOvr>
     <a:masterClrMapping/>
@@ -7712,13 +7150,7 @@
       </p:grpSpPr>
       <p:pic>
         <p:nvPicPr>
-          <p:cNvPr id="5" name="Content Placeholder 4">
-            <a:extLst>
-              <a:ext uri="{FF2B5EF4-FFF2-40B4-BE49-F238E27FC236}">
-                <a16:creationId xmlns:a16="http://schemas.microsoft.com/office/drawing/2014/main" id="{C058BA26-DDC5-4D22-89DD-A921D242C47E}"/>
-              </a:ext>
-            </a:extLst>
-          </p:cNvPr>
+          <p:cNvPr id="5" name="Content Placeholder 4"/>
           <p:cNvPicPr>
             <a:picLocks noGrp="1" noChangeAspect="1"/>
           </p:cNvPicPr>
@@ -7727,7 +7159,7 @@
           </p:nvPr>
         </p:nvPicPr>
         <p:blipFill>
-          <a:blip r:embed="rId2">
+          <a:blip r:embed="rId1">
             <a:extLst>
               <a:ext uri="{28A0092B-C50C-407E-A947-70E740481C1C}">
                 <a14:useLocalDpi xmlns:a14="http://schemas.microsoft.com/office/drawing/2010/main" val="0"/>
@@ -7746,11 +7178,6 @@
         </p:spPr>
       </p:pic>
     </p:spTree>
-    <p:extLst>
-      <p:ext uri="{BB962C8B-B14F-4D97-AF65-F5344CB8AC3E}">
-        <p14:creationId xmlns:p14="http://schemas.microsoft.com/office/powerpoint/2010/main" val="3625782732"/>
-      </p:ext>
-    </p:extLst>
   </p:cSld>
   <p:clrMapOvr>
     <a:masterClrMapping/>
@@ -7777,13 +7204,7 @@
       </p:grpSpPr>
       <p:sp>
         <p:nvSpPr>
-          <p:cNvPr id="2" name="Title 1">
-            <a:extLst>
-              <a:ext uri="{FF2B5EF4-FFF2-40B4-BE49-F238E27FC236}">
-                <a16:creationId xmlns:a16="http://schemas.microsoft.com/office/drawing/2014/main" id="{D35F2594-60DF-2CCC-BC19-DD0BAE604B66}"/>
-              </a:ext>
-            </a:extLst>
-          </p:cNvPr>
+          <p:cNvPr id="2" name="Title 1"/>
           <p:cNvSpPr>
             <a:spLocks noGrp="1"/>
           </p:cNvSpPr>
@@ -7811,13 +7232,7 @@
       </p:sp>
       <p:sp>
         <p:nvSpPr>
-          <p:cNvPr id="3" name="Content Placeholder 2">
-            <a:extLst>
-              <a:ext uri="{FF2B5EF4-FFF2-40B4-BE49-F238E27FC236}">
-                <a16:creationId xmlns:a16="http://schemas.microsoft.com/office/drawing/2014/main" id="{B77C20C7-EF01-6C81-2166-F9982D0E2FF4}"/>
-              </a:ext>
-            </a:extLst>
-          </p:cNvPr>
+          <p:cNvPr id="3" name="Content Placeholder 2"/>
           <p:cNvSpPr>
             <a:spLocks noGrp="1"/>
           </p:cNvSpPr>
@@ -7842,6 +7257,7 @@
               <a:rPr lang="en-US" dirty="0"/>
               <a:t>Independent Data Mart is created directly from external sources instead of data warehouse.</a:t>
             </a:r>
+            <a:endParaRPr lang="en-US" dirty="0"/>
           </a:p>
           <a:p>
             <a:pPr algn="just"/>
@@ -7853,6 +7269,7 @@
               <a:rPr lang="en-US" dirty="0"/>
               <a:t>First data mart is created by extracting data from external sources and then data warehouse is created from the data present in data mart.</a:t>
             </a:r>
+            <a:endParaRPr lang="en-US" dirty="0"/>
           </a:p>
           <a:p>
             <a:pPr algn="just"/>
@@ -7864,6 +7281,7 @@
               <a:rPr lang="en-US" dirty="0"/>
               <a:t> Independent data mart is designed in bottom-up approach of data warehouse architecture.</a:t>
             </a:r>
+            <a:endParaRPr lang="en-US" dirty="0"/>
           </a:p>
           <a:p>
             <a:pPr algn="just"/>
@@ -7875,18 +7293,13 @@
               <a:rPr lang="en-US" dirty="0"/>
               <a:t>This model of data mart is used by small organizations and is cost effective comparatively. </a:t>
             </a:r>
+            <a:endParaRPr lang="en-US" dirty="0"/>
           </a:p>
         </p:txBody>
       </p:sp>
       <p:pic>
         <p:nvPicPr>
-          <p:cNvPr id="6" name="Content Placeholder 5">
-            <a:extLst>
-              <a:ext uri="{FF2B5EF4-FFF2-40B4-BE49-F238E27FC236}">
-                <a16:creationId xmlns:a16="http://schemas.microsoft.com/office/drawing/2014/main" id="{6FC39C0C-D01D-442F-DD79-00331F7FF28D}"/>
-              </a:ext>
-            </a:extLst>
-          </p:cNvPr>
+          <p:cNvPr id="6" name="Content Placeholder 5"/>
           <p:cNvPicPr>
             <a:picLocks noGrp="1" noChangeAspect="1"/>
           </p:cNvPicPr>
@@ -7895,7 +7308,7 @@
           </p:nvPr>
         </p:nvPicPr>
         <p:blipFill>
-          <a:blip r:embed="rId2">
+          <a:blip r:embed="rId1">
             <a:extLst>
               <a:ext uri="{28A0092B-C50C-407E-A947-70E740481C1C}">
                 <a14:useLocalDpi xmlns:a14="http://schemas.microsoft.com/office/drawing/2010/main" val="0"/>
@@ -7914,91 +7327,6 @@
         </p:spPr>
       </p:pic>
     </p:spTree>
-    <p:extLst>
-      <p:ext uri="{BB962C8B-B14F-4D97-AF65-F5344CB8AC3E}">
-        <p14:creationId xmlns:p14="http://schemas.microsoft.com/office/powerpoint/2010/main" val="1248436240"/>
-      </p:ext>
-    </p:extLst>
-  </p:cSld>
-  <p:clrMapOvr>
-    <a:masterClrMapping/>
-  </p:clrMapOvr>
-</p:sld>
-</file>
-
-<file path=ppt/slides/slide40.xml><?xml version="1.0" encoding="utf-8"?>
-<p:sld xmlns:a="http://schemas.openxmlformats.org/drawingml/2006/main" xmlns:r="http://schemas.openxmlformats.org/officeDocument/2006/relationships" xmlns:p="http://schemas.openxmlformats.org/presentationml/2006/main">
-  <p:cSld>
-    <p:spTree>
-      <p:nvGrpSpPr>
-        <p:cNvPr id="1" name=""/>
-        <p:cNvGrpSpPr/>
-        <p:nvPr/>
-      </p:nvGrpSpPr>
-      <p:grpSpPr>
-        <a:xfrm>
-          <a:off x="0" y="0"/>
-          <a:ext cx="0" cy="0"/>
-          <a:chOff x="0" y="0"/>
-          <a:chExt cx="0" cy="0"/>
-        </a:xfrm>
-      </p:grpSpPr>
-      <p:sp>
-        <p:nvSpPr>
-          <p:cNvPr id="2" name="Title 1">
-            <a:extLst>
-              <a:ext uri="{FF2B5EF4-FFF2-40B4-BE49-F238E27FC236}">
-                <a16:creationId xmlns:a16="http://schemas.microsoft.com/office/drawing/2014/main" id="{E55E6088-1DE8-51A8-37E6-E7FDA70E4F06}"/>
-              </a:ext>
-            </a:extLst>
-          </p:cNvPr>
-          <p:cNvSpPr>
-            <a:spLocks noGrp="1"/>
-          </p:cNvSpPr>
-          <p:nvPr>
-            <p:ph type="title"/>
-          </p:nvPr>
-        </p:nvSpPr>
-        <p:spPr/>
-        <p:txBody>
-          <a:bodyPr/>
-          <a:lstStyle/>
-          <a:p>
-            <a:endParaRPr lang="en-US"/>
-          </a:p>
-        </p:txBody>
-      </p:sp>
-      <p:sp>
-        <p:nvSpPr>
-          <p:cNvPr id="3" name="Content Placeholder 2">
-            <a:extLst>
-              <a:ext uri="{FF2B5EF4-FFF2-40B4-BE49-F238E27FC236}">
-                <a16:creationId xmlns:a16="http://schemas.microsoft.com/office/drawing/2014/main" id="{066BDC7D-C92F-2379-FB37-111773094598}"/>
-              </a:ext>
-            </a:extLst>
-          </p:cNvPr>
-          <p:cNvSpPr>
-            <a:spLocks noGrp="1"/>
-          </p:cNvSpPr>
-          <p:nvPr>
-            <p:ph idx="1"/>
-          </p:nvPr>
-        </p:nvSpPr>
-        <p:spPr/>
-        <p:txBody>
-          <a:bodyPr/>
-          <a:lstStyle/>
-          <a:p>
-            <a:endParaRPr lang="en-US"/>
-          </a:p>
-        </p:txBody>
-      </p:sp>
-    </p:spTree>
-    <p:extLst>
-      <p:ext uri="{BB962C8B-B14F-4D97-AF65-F5344CB8AC3E}">
-        <p14:creationId xmlns:p14="http://schemas.microsoft.com/office/powerpoint/2010/main" val="2095813916"/>
-      </p:ext>
-    </p:extLst>
   </p:cSld>
   <p:clrMapOvr>
     <a:masterClrMapping/>
@@ -8025,13 +7353,7 @@
       </p:grpSpPr>
       <p:sp>
         <p:nvSpPr>
-          <p:cNvPr id="2" name="Title 1">
-            <a:extLst>
-              <a:ext uri="{FF2B5EF4-FFF2-40B4-BE49-F238E27FC236}">
-                <a16:creationId xmlns:a16="http://schemas.microsoft.com/office/drawing/2014/main" id="{8FFE3F91-A758-C527-4318-465FD4B5FC66}"/>
-              </a:ext>
-            </a:extLst>
-          </p:cNvPr>
+          <p:cNvPr id="2" name="Title 1"/>
           <p:cNvSpPr>
             <a:spLocks noGrp="1"/>
           </p:cNvSpPr>
@@ -8054,13 +7376,7 @@
       </p:sp>
       <p:pic>
         <p:nvPicPr>
-          <p:cNvPr id="7" name="Content Placeholder 6">
-            <a:extLst>
-              <a:ext uri="{FF2B5EF4-FFF2-40B4-BE49-F238E27FC236}">
-                <a16:creationId xmlns:a16="http://schemas.microsoft.com/office/drawing/2014/main" id="{B42AC841-D4D8-0180-FADB-4820ECE0D654}"/>
-              </a:ext>
-            </a:extLst>
-          </p:cNvPr>
+          <p:cNvPr id="7" name="Content Placeholder 6"/>
           <p:cNvPicPr>
             <a:picLocks noGrp="1" noChangeAspect="1"/>
           </p:cNvPicPr>
@@ -8069,7 +7385,7 @@
           </p:nvPr>
         </p:nvPicPr>
         <p:blipFill>
-          <a:blip r:embed="rId2">
+          <a:blip r:embed="rId1">
             <a:extLst>
               <a:ext uri="{28A0092B-C50C-407E-A947-70E740481C1C}">
                 <a14:useLocalDpi xmlns:a14="http://schemas.microsoft.com/office/drawing/2010/main" val="0"/>
@@ -8089,13 +7405,7 @@
       </p:pic>
       <p:sp>
         <p:nvSpPr>
-          <p:cNvPr id="4" name="Content Placeholder 3">
-            <a:extLst>
-              <a:ext uri="{FF2B5EF4-FFF2-40B4-BE49-F238E27FC236}">
-                <a16:creationId xmlns:a16="http://schemas.microsoft.com/office/drawing/2014/main" id="{CEBE4DDA-FA7D-777E-38D0-E7056DCC4BEC}"/>
-              </a:ext>
-            </a:extLst>
-          </p:cNvPr>
+          <p:cNvPr id="4" name="Content Placeholder 3"/>
           <p:cNvSpPr>
             <a:spLocks noGrp="1"/>
           </p:cNvSpPr>
@@ -8123,6 +7433,7 @@
               <a:rPr lang="en-US" dirty="0"/>
               <a:t>This type of Data Mart is created by extracting data from operational source or from data warehouse.</a:t>
             </a:r>
+            <a:endParaRPr lang="en-US" dirty="0"/>
           </a:p>
           <a:p>
             <a:endParaRPr lang="en-US" dirty="0"/>
@@ -8132,15 +7443,11 @@
               <a:rPr lang="en-US" dirty="0"/>
               <a:t> 1Path reflects accessing data directly from external sources and 2Path reflects dependent data model of data mart. </a:t>
             </a:r>
+            <a:endParaRPr lang="en-US" dirty="0"/>
           </a:p>
         </p:txBody>
       </p:sp>
     </p:spTree>
-    <p:extLst>
-      <p:ext uri="{BB962C8B-B14F-4D97-AF65-F5344CB8AC3E}">
-        <p14:creationId xmlns:p14="http://schemas.microsoft.com/office/powerpoint/2010/main" val="1999467833"/>
-      </p:ext>
-    </p:extLst>
   </p:cSld>
   <p:clrMapOvr>
     <a:masterClrMapping/>
@@ -8167,13 +7474,7 @@
       </p:grpSpPr>
       <p:sp>
         <p:nvSpPr>
-          <p:cNvPr id="3" name="Content Placeholder 2">
-            <a:extLst>
-              <a:ext uri="{FF2B5EF4-FFF2-40B4-BE49-F238E27FC236}">
-                <a16:creationId xmlns:a16="http://schemas.microsoft.com/office/drawing/2014/main" id="{6C5C2A85-5BC3-B1ED-B07C-057E965A93FC}"/>
-              </a:ext>
-            </a:extLst>
-          </p:cNvPr>
+          <p:cNvPr id="3" name="Content Placeholder 2"/>
           <p:cNvSpPr>
             <a:spLocks noGrp="1"/>
           </p:cNvSpPr>
@@ -8199,6 +7500,7 @@
               <a:rPr lang="en-US" dirty="0"/>
               <a:t> </a:t>
             </a:r>
+            <a:endParaRPr lang="en-US" dirty="0"/>
           </a:p>
           <a:p>
             <a:endParaRPr lang="en-US" dirty="0"/>
@@ -8212,6 +7514,7 @@
               <a:rPr lang="en-US" dirty="0"/>
               <a:t>Data Mart focuses only on functioning of particular department of an organization. </a:t>
             </a:r>
+            <a:endParaRPr lang="en-US" dirty="0"/>
           </a:p>
           <a:p>
             <a:pPr>
@@ -8229,6 +7532,7 @@
               <a:rPr lang="en-US" dirty="0"/>
               <a:t>It is maintained by single authority of an organization. </a:t>
             </a:r>
+            <a:endParaRPr lang="en-US" dirty="0"/>
           </a:p>
           <a:p>
             <a:pPr>
@@ -8246,6 +7550,7 @@
               <a:rPr lang="en-US" dirty="0"/>
               <a:t>Since, it stores the data related to specific part of an organization, data retrieval from it is very quick. </a:t>
             </a:r>
+            <a:endParaRPr lang="en-US" dirty="0"/>
           </a:p>
           <a:p>
             <a:endParaRPr lang="en-US" dirty="0"/>
@@ -8253,11 +7558,6 @@
         </p:txBody>
       </p:sp>
     </p:spTree>
-    <p:extLst>
-      <p:ext uri="{BB962C8B-B14F-4D97-AF65-F5344CB8AC3E}">
-        <p14:creationId xmlns:p14="http://schemas.microsoft.com/office/powerpoint/2010/main" val="102365048"/>
-      </p:ext>
-    </p:extLst>
   </p:cSld>
   <p:clrMapOvr>
     <a:masterClrMapping/>
@@ -8284,13 +7584,7 @@
       </p:grpSpPr>
       <p:sp>
         <p:nvSpPr>
-          <p:cNvPr id="3" name="Content Placeholder 2">
-            <a:extLst>
-              <a:ext uri="{FF2B5EF4-FFF2-40B4-BE49-F238E27FC236}">
-                <a16:creationId xmlns:a16="http://schemas.microsoft.com/office/drawing/2014/main" id="{718D1804-7E8B-36AF-D85D-7A17905733FF}"/>
-              </a:ext>
-            </a:extLst>
-          </p:cNvPr>
+          <p:cNvPr id="3" name="Content Placeholder 2"/>
           <p:cNvSpPr>
             <a:spLocks noGrp="1"/>
           </p:cNvSpPr>
@@ -8318,6 +7612,7 @@
               <a:rPr lang="en-US" dirty="0"/>
               <a:t> </a:t>
             </a:r>
+            <a:endParaRPr lang="en-US" dirty="0"/>
           </a:p>
           <a:p>
             <a:pPr>
@@ -8328,6 +7623,7 @@
               <a:rPr lang="en-US" dirty="0"/>
               <a:t>Implementation of data mart needs less time as compared to implementation of data ware house as data mart is designed for a particular department of an organization. </a:t>
             </a:r>
+            <a:endParaRPr lang="en-US" dirty="0"/>
           </a:p>
           <a:p>
             <a:pPr>
@@ -8345,6 +7641,7 @@
               <a:rPr lang="en-US" dirty="0"/>
               <a:t>Data can be easily accessed from data mart. </a:t>
             </a:r>
+            <a:endParaRPr lang="en-US" dirty="0"/>
           </a:p>
           <a:p>
             <a:pPr>
@@ -8362,21 +7659,16 @@
               <a:rPr lang="en-US" dirty="0"/>
               <a:t>It contains frequently accessed queries, so enable to analyze business trend. </a:t>
             </a:r>
-          </a:p>
-          <a:p>
-            <a:endParaRPr lang="en-US" dirty="0"/>
-          </a:p>
-        </p:txBody>
-      </p:sp>
-      <p:sp>
-        <p:nvSpPr>
-          <p:cNvPr id="4" name="Content Placeholder 3">
-            <a:extLst>
-              <a:ext uri="{FF2B5EF4-FFF2-40B4-BE49-F238E27FC236}">
-                <a16:creationId xmlns:a16="http://schemas.microsoft.com/office/drawing/2014/main" id="{2709D894-094F-0B6A-21B7-9B1C72ADFF34}"/>
-              </a:ext>
-            </a:extLst>
-          </p:cNvPr>
+            <a:endParaRPr lang="en-US" dirty="0"/>
+          </a:p>
+          <a:p>
+            <a:endParaRPr lang="en-US" dirty="0"/>
+          </a:p>
+        </p:txBody>
+      </p:sp>
+      <p:sp>
+        <p:nvSpPr>
+          <p:cNvPr id="4" name="Content Placeholder 3"/>
           <p:cNvSpPr>
             <a:spLocks noGrp="1"/>
           </p:cNvSpPr>
@@ -8404,6 +7696,7 @@
               <a:rPr lang="en-US" dirty="0"/>
               <a:t>  </a:t>
             </a:r>
+            <a:endParaRPr lang="en-US" dirty="0"/>
           </a:p>
           <a:p>
             <a:pPr>
@@ -8422,6 +7715,7 @@
               <a:rPr lang="en-US" dirty="0"/>
               <a:t> house. </a:t>
             </a:r>
+            <a:endParaRPr lang="en-US" dirty="0"/>
           </a:p>
           <a:p>
             <a:pPr>
@@ -8446,6 +7740,7 @@
               <a:rPr lang="en-US" dirty="0"/>
               <a:t> </a:t>
             </a:r>
+            <a:endParaRPr lang="en-US" dirty="0"/>
           </a:p>
           <a:p>
             <a:endParaRPr lang="en-US" dirty="0"/>
@@ -8453,11 +7748,6 @@
         </p:txBody>
       </p:sp>
     </p:spTree>
-    <p:extLst>
-      <p:ext uri="{BB962C8B-B14F-4D97-AF65-F5344CB8AC3E}">
-        <p14:creationId xmlns:p14="http://schemas.microsoft.com/office/powerpoint/2010/main" val="141529600"/>
-      </p:ext>
-    </p:extLst>
   </p:cSld>
   <p:clrMapOvr>
     <a:masterClrMapping/>
@@ -8484,13 +7774,7 @@
       </p:grpSpPr>
       <p:sp>
         <p:nvSpPr>
-          <p:cNvPr id="3" name="Content Placeholder 2">
-            <a:extLst>
-              <a:ext uri="{FF2B5EF4-FFF2-40B4-BE49-F238E27FC236}">
-                <a16:creationId xmlns:a16="http://schemas.microsoft.com/office/drawing/2014/main" id="{47B88857-791B-E36B-E696-04BE57009C66}"/>
-              </a:ext>
-            </a:extLst>
-          </p:cNvPr>
+          <p:cNvPr id="3" name="Content Placeholder 2"/>
           <p:cNvSpPr>
             <a:spLocks noGrp="1"/>
           </p:cNvSpPr>
@@ -8506,14 +7790,37 @@
         </p:spPr>
         <p:txBody>
           <a:bodyPr>
-            <a:normAutofit fontScale="92500" lnSpcReduction="10000"/>
+            <a:normAutofit fontScale="92500" lnSpcReduction="20000"/>
           </a:bodyPr>
           <a:lstStyle/>
           <a:p>
             <a:r>
-              <a:rPr lang="en-US" dirty="0"/>
+              <a:rPr lang="en-US" sz="3890" b="1" dirty="0">
+                <a:solidFill>
+                  <a:schemeClr val="tx1"/>
+                </a:solidFill>
+                <a:effectLst>
+                  <a:outerShdw blurRad="38100" dist="19050" dir="2700000" algn="tl" rotWithShape="0">
+                    <a:schemeClr val="dk1">
+                      <a:alpha val="40000"/>
+                    </a:schemeClr>
+                  </a:outerShdw>
+                </a:effectLst>
+              </a:rPr>
               <a:t>Metadata</a:t>
             </a:r>
+            <a:endParaRPr lang="en-US" sz="3890" b="1" dirty="0">
+              <a:solidFill>
+                <a:schemeClr val="tx1"/>
+              </a:solidFill>
+              <a:effectLst>
+                <a:outerShdw blurRad="38100" dist="19050" dir="2700000" algn="tl" rotWithShape="0">
+                  <a:schemeClr val="dk1">
+                    <a:alpha val="40000"/>
+                  </a:schemeClr>
+                </a:outerShdw>
+              </a:effectLst>
+            </a:endParaRPr>
           </a:p>
           <a:p>
             <a:endParaRPr lang="en-US" dirty="0"/>
@@ -8523,6 +7830,7 @@
               <a:rPr lang="en-US" dirty="0"/>
               <a:t>Often referred to as data that describes other data, metadata is structured reference data that helps to sort and identify attributes of the information it describes.</a:t>
             </a:r>
+            <a:endParaRPr lang="en-US" dirty="0"/>
           </a:p>
           <a:p>
             <a:endParaRPr lang="en-US" dirty="0"/>
@@ -8532,6 +7840,7 @@
               <a:rPr lang="en-US" dirty="0"/>
               <a:t>Meta is a prefix that -- in most information technology usages -- means "an underlying definition or description.</a:t>
             </a:r>
+            <a:endParaRPr lang="en-US" dirty="0"/>
           </a:p>
           <a:p>
             <a:endParaRPr lang="en-US" dirty="0"/>
@@ -8541,6 +7850,7 @@
               <a:rPr lang="en-US" dirty="0"/>
               <a:t>" Metadata summarizes basic information about data, which can make it easier to find, use and reuse particular instances of data.</a:t>
             </a:r>
+            <a:endParaRPr lang="en-US" dirty="0"/>
           </a:p>
           <a:p>
             <a:endParaRPr lang="en-US" dirty="0"/>
@@ -8550,6 +7860,7 @@
               <a:rPr lang="en-US" dirty="0"/>
               <a:t>For example, author, date created, date modified and file size are examples of very basic document file metadata. </a:t>
             </a:r>
+            <a:endParaRPr lang="en-US" dirty="0"/>
           </a:p>
           <a:p>
             <a:endParaRPr lang="en-US" dirty="0"/>
@@ -8559,6 +7870,7 @@
               <a:rPr lang="en-US" dirty="0"/>
               <a:t>Having the ability to search for a particular element (or elements) of that metadata makes it much easier for someone to locate a specific document. </a:t>
             </a:r>
+            <a:endParaRPr lang="en-US" dirty="0"/>
           </a:p>
           <a:p>
             <a:endParaRPr lang="en-US" dirty="0"/>
@@ -8566,11 +7878,6 @@
         </p:txBody>
       </p:sp>
     </p:spTree>
-    <p:extLst>
-      <p:ext uri="{BB962C8B-B14F-4D97-AF65-F5344CB8AC3E}">
-        <p14:creationId xmlns:p14="http://schemas.microsoft.com/office/powerpoint/2010/main" val="2501172431"/>
-      </p:ext>
-    </p:extLst>
   </p:cSld>
   <p:clrMapOvr>
     <a:masterClrMapping/>
@@ -8597,13 +7904,7 @@
       </p:grpSpPr>
       <p:sp>
         <p:nvSpPr>
-          <p:cNvPr id="3" name="Content Placeholder 2">
-            <a:extLst>
-              <a:ext uri="{FF2B5EF4-FFF2-40B4-BE49-F238E27FC236}">
-                <a16:creationId xmlns:a16="http://schemas.microsoft.com/office/drawing/2014/main" id="{3925BD25-FC0C-805C-6197-3318806E8319}"/>
-              </a:ext>
-            </a:extLst>
-          </p:cNvPr>
+          <p:cNvPr id="3" name="Content Placeholder 2"/>
           <p:cNvSpPr>
             <a:spLocks noGrp="1"/>
           </p:cNvSpPr>
@@ -8625,79 +7926,87 @@
               <a:rPr lang="en-US" dirty="0"/>
               <a:t>In addition to document files, metadata is used for:</a:t>
             </a:r>
+            <a:endParaRPr lang="en-US" dirty="0"/>
           </a:p>
           <a:p>
             <a:endParaRPr lang="en-US" dirty="0"/>
           </a:p>
           <a:p>
             <a:pPr>
-              <a:buFont typeface="Arial" panose="020B0604020202020204" pitchFamily="34" charset="0"/>
+              <a:buFont typeface="Arial" panose="02080604020202020204" pitchFamily="34" charset="0"/>
               <a:buChar char="•"/>
             </a:pPr>
             <a:r>
               <a:rPr lang="en-US" dirty="0"/>
               <a:t>computer files</a:t>
             </a:r>
+            <a:endParaRPr lang="en-US" dirty="0"/>
           </a:p>
           <a:p>
             <a:pPr>
-              <a:buFont typeface="Arial" panose="020B0604020202020204" pitchFamily="34" charset="0"/>
+              <a:buFont typeface="Arial" panose="02080604020202020204" pitchFamily="34" charset="0"/>
               <a:buChar char="•"/>
             </a:pPr>
             <a:r>
               <a:rPr lang="en-US" dirty="0"/>
               <a:t>images</a:t>
             </a:r>
+            <a:endParaRPr lang="en-US" dirty="0"/>
           </a:p>
           <a:p>
             <a:pPr>
-              <a:buFont typeface="Arial" panose="020B0604020202020204" pitchFamily="34" charset="0"/>
+              <a:buFont typeface="Arial" panose="02080604020202020204" pitchFamily="34" charset="0"/>
               <a:buChar char="•"/>
             </a:pPr>
             <a:r>
               <a:rPr lang="en-US" dirty="0"/>
               <a:t>relational databases</a:t>
             </a:r>
+            <a:endParaRPr lang="en-US" dirty="0"/>
           </a:p>
           <a:p>
             <a:pPr>
-              <a:buFont typeface="Arial" panose="020B0604020202020204" pitchFamily="34" charset="0"/>
+              <a:buFont typeface="Arial" panose="02080604020202020204" pitchFamily="34" charset="0"/>
               <a:buChar char="•"/>
             </a:pPr>
             <a:r>
               <a:rPr lang="en-US" dirty="0"/>
               <a:t>spreadsheets</a:t>
             </a:r>
+            <a:endParaRPr lang="en-US" dirty="0"/>
           </a:p>
           <a:p>
             <a:pPr>
-              <a:buFont typeface="Arial" panose="020B0604020202020204" pitchFamily="34" charset="0"/>
+              <a:buFont typeface="Arial" panose="02080604020202020204" pitchFamily="34" charset="0"/>
               <a:buChar char="•"/>
             </a:pPr>
             <a:r>
               <a:rPr lang="en-US" dirty="0"/>
               <a:t>videos</a:t>
             </a:r>
+            <a:endParaRPr lang="en-US" dirty="0"/>
           </a:p>
           <a:p>
             <a:pPr>
-              <a:buFont typeface="Arial" panose="020B0604020202020204" pitchFamily="34" charset="0"/>
+              <a:buFont typeface="Arial" panose="02080604020202020204" pitchFamily="34" charset="0"/>
               <a:buChar char="•"/>
             </a:pPr>
             <a:r>
               <a:rPr lang="en-US" dirty="0"/>
               <a:t>audio files</a:t>
             </a:r>
+            <a:endParaRPr lang="en-US" dirty="0"/>
           </a:p>
           <a:p>
             <a:pPr>
-              <a:buFont typeface="Arial" panose="020B0604020202020204" pitchFamily="34" charset="0"/>
+              <a:buFont typeface="Arial" panose="02080604020202020204" pitchFamily="34" charset="0"/>
               <a:buChar char="•"/>
             </a:pPr>
             <a:r>
               <a:rPr lang="en-US" dirty="0"/>
               <a:t>web pages</a:t>
             </a:r>
+            <a:endParaRPr lang="en-US" dirty="0"/>
           </a:p>
           <a:p>
             <a:endParaRPr lang="en-US" dirty="0"/>
@@ -8705,11 +8014,6 @@
         </p:txBody>
       </p:sp>
     </p:spTree>
-    <p:extLst>
-      <p:ext uri="{BB962C8B-B14F-4D97-AF65-F5344CB8AC3E}">
-        <p14:creationId xmlns:p14="http://schemas.microsoft.com/office/powerpoint/2010/main" val="1112744078"/>
-      </p:ext>
-    </p:extLst>
   </p:cSld>
   <p:clrMapOvr>
     <a:masterClrMapping/>
@@ -8760,7 +8064,7 @@
     </a:clrScheme>
     <a:fontScheme name="Office">
       <a:majorFont>
-        <a:latin typeface="Calibri Light" panose="020F0302020204030204"/>
+        <a:latin typeface="Calibri Light"/>
         <a:ea typeface=""/>
         <a:cs typeface=""/>
         <a:font script="Jpan" typeface="游ゴシック Light"/>
@@ -8793,26 +8097,9 @@
         <a:font script="Viet" typeface="Times New Roman"/>
         <a:font script="Uigh" typeface="Microsoft Uighur"/>
         <a:font script="Geor" typeface="Sylfaen"/>
-        <a:font script="Armn" typeface="Arial"/>
-        <a:font script="Bugi" typeface="Leelawadee UI"/>
-        <a:font script="Bopo" typeface="Microsoft JhengHei"/>
-        <a:font script="Java" typeface="Javanese Text"/>
-        <a:font script="Lisu" typeface="Segoe UI"/>
-        <a:font script="Mymr" typeface="Myanmar Text"/>
-        <a:font script="Nkoo" typeface="Ebrima"/>
-        <a:font script="Olck" typeface="Nirmala UI"/>
-        <a:font script="Osma" typeface="Ebrima"/>
-        <a:font script="Phag" typeface="Phagspa"/>
-        <a:font script="Syrn" typeface="Estrangelo Edessa"/>
-        <a:font script="Syrj" typeface="Estrangelo Edessa"/>
-        <a:font script="Syre" typeface="Estrangelo Edessa"/>
-        <a:font script="Sora" typeface="Nirmala UI"/>
-        <a:font script="Tale" typeface="Microsoft Tai Le"/>
-        <a:font script="Talu" typeface="Microsoft New Tai Lue"/>
-        <a:font script="Tfng" typeface="Ebrima"/>
       </a:majorFont>
       <a:minorFont>
-        <a:latin typeface="Calibri" panose="020F0502020204030204"/>
+        <a:latin typeface="Calibri"/>
         <a:ea typeface=""/>
         <a:cs typeface=""/>
         <a:font script="Jpan" typeface="游ゴシック"/>
@@ -8845,23 +8132,6 @@
         <a:font script="Viet" typeface="Arial"/>
         <a:font script="Uigh" typeface="Microsoft Uighur"/>
         <a:font script="Geor" typeface="Sylfaen"/>
-        <a:font script="Armn" typeface="Arial"/>
-        <a:font script="Bugi" typeface="Leelawadee UI"/>
-        <a:font script="Bopo" typeface="Microsoft JhengHei"/>
-        <a:font script="Java" typeface="Javanese Text"/>
-        <a:font script="Lisu" typeface="Segoe UI"/>
-        <a:font script="Mymr" typeface="Myanmar Text"/>
-        <a:font script="Nkoo" typeface="Ebrima"/>
-        <a:font script="Olck" typeface="Nirmala UI"/>
-        <a:font script="Osma" typeface="Ebrima"/>
-        <a:font script="Phag" typeface="Phagspa"/>
-        <a:font script="Syrn" typeface="Estrangelo Edessa"/>
-        <a:font script="Syrj" typeface="Estrangelo Edessa"/>
-        <a:font script="Syre" typeface="Estrangelo Edessa"/>
-        <a:font script="Sora" typeface="Nirmala UI"/>
-        <a:font script="Tale" typeface="Microsoft Tai Le"/>
-        <a:font script="Talu" typeface="Microsoft New Tai Lue"/>
-        <a:font script="Tfng" typeface="Ebrima"/>
       </a:minorFont>
     </a:fontScheme>
     <a:fmtScheme name="Office">
@@ -9002,8 +8272,6 @@
       </a:bgFillStyleLst>
     </a:fmtScheme>
   </a:themeElements>
-  <a:objectDefaults/>
-  <a:extraClrSchemeLst/>
   <a:extLst>
     <a:ext uri="{05A4C25C-085E-4340-85A3-A5531E510DB2}">
       <thm15:themeFamily xmlns:thm15="http://schemas.microsoft.com/office/thememl/2012/main" name="Office Theme" id="{62F939B6-93AF-4DB8-9C6B-D6C7DFDC589F}" vid="{4A3C46E8-61CC-4603-A589-7422A47A8E4A}"/>
